--- a/project/pantry-example-midterm/PROJECT.pptx
+++ b/project/pantry-example-midterm/PROJECT.pptx
@@ -4,6 +4,9 @@
   <p:sldMasterIdLst>
     <p:sldMasterId id="2147483648" r:id="rId1"/>
   </p:sldMasterIdLst>
+  <p:notesMasterIdLst>
+    <p:notesMasterId r:id="rId16"/>
+  </p:notesMasterIdLst>
   <p:sldIdLst>
     <p:sldId id="256" r:id="rId2"/>
     <p:sldId id="257" r:id="rId3"/>
@@ -15,16 +18,12 @@
     <p:sldId id="263" r:id="rId9"/>
     <p:sldId id="264" r:id="rId10"/>
     <p:sldId id="265" r:id="rId11"/>
-    <p:sldId id="266" r:id="rId12"/>
-    <p:sldId id="267" r:id="rId13"/>
-    <p:sldId id="268" r:id="rId14"/>
-    <p:sldId id="269" r:id="rId15"/>
-    <p:sldId id="270" r:id="rId16"/>
+    <p:sldId id="267" r:id="rId12"/>
+    <p:sldId id="268" r:id="rId13"/>
+    <p:sldId id="269" r:id="rId14"/>
+    <p:sldId id="270" r:id="rId15"/>
   </p:sldIdLst>
-  <p:notesMasterIdLst>
-    <p:notesMasterId r:id="rId17"/>
-  </p:notesMasterIdLst>
-  <p:sldSz cx="9144000" cy="5143500"/>
+  <p:sldSz cx="9144000" cy="5143500" type="screen16x9"/>
   <p:notesSz cx="5143500" cy="9144000"/>
   <p:defaultTextStyle>
     <a:lvl1pPr marL="0" algn="l" defTabSz="914400" rtl="0" eaLnBrk="1" latinLnBrk="0" hangingPunct="1">
@@ -121,12 +120,12 @@
   <p:extLst>
     <p:ext uri="{521415D9-36F7-43E2-AB2F-B90AF26B5E84}">
       <p14:sectionLst xmlns:p14="http://schemas.microsoft.com/office/powerpoint/2010/main">
-        <p14:section name="Title" id="{563f18ab-b1c3-e58c-707a-579f62ad4626}">
+        <p14:section name="Title" id="{563F18AB-B1C3-E58C-707A-579F62AD4626}">
           <p14:sldIdLst>
             <p14:sldId id="256"/>
           </p14:sldIdLst>
         </p14:section>
-        <p14:section name="Part 2 — Pitch" id="{3bd73c7d-6ac5-29d9-350b-e7e3347fe0e3}">
+        <p14:section name="Part 2 — Pitch" id="{3BD73C7D-6AC5-29D9-350B-E7E3347FE0E3}">
           <p14:sldIdLst>
             <p14:sldId id="257"/>
             <p14:sldId id="258"/>
@@ -135,17 +134,16 @@
             <p14:sldId id="261"/>
           </p14:sldIdLst>
         </p14:section>
-        <p14:section name="Part 3 — Prototype" id="{97486112-c7ac-920e-37ab-68924d95a8bb}">
+        <p14:section name="Part 3 — Prototype" id="{97486112-C7AC-920E-37AB-68924D95A8BB}">
           <p14:sldIdLst>
             <p14:sldId id="262"/>
             <p14:sldId id="263"/>
             <p14:sldId id="264"/>
           </p14:sldIdLst>
         </p14:section>
-        <p14:section name="Part 3 — API design" id="{90bc2dbf-8dcb-ab71-c50e-a785d6b3016f}">
+        <p14:section name="Part 3 — API design" id="{90BC2DBF-8DCB-AB71-C50E-A785D6B3016F}">
           <p14:sldIdLst>
             <p14:sldId id="265"/>
-            <p14:sldId id="266"/>
             <p14:sldId id="267"/>
             <p14:sldId id="268"/>
             <p14:sldId id="269"/>
@@ -183,234 +181,10 @@
           <a:chExt cx="0" cy="0"/>
         </a:xfrm>
       </p:grpSpPr>
-      <p:sp>
-        <p:nvSpPr>
-          <p:cNvPr id="2" name="Header Placeholder 1"/>
-          <p:cNvSpPr>
-            <a:spLocks noGrp="1"/>
-          </p:cNvSpPr>
-          <p:nvPr>
-            <p:ph type="hdr" sz="quarter"/>
-          </p:nvPr>
-        </p:nvSpPr>
-        <p:spPr>
-          <a:xfrm>
-            <a:off x="0" y="0"/>
-            <a:ext cx="2971800" cy="458788"/>
-          </a:xfrm>
-          <a:prstGeom prst="rect">
-            <a:avLst/>
-          </a:prstGeom>
-        </p:spPr>
-        <p:txBody>
-          <a:bodyPr vert="horz" lIns="91440" tIns="45720" rIns="91440" bIns="45720" rtlCol="0"/>
-          <a:lstStyle>
-            <a:lvl1pPr algn="l">
-              <a:defRPr sz="1200"/>
-            </a:lvl1pPr>
-          </a:lstStyle>
-          <a:p>
-            <a:endParaRPr lang="en-US"/>
-          </a:p>
-        </p:txBody>
-      </p:sp>
-      <p:sp>
-        <p:nvSpPr>
-          <p:cNvPr id="3" name="Date Placeholder 2"/>
-          <p:cNvSpPr>
-            <a:spLocks noGrp="1"/>
-          </p:cNvSpPr>
-          <p:nvPr>
-            <p:ph type="dt" idx="1"/>
-          </p:nvPr>
-        </p:nvSpPr>
-        <p:spPr>
-          <a:xfrm>
-            <a:off x="3884613" y="0"/>
-            <a:ext cx="2971800" cy="458788"/>
-          </a:xfrm>
-          <a:prstGeom prst="rect">
-            <a:avLst/>
-          </a:prstGeom>
-        </p:spPr>
-        <p:txBody>
-          <a:bodyPr vert="horz" lIns="91440" tIns="45720" rIns="91440" bIns="45720" rtlCol="0"/>
-          <a:lstStyle>
-            <a:lvl1pPr algn="r">
-              <a:defRPr sz="1200"/>
-            </a:lvl1pPr>
-          </a:lstStyle>
-          <a:p>
-            <a:fld id="{5282F153-3F37-0F45-9E97-73ACFA13230C}" type="datetimeFigureOut">
-              <a:rPr lang="en-US"/>
-              <a:t>7/23/19</a:t>
-            </a:fld>
-            <a:endParaRPr lang="en-US"/>
-          </a:p>
-        </p:txBody>
-      </p:sp>
-      <p:sp>
-        <p:nvSpPr>
-          <p:cNvPr id="4" name="Slide Image Placeholder 3"/>
-          <p:cNvSpPr>
-            <a:spLocks noGrp="1" noRot="1" noChangeAspect="1"/>
-          </p:cNvSpPr>
-          <p:nvPr>
-            <p:ph type="sldImg" idx="2"/>
-          </p:nvPr>
-        </p:nvSpPr>
-        <p:spPr>
-          <a:xfrm>
-            <a:off x="685800" y="1143000"/>
-            <a:ext cx="5486400" cy="3086100"/>
-          </a:xfrm>
-          <a:prstGeom prst="rect">
-            <a:avLst/>
-          </a:prstGeom>
-          <a:noFill/>
-          <a:ln w="12700">
-            <a:solidFill>
-              <a:prstClr val="black"/>
-            </a:solidFill>
-          </a:ln>
-        </p:spPr>
-        <p:txBody>
-          <a:bodyPr vert="horz" lIns="91440" tIns="45720" rIns="91440" bIns="45720" rtlCol="0" anchor="ctr"/>
-          <a:lstStyle/>
-          <a:p>
-            <a:endParaRPr lang="en-US"/>
-          </a:p>
-        </p:txBody>
-      </p:sp>
-      <p:sp>
-        <p:nvSpPr>
-          <p:cNvPr id="5" name="Notes Placeholder 4"/>
-          <p:cNvSpPr>
-            <a:spLocks noGrp="1"/>
-          </p:cNvSpPr>
-          <p:nvPr>
-            <p:ph type="body" sz="quarter" idx="3"/>
-          </p:nvPr>
-        </p:nvSpPr>
-        <p:spPr>
-          <a:xfrm>
-            <a:off x="685800" y="4400550"/>
-            <a:ext cx="5486400" cy="3600450"/>
-          </a:xfrm>
-          <a:prstGeom prst="rect">
-            <a:avLst/>
-          </a:prstGeom>
-        </p:spPr>
-        <p:txBody>
-          <a:bodyPr vert="horz" lIns="91440" tIns="45720" rIns="91440" bIns="45720" rtlCol="0"/>
-          <a:lstStyle/>
-          <a:p>
-            <a:pPr lvl="0"/>
-            <a:r>
-              <a:rPr lang="en-US"/>
-              <a:t>Click to edit Master text styles</a:t>
-            </a:r>
-          </a:p>
-          <a:p>
-            <a:pPr lvl="1"/>
-            <a:r>
-              <a:rPr lang="en-US"/>
-              <a:t>Second level</a:t>
-            </a:r>
-          </a:p>
-          <a:p>
-            <a:pPr lvl="2"/>
-            <a:r>
-              <a:rPr lang="en-US"/>
-              <a:t>Third level</a:t>
-            </a:r>
-          </a:p>
-          <a:p>
-            <a:pPr lvl="3"/>
-            <a:r>
-              <a:rPr lang="en-US"/>
-              <a:t>Fourth level</a:t>
-            </a:r>
-          </a:p>
-          <a:p>
-            <a:pPr lvl="4"/>
-            <a:r>
-              <a:rPr lang="en-US"/>
-              <a:t>Fifth level</a:t>
-            </a:r>
-          </a:p>
-        </p:txBody>
-      </p:sp>
-      <p:sp>
-        <p:nvSpPr>
-          <p:cNvPr id="6" name="Footer Placeholder 5"/>
-          <p:cNvSpPr>
-            <a:spLocks noGrp="1"/>
-          </p:cNvSpPr>
-          <p:nvPr>
-            <p:ph type="ftr" sz="quarter" idx="4"/>
-          </p:nvPr>
-        </p:nvSpPr>
-        <p:spPr>
-          <a:xfrm>
-            <a:off x="0" y="8685213"/>
-            <a:ext cx="2971800" cy="458787"/>
-          </a:xfrm>
-          <a:prstGeom prst="rect">
-            <a:avLst/>
-          </a:prstGeom>
-        </p:spPr>
-        <p:txBody>
-          <a:bodyPr vert="horz" lIns="91440" tIns="45720" rIns="91440" bIns="45720" rtlCol="0" anchor="b"/>
-          <a:lstStyle>
-            <a:lvl1pPr algn="l">
-              <a:defRPr sz="1200"/>
-            </a:lvl1pPr>
-          </a:lstStyle>
-          <a:p>
-            <a:endParaRPr lang="en-US"/>
-          </a:p>
-        </p:txBody>
-      </p:sp>
-      <p:sp>
-        <p:nvSpPr>
-          <p:cNvPr id="7" name="Slide Number Placeholder 6"/>
-          <p:cNvSpPr>
-            <a:spLocks noGrp="1"/>
-          </p:cNvSpPr>
-          <p:nvPr>
-            <p:ph type="sldNum" sz="quarter" idx="5"/>
-          </p:nvPr>
-        </p:nvSpPr>
-        <p:spPr>
-          <a:xfrm>
-            <a:off x="3884613" y="8685213"/>
-            <a:ext cx="2971800" cy="458787"/>
-          </a:xfrm>
-          <a:prstGeom prst="rect">
-            <a:avLst/>
-          </a:prstGeom>
-        </p:spPr>
-        <p:txBody>
-          <a:bodyPr vert="horz" lIns="91440" tIns="45720" rIns="91440" bIns="45720" rtlCol="0" anchor="b"/>
-          <a:lstStyle>
-            <a:lvl1pPr algn="r">
-              <a:defRPr sz="1200"/>
-            </a:lvl1pPr>
-          </a:lstStyle>
-          <a:p>
-            <a:fld id="{CE5E9CC1-C706-0F49-92D6-E571CC5EEA8F}" type="slidenum">
-              <a:rPr lang="en-US"/>
-              <a:t>‹#›</a:t>
-            </a:fld>
-            <a:endParaRPr lang="en-US"/>
-          </a:p>
-        </p:txBody>
-      </p:sp>
     </p:spTree>
     <p:extLst>
       <p:ext uri="{BB962C8B-B14F-4D97-AF65-F5344CB8AC3E}">
-        <p14:creationId xmlns:p14="http://schemas.microsoft.com/office/powerpoint/2010/main" val="1024086991"/>
+        <p14:creationId xmlns:p14="http://schemas.microsoft.com/office/powerpoint/2010/main" val="1037254038"/>
       </p:ext>
     </p:extLst>
   </p:cSld>
@@ -558,7 +332,6 @@
               <a:rPr lang="en-US" dirty="0"/>
               <a:t>A sample midterm project. It follows Part 3 of PROJECT_v3.pdf, and Part 2 (the pitch) is kept as the record.</a:t>
             </a:r>
-            <a:endParaRPr lang="en-US" dirty="0"/>
           </a:p>
         </p:txBody>
       </p:sp>
@@ -642,10 +415,6 @@
           <a:bodyPr/>
           <a:lstStyle/>
           <a:p>
-            <a:r>
-              <a:rPr lang="en-US" dirty="0"/>
-              <a:t/>
-            </a:r>
             <a:endParaRPr lang="en-US" dirty="0"/>
           </a:p>
         </p:txBody>
@@ -730,10 +499,6 @@
           <a:bodyPr/>
           <a:lstStyle/>
           <a:p>
-            <a:r>
-              <a:rPr lang="en-US" dirty="0"/>
-              <a:t/>
-            </a:r>
             <a:endParaRPr lang="en-US" dirty="0"/>
           </a:p>
         </p:txBody>
@@ -818,10 +583,6 @@
           <a:bodyPr/>
           <a:lstStyle/>
           <a:p>
-            <a:r>
-              <a:rPr lang="en-US" dirty="0"/>
-              <a:t/>
-            </a:r>
             <a:endParaRPr lang="en-US" dirty="0"/>
           </a:p>
         </p:txBody>
@@ -906,10 +667,6 @@
           <a:bodyPr/>
           <a:lstStyle/>
           <a:p>
-            <a:r>
-              <a:rPr lang="en-US" dirty="0"/>
-              <a:t/>
-            </a:r>
             <a:endParaRPr lang="en-US" dirty="0"/>
           </a:p>
         </p:txBody>
@@ -994,10 +751,6 @@
           <a:bodyPr/>
           <a:lstStyle/>
           <a:p>
-            <a:r>
-              <a:rPr lang="en-US" dirty="0"/>
-              <a:t/>
-            </a:r>
             <a:endParaRPr lang="en-US" dirty="0"/>
           </a:p>
         </p:txBody>
@@ -1020,94 +773,6 @@
             <a:fld id="{F7021451-1387-4CA6-816F-3879F97B5CBC}" type="slidenum">
               <a:rPr lang="en-US"/>
               <a:t>14</a:t>
-            </a:fld>
-            <a:endParaRPr lang="en-US"/>
-          </a:p>
-        </p:txBody>
-      </p:sp>
-    </p:spTree>
-    <p:extLst>
-      <p:ext uri="{BB962C8B-B14F-4D97-AF65-F5344CB8AC3E}">
-        <p14:creationId xmlns:p14="http://schemas.microsoft.com/office/powerpoint/2010/main" val="1024086991"/>
-      </p:ext>
-    </p:extLst>
-  </p:cSld>
-  <p:clrMapOvr>
-    <a:masterClrMapping/>
-  </p:clrMapOvr>
-</p:notes>
-</file>
-
-<file path=ppt/notesSlides/notesSlide15.xml><?xml version="1.0" encoding="utf-8"?>
-<p:notes xmlns:a="http://schemas.openxmlformats.org/drawingml/2006/main" xmlns:r="http://schemas.openxmlformats.org/officeDocument/2006/relationships" xmlns:p="http://schemas.openxmlformats.org/presentationml/2006/main">
-  <p:cSld>
-    <p:spTree>
-      <p:nvGrpSpPr>
-        <p:cNvPr id="1" name=""/>
-        <p:cNvGrpSpPr/>
-        <p:nvPr/>
-      </p:nvGrpSpPr>
-      <p:grpSpPr>
-        <a:xfrm>
-          <a:off x="0" y="0"/>
-          <a:ext cx="0" cy="0"/>
-          <a:chOff x="0" y="0"/>
-          <a:chExt cx="0" cy="0"/>
-        </a:xfrm>
-      </p:grpSpPr>
-      <p:sp>
-        <p:nvSpPr>
-          <p:cNvPr id="2" name="Slide Image Placeholder 1"/>
-          <p:cNvSpPr>
-            <a:spLocks noGrp="1" noRot="1" noChangeAspect="1"/>
-          </p:cNvSpPr>
-          <p:nvPr>
-            <p:ph type="sldImg"/>
-          </p:nvPr>
-        </p:nvSpPr>
-        <p:spPr/>
-      </p:sp>
-      <p:sp>
-        <p:nvSpPr>
-          <p:cNvPr id="3" name="Notes Placeholder 2"/>
-          <p:cNvSpPr>
-            <a:spLocks noGrp="1"/>
-          </p:cNvSpPr>
-          <p:nvPr>
-            <p:ph type="body" idx="1"/>
-          </p:nvPr>
-        </p:nvSpPr>
-        <p:spPr/>
-        <p:txBody>
-          <a:bodyPr/>
-          <a:lstStyle/>
-          <a:p>
-            <a:r>
-              <a:rPr lang="en-US" dirty="0"/>
-              <a:t/>
-            </a:r>
-            <a:endParaRPr lang="en-US" dirty="0"/>
-          </a:p>
-        </p:txBody>
-      </p:sp>
-      <p:sp>
-        <p:nvSpPr>
-          <p:cNvPr id="4" name="Slide Number Placeholder 3"/>
-          <p:cNvSpPr>
-            <a:spLocks noGrp="1"/>
-          </p:cNvSpPr>
-          <p:nvPr>
-            <p:ph type="sldNum" sz="quarter" idx="10"/>
-          </p:nvPr>
-        </p:nvSpPr>
-        <p:spPr/>
-        <p:txBody>
-          <a:bodyPr/>
-          <a:lstStyle/>
-          <a:p>
-            <a:fld id="{F7021451-1387-4CA6-816F-3879F97B5CBC}" type="slidenum">
-              <a:rPr lang="en-US"/>
-              <a:t>15</a:t>
             </a:fld>
             <a:endParaRPr lang="en-US"/>
           </a:p>
@@ -1170,10 +835,6 @@
           <a:bodyPr/>
           <a:lstStyle/>
           <a:p>
-            <a:r>
-              <a:rPr lang="en-US" dirty="0"/>
-              <a:t/>
-            </a:r>
             <a:endParaRPr lang="en-US" dirty="0"/>
           </a:p>
         </p:txBody>
@@ -1258,10 +919,6 @@
           <a:bodyPr/>
           <a:lstStyle/>
           <a:p>
-            <a:r>
-              <a:rPr lang="en-US" dirty="0"/>
-              <a:t/>
-            </a:r>
             <a:endParaRPr lang="en-US" dirty="0"/>
           </a:p>
         </p:txBody>
@@ -1346,10 +1003,6 @@
           <a:bodyPr/>
           <a:lstStyle/>
           <a:p>
-            <a:r>
-              <a:rPr lang="en-US" dirty="0"/>
-              <a:t/>
-            </a:r>
             <a:endParaRPr lang="en-US" dirty="0"/>
           </a:p>
         </p:txBody>
@@ -1434,10 +1087,6 @@
           <a:bodyPr/>
           <a:lstStyle/>
           <a:p>
-            <a:r>
-              <a:rPr lang="en-US" dirty="0"/>
-              <a:t/>
-            </a:r>
             <a:endParaRPr lang="en-US" dirty="0"/>
           </a:p>
         </p:txBody>
@@ -1522,10 +1171,6 @@
           <a:bodyPr/>
           <a:lstStyle/>
           <a:p>
-            <a:r>
-              <a:rPr lang="en-US" dirty="0"/>
-              <a:t/>
-            </a:r>
             <a:endParaRPr lang="en-US" dirty="0"/>
           </a:p>
         </p:txBody>
@@ -1610,10 +1255,6 @@
           <a:bodyPr/>
           <a:lstStyle/>
           <a:p>
-            <a:r>
-              <a:rPr lang="en-US" dirty="0"/>
-              <a:t/>
-            </a:r>
             <a:endParaRPr lang="en-US" dirty="0"/>
           </a:p>
         </p:txBody>
@@ -1698,10 +1339,6 @@
           <a:bodyPr/>
           <a:lstStyle/>
           <a:p>
-            <a:r>
-              <a:rPr lang="en-US" dirty="0"/>
-              <a:t/>
-            </a:r>
             <a:endParaRPr lang="en-US" dirty="0"/>
           </a:p>
         </p:txBody>
@@ -1786,10 +1423,6 @@
           <a:bodyPr/>
           <a:lstStyle/>
           <a:p>
-            <a:r>
-              <a:rPr lang="en-US" dirty="0"/>
-              <a:t/>
-            </a:r>
             <a:endParaRPr lang="en-US" dirty="0"/>
           </a:p>
         </p:txBody>
@@ -1868,6 +1501,7 @@
         <a:solidFill>
           <a:srgbClr val="1F3D2B"/>
         </a:solidFill>
+        <a:effectLst/>
       </p:bgPr>
     </p:bg>
     <p:spTree>
@@ -1887,9 +1521,11 @@
       <p:sp>
         <p:nvSpPr>
           <p:cNvPr id="2" name="Text 0"/>
-          <p:cNvSpPr/>
+          <p:cNvSpPr>
+            <a:spLocks noGrp="1"/>
+          </p:cNvSpPr>
           <p:nvPr>
-            <p:ph idx="100" type="title" hasCustomPrompt="1"/>
+            <p:ph type="title" idx="100" hasCustomPrompt="1"/>
           </p:nvPr>
         </p:nvSpPr>
         <p:spPr>
@@ -1906,7 +1542,7 @@
         <p:txBody>
           <a:bodyPr wrap="square" rtlCol="0"/>
           <a:lstStyle>
-            <a:lvl1pPr algn="l" indent="0" marL="0">
+            <a:lvl1pPr marL="0" indent="0" algn="l">
               <a:buNone/>
               <a:defRPr lang="en-US" sz="4400" b="1" dirty="0">
                 <a:solidFill>
@@ -1919,7 +1555,7 @@
             </a:lvl1pPr>
           </a:lstStyle>
           <a:p>
-            <a:pPr algn="l" indent="0" marL="0">
+            <a:pPr marL="0" indent="0" algn="l">
               <a:buNone/>
             </a:pPr>
             <a:endParaRPr lang="en-US" sz="4400" dirty="0"/>
@@ -1929,9 +1565,11 @@
       <p:sp>
         <p:nvSpPr>
           <p:cNvPr id="3" name="Text 0"/>
-          <p:cNvSpPr/>
+          <p:cNvSpPr>
+            <a:spLocks noGrp="1"/>
+          </p:cNvSpPr>
           <p:nvPr>
-            <p:ph idx="101" type="body" hasCustomPrompt="1"/>
+            <p:ph type="body" idx="101" hasCustomPrompt="1"/>
           </p:nvPr>
         </p:nvSpPr>
         <p:spPr>
@@ -1948,7 +1586,7 @@
         <p:txBody>
           <a:bodyPr wrap="square" rtlCol="0"/>
           <a:lstStyle>
-            <a:lvl1pPr algn="l" indent="0" marL="0">
+            <a:lvl1pPr marL="0" indent="0" algn="l">
               <a:buNone/>
               <a:defRPr lang="en-US" sz="2000" dirty="0">
                 <a:solidFill>
@@ -1961,7 +1599,7 @@
             </a:lvl1pPr>
           </a:lstStyle>
           <a:p>
-            <a:pPr algn="l" indent="0" marL="0">
+            <a:pPr marL="0" indent="0" algn="l">
               <a:buNone/>
             </a:pPr>
             <a:endParaRPr lang="en-US" sz="2000" dirty="0"/>
@@ -1984,6 +1622,7 @@
         <a:solidFill>
           <a:srgbClr val="1F3D2B"/>
         </a:solidFill>
+        <a:effectLst/>
       </p:bgPr>
     </p:bg>
     <p:spTree>
@@ -2003,9 +1642,11 @@
       <p:sp>
         <p:nvSpPr>
           <p:cNvPr id="2" name="Text 0"/>
-          <p:cNvSpPr/>
+          <p:cNvSpPr>
+            <a:spLocks noGrp="1"/>
+          </p:cNvSpPr>
           <p:nvPr>
-            <p:ph idx="100" type="title" hasCustomPrompt="1"/>
+            <p:ph type="title" idx="100" hasCustomPrompt="1"/>
           </p:nvPr>
         </p:nvSpPr>
         <p:spPr>
@@ -2022,7 +1663,7 @@
         <p:txBody>
           <a:bodyPr wrap="square" rtlCol="0"/>
           <a:lstStyle>
-            <a:lvl1pPr algn="l" indent="0" marL="0">
+            <a:lvl1pPr marL="0" indent="0" algn="l">
               <a:buNone/>
               <a:defRPr lang="en-US" sz="3800" b="1" dirty="0">
                 <a:solidFill>
@@ -2035,7 +1676,7 @@
             </a:lvl1pPr>
           </a:lstStyle>
           <a:p>
-            <a:pPr algn="l" indent="0" marL="0">
+            <a:pPr marL="0" indent="0" algn="l">
               <a:buNone/>
             </a:pPr>
             <a:endParaRPr lang="en-US" sz="3800" dirty="0"/>
@@ -2045,9 +1686,11 @@
       <p:sp>
         <p:nvSpPr>
           <p:cNvPr id="3" name="Text 0"/>
-          <p:cNvSpPr/>
+          <p:cNvSpPr>
+            <a:spLocks noGrp="1"/>
+          </p:cNvSpPr>
           <p:nvPr>
-            <p:ph idx="101" type="body" hasCustomPrompt="1"/>
+            <p:ph type="body" idx="101" hasCustomPrompt="1"/>
           </p:nvPr>
         </p:nvSpPr>
         <p:spPr>
@@ -2064,7 +1707,7 @@
         <p:txBody>
           <a:bodyPr wrap="square" rtlCol="0"/>
           <a:lstStyle>
-            <a:lvl1pPr algn="l" indent="0" marL="0">
+            <a:lvl1pPr marL="0" indent="0" algn="l">
               <a:buNone/>
               <a:defRPr lang="en-US" sz="1800" dirty="0">
                 <a:solidFill>
@@ -2077,7 +1720,7 @@
             </a:lvl1pPr>
           </a:lstStyle>
           <a:p>
-            <a:pPr algn="l" indent="0" marL="0">
+            <a:pPr marL="0" indent="0" algn="l">
               <a:buNone/>
             </a:pPr>
             <a:endParaRPr lang="en-US" sz="1800" dirty="0"/>
@@ -2104,7 +1747,7 @@
           </a:prstGeom>
           <a:extLst>
             <a:ext uri="{C572A759-6A51-4108-AA02-DFA0A04FC94B}">
-              <ma14:wrappingTextBoxFlag xmlns:ma14="http://schemas.microsoft.com/office/mac/drawingml/2011/main" val="0"/>
+              <ma14:wrappingTextBoxFlag xmlns:ma14="http://schemas.microsoft.com/office/mac/drawingml/2011/main" xmlns="" val="0"/>
             </a:ext>
           </a:extLst>
         </p:spPr>
@@ -2125,8 +1768,8 @@
           <a:p>
             <a:pPr algn="r"/>
             <a:fld id="{F7021451-1387-4CA6-816F-3879F97B5CBC}" type="slidenum">
-              <a:rPr b="0" lang="en-US"/>
-              <a:t>1003</a:t>
+              <a:rPr lang="en-US" b="0"/>
+              <a:t>‹#›</a:t>
             </a:fld>
             <a:endParaRPr lang="en-US"/>
           </a:p>
@@ -2148,6 +1791,7 @@
         <a:solidFill>
           <a:srgbClr val="FFFFFF"/>
         </a:solidFill>
+        <a:effectLst/>
       </p:bgPr>
     </p:bg>
     <p:spTree>
@@ -2167,9 +1811,11 @@
       <p:sp>
         <p:nvSpPr>
           <p:cNvPr id="2" name="Text 0"/>
-          <p:cNvSpPr/>
+          <p:cNvSpPr>
+            <a:spLocks noGrp="1"/>
+          </p:cNvSpPr>
           <p:nvPr>
-            <p:ph idx="100" type="title" hasCustomPrompt="1"/>
+            <p:ph type="title" idx="100" hasCustomPrompt="1"/>
           </p:nvPr>
         </p:nvSpPr>
         <p:spPr>
@@ -2186,7 +1832,7 @@
         <p:txBody>
           <a:bodyPr wrap="square" rtlCol="0"/>
           <a:lstStyle>
-            <a:lvl1pPr algn="l" indent="0" marL="0">
+            <a:lvl1pPr marL="0" indent="0" algn="l">
               <a:buNone/>
               <a:defRPr lang="en-US" sz="2800" b="1" dirty="0">
                 <a:solidFill>
@@ -2199,7 +1845,7 @@
             </a:lvl1pPr>
           </a:lstStyle>
           <a:p>
-            <a:pPr algn="l" indent="0" marL="0">
+            <a:pPr marL="0" indent="0" algn="l">
               <a:buNone/>
             </a:pPr>
             <a:endParaRPr lang="en-US" sz="2800" dirty="0"/>
@@ -2227,7 +1873,7 @@
           <a:bodyPr wrap="square" lIns="0" tIns="0" rIns="0" bIns="0" rtlCol="0" anchor="ctr"/>
           <a:lstStyle/>
           <a:p>
-            <a:pPr indent="0" marL="0">
+            <a:pPr marL="0" indent="0">
               <a:buNone/>
             </a:pPr>
             <a:r>
@@ -2265,7 +1911,7 @@
           </a:prstGeom>
           <a:extLst>
             <a:ext uri="{C572A759-6A51-4108-AA02-DFA0A04FC94B}">
-              <ma14:wrappingTextBoxFlag xmlns:ma14="http://schemas.microsoft.com/office/mac/drawingml/2011/main" val="0"/>
+              <ma14:wrappingTextBoxFlag xmlns:ma14="http://schemas.microsoft.com/office/mac/drawingml/2011/main" xmlns="" val="0"/>
             </a:ext>
           </a:extLst>
         </p:spPr>
@@ -2286,8 +1932,8 @@
           <a:p>
             <a:pPr algn="r"/>
             <a:fld id="{F7021451-1387-4CA6-816F-3879F97B5CBC}" type="slidenum">
-              <a:rPr b="0" lang="en-US"/>
-              <a:t>1004</a:t>
+              <a:rPr lang="en-US" b="0"/>
+              <a:t>‹#›</a:t>
             </a:fld>
             <a:endParaRPr lang="en-US"/>
           </a:p>
@@ -2304,6 +1950,11 @@
 <file path=ppt/slideMasters/slideMaster1.xml><?xml version="1.0" encoding="utf-8"?>
 <p:sldMaster xmlns:a="http://schemas.openxmlformats.org/drawingml/2006/main" xmlns:r="http://schemas.openxmlformats.org/officeDocument/2006/relationships" xmlns:p="http://schemas.openxmlformats.org/presentationml/2006/main">
   <p:cSld>
+    <p:bg>
+      <p:bgRef idx="1001">
+        <a:schemeClr val="bg1"/>
+      </p:bgRef>
+    </p:bg>
     <p:spTree>
       <p:nvGrpSpPr>
         <p:cNvPr id="1" name=""/>
@@ -2338,7 +1989,7 @@
           </a:prstGeom>
           <a:extLst>
             <a:ext uri="{C572A759-6A51-4108-AA02-DFA0A04FC94B}">
-              <ma14:wrappingTextBoxFlag xmlns:ma14="http://schemas.microsoft.com/office/mac/drawingml/2011/main" val="0"/>
+              <ma14:wrappingTextBoxFlag xmlns:ma14="http://schemas.microsoft.com/office/mac/drawingml/2011/main" xmlns="" val="0"/>
             </a:ext>
           </a:extLst>
         </p:spPr>
@@ -2359,8 +2010,8 @@
           <a:p>
             <a:pPr algn="r"/>
             <a:fld id="{F7021451-1387-4CA6-816F-3879F97B5CBC}" type="slidenum">
-              <a:rPr b="0" lang="en-US"/>
-              <a:t>null</a:t>
+              <a:rPr lang="en-US" b="0"/>
+              <a:t>‹#›</a:t>
             </a:fld>
             <a:endParaRPr lang="en-US"/>
           </a:p>
@@ -2649,9 +2300,11 @@
       <p:sp>
         <p:nvSpPr>
           <p:cNvPr id="2" name="Text 0"/>
-          <p:cNvSpPr/>
+          <p:cNvSpPr>
+            <a:spLocks noGrp="1"/>
+          </p:cNvSpPr>
           <p:nvPr>
-            <p:ph idx="100" type="title" hasCustomPrompt="1"/>
+            <p:ph type="title" idx="100" hasCustomPrompt="1"/>
           </p:nvPr>
         </p:nvSpPr>
         <p:spPr>
@@ -2669,7 +2322,7 @@
           <a:bodyPr wrap="square" lIns="0" tIns="0" rIns="0" bIns="0" rtlCol="0" anchor="b"/>
           <a:lstStyle/>
           <a:p>
-            <a:pPr algn="l" indent="0" marL="0">
+            <a:pPr marL="0" indent="0" algn="l">
               <a:buNone/>
             </a:pPr>
             <a:r>
@@ -2690,9 +2343,11 @@
       <p:sp>
         <p:nvSpPr>
           <p:cNvPr id="3" name="Text 0"/>
-          <p:cNvSpPr/>
+          <p:cNvSpPr>
+            <a:spLocks noGrp="1"/>
+          </p:cNvSpPr>
           <p:nvPr>
-            <p:ph idx="101" type="body" hasCustomPrompt="1"/>
+            <p:ph type="body" idx="101" hasCustomPrompt="1"/>
           </p:nvPr>
         </p:nvSpPr>
         <p:spPr>
@@ -2710,7 +2365,7 @@
           <a:bodyPr wrap="square" lIns="0" tIns="0" rIns="0" bIns="0" rtlCol="0" anchor="t"/>
           <a:lstStyle/>
           <a:p>
-            <a:pPr algn="l" indent="0" marL="0">
+            <a:pPr marL="0" indent="0" algn="l">
               <a:buNone/>
             </a:pPr>
             <a:r>
@@ -2727,7 +2382,7 @@
             <a:endParaRPr lang="en-US" sz="2000" dirty="0"/>
           </a:p>
           <a:p>
-            <a:pPr algn="l" indent="0" marL="0">
+            <a:pPr marL="0" indent="0" algn="l">
               <a:buNone/>
             </a:pPr>
             <a:r>
@@ -2796,6 +2451,13 @@
             <a:prstDash val="solid"/>
           </a:ln>
         </p:spPr>
+        <p:txBody>
+          <a:bodyPr/>
+          <a:lstStyle/>
+          <a:p>
+            <a:endParaRPr lang="en-US"/>
+          </a:p>
+        </p:txBody>
       </p:sp>
       <p:sp>
         <p:nvSpPr>
@@ -2818,11 +2480,11 @@
           <a:bodyPr wrap="square" lIns="0" tIns="0" rIns="0" bIns="0" rtlCol="0" anchor="ctr"/>
           <a:lstStyle/>
           <a:p>
-            <a:pPr algn="ctr" indent="0" marL="0">
+            <a:pPr marL="0" indent="0" algn="ctr">
               <a:buNone/>
             </a:pPr>
             <a:r>
-              <a:rPr lang="en-US" sz="1000" b="1" spc="100" kern="0" dirty="0">
+              <a:rPr lang="en-US" sz="1000" b="1" kern="0" spc="100" dirty="0">
                 <a:solidFill>
                   <a:srgbClr val="FFFFFF"/>
                 </a:solidFill>
@@ -2836,9 +2498,11 @@
       <p:sp>
         <p:nvSpPr>
           <p:cNvPr id="4" name="Text 0"/>
-          <p:cNvSpPr/>
+          <p:cNvSpPr>
+            <a:spLocks noGrp="1"/>
+          </p:cNvSpPr>
           <p:nvPr>
-            <p:ph idx="100" type="title" hasCustomPrompt="1"/>
+            <p:ph type="title" idx="100" hasCustomPrompt="1"/>
           </p:nvPr>
         </p:nvSpPr>
         <p:spPr>
@@ -2856,7 +2520,7 @@
           <a:bodyPr wrap="square" lIns="0" tIns="0" rIns="0" bIns="0" rtlCol="0" anchor="ctr"/>
           <a:lstStyle/>
           <a:p>
-            <a:pPr algn="l" indent="0" marL="0">
+            <a:pPr marL="0" indent="0" algn="l">
               <a:buNone/>
             </a:pPr>
             <a:r>
@@ -2895,7 +2559,7 @@
           <a:bodyPr wrap="square" lIns="0" tIns="0" rIns="0" bIns="0" rtlCol="0" anchor="ctr"/>
           <a:lstStyle/>
           <a:p>
-            <a:pPr indent="0" marL="0">
+            <a:pPr marL="0" indent="0">
               <a:buNone/>
             </a:pPr>
             <a:r>
@@ -2926,17 +2590,41 @@
         </p:nvGraphicFramePr>
         <p:xfrm>
           <a:off x="457200" y="1463040"/>
-          <a:ext cx="8229600" cy="914400"/>
+          <a:ext cx="8229600" cy="2773680"/>
         </p:xfrm>
         <a:graphic>
           <a:graphicData uri="http://schemas.openxmlformats.org/drawingml/2006/table">
             <a:tbl>
               <a:tblPr/>
               <a:tblGrid>
-                <a:gridCol w="1828800"/>
-                <a:gridCol w="1005840"/>
-                <a:gridCol w="914400"/>
-                <a:gridCol w="4480560"/>
+                <a:gridCol w="1828800">
+                  <a:extLst>
+                    <a:ext uri="{9D8B030D-6E8A-4147-A177-3AD203B41FA5}">
+                      <a16:colId xmlns:a16="http://schemas.microsoft.com/office/drawing/2014/main" val="20000"/>
+                    </a:ext>
+                  </a:extLst>
+                </a:gridCol>
+                <a:gridCol w="1005840">
+                  <a:extLst>
+                    <a:ext uri="{9D8B030D-6E8A-4147-A177-3AD203B41FA5}">
+                      <a16:colId xmlns:a16="http://schemas.microsoft.com/office/drawing/2014/main" val="20001"/>
+                    </a:ext>
+                  </a:extLst>
+                </a:gridCol>
+                <a:gridCol w="914400">
+                  <a:extLst>
+                    <a:ext uri="{9D8B030D-6E8A-4147-A177-3AD203B41FA5}">
+                      <a16:colId xmlns:a16="http://schemas.microsoft.com/office/drawing/2014/main" val="20002"/>
+                    </a:ext>
+                  </a:extLst>
+                </a:gridCol>
+                <a:gridCol w="4480560">
+                  <a:extLst>
+                    <a:ext uri="{9D8B030D-6E8A-4147-A177-3AD203B41FA5}">
+                      <a16:colId xmlns:a16="http://schemas.microsoft.com/office/drawing/2014/main" val="20003"/>
+                    </a:ext>
+                  </a:extLst>
+                </a:gridCol>
               </a:tblGrid>
               <a:tr h="0">
                 <a:tc>
@@ -2944,7 +2632,7 @@
                     <a:bodyPr/>
                     <a:lstStyle/>
                     <a:p>
-                      <a:pPr indent="0" marL="0">
+                      <a:pPr marL="0" indent="0">
                         <a:buNone/>
                       </a:pPr>
                       <a:r>
@@ -3012,7 +2700,7 @@
                     <a:bodyPr/>
                     <a:lstStyle/>
                     <a:p>
-                      <a:pPr indent="0" marL="0">
+                      <a:pPr marL="0" indent="0">
                         <a:buNone/>
                       </a:pPr>
                       <a:r>
@@ -3080,7 +2768,7 @@
                     <a:bodyPr/>
                     <a:lstStyle/>
                     <a:p>
-                      <a:pPr indent="0" marL="0">
+                      <a:pPr marL="0" indent="0">
                         <a:buNone/>
                       </a:pPr>
                       <a:r>
@@ -3148,7 +2836,7 @@
                     <a:bodyPr/>
                     <a:lstStyle/>
                     <a:p>
-                      <a:pPr indent="0" marL="0">
+                      <a:pPr marL="0" indent="0">
                         <a:buNone/>
                       </a:pPr>
                       <a:r>
@@ -3211,6 +2899,11 @@
                     </a:solidFill>
                   </a:tcPr>
                 </a:tc>
+                <a:extLst>
+                  <a:ext uri="{0D108BD9-81ED-4DB2-BD59-A6C34878D82A}">
+                    <a16:rowId xmlns:a16="http://schemas.microsoft.com/office/drawing/2014/main" val="10000"/>
+                  </a:ext>
+                </a:extLst>
               </a:tr>
               <a:tr h="0">
                 <a:tc>
@@ -3218,7 +2911,7 @@
                     <a:bodyPr/>
                     <a:lstStyle/>
                     <a:p>
-                      <a:pPr indent="0" marL="0">
+                      <a:pPr marL="0" indent="0">
                         <a:buNone/>
                       </a:pPr>
                       <a:r>
@@ -3260,7 +2953,7 @@
                     </a:lnR>
                     <a:lnT w="9525" cap="flat" cmpd="sng" algn="ctr">
                       <a:solidFill>
-                        <a:srgbClr val="C9D8BE"/>
+                        <a:srgbClr val="1F3D2B"/>
                       </a:solidFill>
                       <a:prstDash val="solid"/>
                       <a:round/>
@@ -3286,7 +2979,7 @@
                     <a:bodyPr/>
                     <a:lstStyle/>
                     <a:p>
-                      <a:pPr indent="0" marL="0">
+                      <a:pPr marL="0" indent="0">
                         <a:buNone/>
                       </a:pPr>
                       <a:r>
@@ -3328,7 +3021,7 @@
                     </a:lnR>
                     <a:lnT w="9525" cap="flat" cmpd="sng" algn="ctr">
                       <a:solidFill>
-                        <a:srgbClr val="C9D8BE"/>
+                        <a:srgbClr val="1F3D2B"/>
                       </a:solidFill>
                       <a:prstDash val="solid"/>
                       <a:round/>
@@ -3354,7 +3047,7 @@
                     <a:bodyPr/>
                     <a:lstStyle/>
                     <a:p>
-                      <a:pPr indent="0" marL="0">
+                      <a:pPr marL="0" indent="0">
                         <a:buNone/>
                       </a:pPr>
                       <a:r>
@@ -3396,7 +3089,7 @@
                     </a:lnR>
                     <a:lnT w="9525" cap="flat" cmpd="sng" algn="ctr">
                       <a:solidFill>
-                        <a:srgbClr val="C9D8BE"/>
+                        <a:srgbClr val="1F3D2B"/>
                       </a:solidFill>
                       <a:prstDash val="solid"/>
                       <a:round/>
@@ -3422,7 +3115,7 @@
                     <a:bodyPr/>
                     <a:lstStyle/>
                     <a:p>
-                      <a:pPr indent="0" marL="0">
+                      <a:pPr marL="0" indent="0">
                         <a:buNone/>
                       </a:pPr>
                       <a:r>
@@ -3464,7 +3157,7 @@
                     </a:lnR>
                     <a:lnT w="9525" cap="flat" cmpd="sng" algn="ctr">
                       <a:solidFill>
-                        <a:srgbClr val="C9D8BE"/>
+                        <a:srgbClr val="1F3D2B"/>
                       </a:solidFill>
                       <a:prstDash val="solid"/>
                       <a:round/>
@@ -3485,6 +3178,11 @@
                     </a:solidFill>
                   </a:tcPr>
                 </a:tc>
+                <a:extLst>
+                  <a:ext uri="{0D108BD9-81ED-4DB2-BD59-A6C34878D82A}">
+                    <a16:rowId xmlns:a16="http://schemas.microsoft.com/office/drawing/2014/main" val="10001"/>
+                  </a:ext>
+                </a:extLst>
               </a:tr>
               <a:tr h="0">
                 <a:tc>
@@ -3492,7 +3190,7 @@
                     <a:bodyPr/>
                     <a:lstStyle/>
                     <a:p>
-                      <a:pPr indent="0" marL="0">
+                      <a:pPr marL="0" indent="0">
                         <a:buNone/>
                       </a:pPr>
                       <a:r>
@@ -3560,7 +3258,7 @@
                     <a:bodyPr/>
                     <a:lstStyle/>
                     <a:p>
-                      <a:pPr indent="0" marL="0">
+                      <a:pPr marL="0" indent="0">
                         <a:buNone/>
                       </a:pPr>
                       <a:r>
@@ -3628,7 +3326,7 @@
                     <a:bodyPr/>
                     <a:lstStyle/>
                     <a:p>
-                      <a:pPr indent="0" marL="0">
+                      <a:pPr marL="0" indent="0">
                         <a:buNone/>
                       </a:pPr>
                       <a:r>
@@ -3696,7 +3394,7 @@
                     <a:bodyPr/>
                     <a:lstStyle/>
                     <a:p>
-                      <a:pPr indent="0" marL="0">
+                      <a:pPr marL="0" indent="0">
                         <a:buNone/>
                       </a:pPr>
                       <a:r>
@@ -3759,6 +3457,11 @@
                     </a:solidFill>
                   </a:tcPr>
                 </a:tc>
+                <a:extLst>
+                  <a:ext uri="{0D108BD9-81ED-4DB2-BD59-A6C34878D82A}">
+                    <a16:rowId xmlns:a16="http://schemas.microsoft.com/office/drawing/2014/main" val="10002"/>
+                  </a:ext>
+                </a:extLst>
               </a:tr>
               <a:tr h="0">
                 <a:tc>
@@ -3766,7 +3469,7 @@
                     <a:bodyPr/>
                     <a:lstStyle/>
                     <a:p>
-                      <a:pPr indent="0" marL="0">
+                      <a:pPr marL="0" indent="0">
                         <a:buNone/>
                       </a:pPr>
                       <a:r>
@@ -3834,7 +3537,7 @@
                     <a:bodyPr/>
                     <a:lstStyle/>
                     <a:p>
-                      <a:pPr indent="0" marL="0">
+                      <a:pPr marL="0" indent="0">
                         <a:buNone/>
                       </a:pPr>
                       <a:r>
@@ -3902,7 +3605,7 @@
                     <a:bodyPr/>
                     <a:lstStyle/>
                     <a:p>
-                      <a:pPr indent="0" marL="0">
+                      <a:pPr marL="0" indent="0">
                         <a:buNone/>
                       </a:pPr>
                       <a:r>
@@ -3970,7 +3673,7 @@
                     <a:bodyPr/>
                     <a:lstStyle/>
                     <a:p>
-                      <a:pPr indent="0" marL="0">
+                      <a:pPr marL="0" indent="0">
                         <a:buNone/>
                       </a:pPr>
                       <a:r>
@@ -4033,6 +3736,11 @@
                     </a:solidFill>
                   </a:tcPr>
                 </a:tc>
+                <a:extLst>
+                  <a:ext uri="{0D108BD9-81ED-4DB2-BD59-A6C34878D82A}">
+                    <a16:rowId xmlns:a16="http://schemas.microsoft.com/office/drawing/2014/main" val="10003"/>
+                  </a:ext>
+                </a:extLst>
               </a:tr>
               <a:tr h="0">
                 <a:tc>
@@ -4040,7 +3748,7 @@
                     <a:bodyPr/>
                     <a:lstStyle/>
                     <a:p>
-                      <a:pPr indent="0" marL="0">
+                      <a:pPr marL="0" indent="0">
                         <a:buNone/>
                       </a:pPr>
                       <a:r>
@@ -4108,7 +3816,7 @@
                     <a:bodyPr/>
                     <a:lstStyle/>
                     <a:p>
-                      <a:pPr indent="0" marL="0">
+                      <a:pPr marL="0" indent="0">
                         <a:buNone/>
                       </a:pPr>
                       <a:r>
@@ -4176,7 +3884,7 @@
                     <a:bodyPr/>
                     <a:lstStyle/>
                     <a:p>
-                      <a:pPr indent="0" marL="0">
+                      <a:pPr marL="0" indent="0">
                         <a:buNone/>
                       </a:pPr>
                       <a:r>
@@ -4244,7 +3952,7 @@
                     <a:bodyPr/>
                     <a:lstStyle/>
                     <a:p>
-                      <a:pPr indent="0" marL="0">
+                      <a:pPr marL="0" indent="0">
                         <a:buNone/>
                       </a:pPr>
                       <a:r>
@@ -4307,6 +4015,11 @@
                     </a:solidFill>
                   </a:tcPr>
                 </a:tc>
+                <a:extLst>
+                  <a:ext uri="{0D108BD9-81ED-4DB2-BD59-A6C34878D82A}">
+                    <a16:rowId xmlns:a16="http://schemas.microsoft.com/office/drawing/2014/main" val="10004"/>
+                  </a:ext>
+                </a:extLst>
               </a:tr>
               <a:tr h="0">
                 <a:tc>
@@ -4314,7 +4027,7 @@
                     <a:bodyPr/>
                     <a:lstStyle/>
                     <a:p>
-                      <a:pPr indent="0" marL="0">
+                      <a:pPr marL="0" indent="0">
                         <a:buNone/>
                       </a:pPr>
                       <a:r>
@@ -4382,7 +4095,7 @@
                     <a:bodyPr/>
                     <a:lstStyle/>
                     <a:p>
-                      <a:pPr indent="0" marL="0">
+                      <a:pPr marL="0" indent="0">
                         <a:buNone/>
                       </a:pPr>
                       <a:r>
@@ -4450,7 +4163,7 @@
                     <a:bodyPr/>
                     <a:lstStyle/>
                     <a:p>
-                      <a:pPr indent="0" marL="0">
+                      <a:pPr marL="0" indent="0">
                         <a:buNone/>
                       </a:pPr>
                       <a:r>
@@ -4518,7 +4231,7 @@
                     <a:bodyPr/>
                     <a:lstStyle/>
                     <a:p>
-                      <a:pPr indent="0" marL="0">
+                      <a:pPr marL="0" indent="0">
                         <a:buNone/>
                       </a:pPr>
                       <a:r>
@@ -4581,6 +4294,11 @@
                     </a:solidFill>
                   </a:tcPr>
                 </a:tc>
+                <a:extLst>
+                  <a:ext uri="{0D108BD9-81ED-4DB2-BD59-A6C34878D82A}">
+                    <a16:rowId xmlns:a16="http://schemas.microsoft.com/office/drawing/2014/main" val="10005"/>
+                  </a:ext>
+                </a:extLst>
               </a:tr>
               <a:tr h="0">
                 <a:tc>
@@ -4588,7 +4306,7 @@
                     <a:bodyPr/>
                     <a:lstStyle/>
                     <a:p>
-                      <a:pPr indent="0" marL="0">
+                      <a:pPr marL="0" indent="0">
                         <a:buNone/>
                       </a:pPr>
                       <a:r>
@@ -4656,7 +4374,7 @@
                     <a:bodyPr/>
                     <a:lstStyle/>
                     <a:p>
-                      <a:pPr indent="0" marL="0">
+                      <a:pPr marL="0" indent="0">
                         <a:buNone/>
                       </a:pPr>
                       <a:r>
@@ -4724,7 +4442,7 @@
                     <a:bodyPr/>
                     <a:lstStyle/>
                     <a:p>
-                      <a:pPr indent="0" marL="0">
+                      <a:pPr marL="0" indent="0">
                         <a:buNone/>
                       </a:pPr>
                       <a:r>
@@ -4792,7 +4510,7 @@
                     <a:bodyPr/>
                     <a:lstStyle/>
                     <a:p>
-                      <a:pPr indent="0" marL="0">
+                      <a:pPr marL="0" indent="0">
                         <a:buNone/>
                       </a:pPr>
                       <a:r>
@@ -4855,6 +4573,11 @@
                     </a:solidFill>
                   </a:tcPr>
                 </a:tc>
+                <a:extLst>
+                  <a:ext uri="{0D108BD9-81ED-4DB2-BD59-A6C34878D82A}">
+                    <a16:rowId xmlns:a16="http://schemas.microsoft.com/office/drawing/2014/main" val="10006"/>
+                  </a:ext>
+                </a:extLst>
               </a:tr>
               <a:tr h="0">
                 <a:tc>
@@ -4862,7 +4585,7 @@
                     <a:bodyPr/>
                     <a:lstStyle/>
                     <a:p>
-                      <a:pPr indent="0" marL="0">
+                      <a:pPr marL="0" indent="0">
                         <a:buNone/>
                       </a:pPr>
                       <a:r>
@@ -4930,7 +4653,7 @@
                     <a:bodyPr/>
                     <a:lstStyle/>
                     <a:p>
-                      <a:pPr indent="0" marL="0">
+                      <a:pPr marL="0" indent="0">
                         <a:buNone/>
                       </a:pPr>
                       <a:r>
@@ -4998,7 +4721,7 @@
                     <a:bodyPr/>
                     <a:lstStyle/>
                     <a:p>
-                      <a:pPr indent="0" marL="0">
+                      <a:pPr marL="0" indent="0">
                         <a:buNone/>
                       </a:pPr>
                       <a:r>
@@ -5066,7 +4789,7 @@
                     <a:bodyPr/>
                     <a:lstStyle/>
                     <a:p>
-                      <a:pPr indent="0" marL="0">
+                      <a:pPr marL="0" indent="0">
                         <a:buNone/>
                       </a:pPr>
                       <a:r>
@@ -5129,6 +4852,11 @@
                     </a:solidFill>
                   </a:tcPr>
                 </a:tc>
+                <a:extLst>
+                  <a:ext uri="{0D108BD9-81ED-4DB2-BD59-A6C34878D82A}">
+                    <a16:rowId xmlns:a16="http://schemas.microsoft.com/office/drawing/2014/main" val="10007"/>
+                  </a:ext>
+                </a:extLst>
               </a:tr>
               <a:tr h="0">
                 <a:tc>
@@ -5136,7 +4864,7 @@
                     <a:bodyPr/>
                     <a:lstStyle/>
                     <a:p>
-                      <a:pPr indent="0" marL="0">
+                      <a:pPr marL="0" indent="0">
                         <a:buNone/>
                       </a:pPr>
                       <a:r>
@@ -5204,7 +4932,7 @@
                     <a:bodyPr/>
                     <a:lstStyle/>
                     <a:p>
-                      <a:pPr indent="0" marL="0">
+                      <a:pPr marL="0" indent="0">
                         <a:buNone/>
                       </a:pPr>
                       <a:r>
@@ -5272,7 +5000,7 @@
                     <a:bodyPr/>
                     <a:lstStyle/>
                     <a:p>
-                      <a:pPr indent="0" marL="0">
+                      <a:pPr marL="0" indent="0">
                         <a:buNone/>
                       </a:pPr>
                       <a:r>
@@ -5340,7 +5068,7 @@
                     <a:bodyPr/>
                     <a:lstStyle/>
                     <a:p>
-                      <a:pPr indent="0" marL="0">
+                      <a:pPr marL="0" indent="0">
                         <a:buNone/>
                       </a:pPr>
                       <a:r>
@@ -5403,6 +5131,11 @@
                     </a:solidFill>
                   </a:tcPr>
                 </a:tc>
+                <a:extLst>
+                  <a:ext uri="{0D108BD9-81ED-4DB2-BD59-A6C34878D82A}">
+                    <a16:rowId xmlns:a16="http://schemas.microsoft.com/office/drawing/2014/main" val="10008"/>
+                  </a:ext>
+                </a:extLst>
               </a:tr>
               <a:tr h="0">
                 <a:tc>
@@ -5410,7 +5143,7 @@
                     <a:bodyPr/>
                     <a:lstStyle/>
                     <a:p>
-                      <a:pPr indent="0" marL="0">
+                      <a:pPr marL="0" indent="0">
                         <a:buNone/>
                       </a:pPr>
                       <a:r>
@@ -5478,7 +5211,7 @@
                     <a:bodyPr/>
                     <a:lstStyle/>
                     <a:p>
-                      <a:pPr indent="0" marL="0">
+                      <a:pPr marL="0" indent="0">
                         <a:buNone/>
                       </a:pPr>
                       <a:r>
@@ -5546,7 +5279,7 @@
                     <a:bodyPr/>
                     <a:lstStyle/>
                     <a:p>
-                      <a:pPr indent="0" marL="0">
+                      <a:pPr marL="0" indent="0">
                         <a:buNone/>
                       </a:pPr>
                       <a:r>
@@ -5614,7 +5347,7 @@
                     <a:bodyPr/>
                     <a:lstStyle/>
                     <a:p>
-                      <a:pPr indent="0" marL="0">
+                      <a:pPr marL="0" indent="0">
                         <a:buNone/>
                       </a:pPr>
                       <a:r>
@@ -5677,6 +5410,11 @@
                     </a:solidFill>
                   </a:tcPr>
                 </a:tc>
+                <a:extLst>
+                  <a:ext uri="{0D108BD9-81ED-4DB2-BD59-A6C34878D82A}">
+                    <a16:rowId xmlns:a16="http://schemas.microsoft.com/office/drawing/2014/main" val="10009"/>
+                  </a:ext>
+                </a:extLst>
               </a:tr>
             </a:tbl>
           </a:graphicData>
@@ -5702,7 +5440,7 @@
           </a:prstGeom>
           <a:extLst>
             <a:ext uri="{C572A759-6A51-4108-AA02-DFA0A04FC94B}">
-              <ma14:wrappingTextBoxFlag xmlns:ma14="http://schemas.microsoft.com/office/mac/drawingml/2011/main" val="0"/>
+              <ma14:wrappingTextBoxFlag xmlns:ma14="http://schemas.microsoft.com/office/mac/drawingml/2011/main" xmlns="" val="0"/>
             </a:ext>
           </a:extLst>
         </p:spPr>
@@ -5723,7 +5461,7 @@
           <a:p>
             <a:pPr algn="r"/>
             <a:fld id="{F7021451-1387-4CA6-816F-3879F97B5CBC}" type="slidenum">
-              <a:rPr b="0" lang="en-US"/>
+              <a:rPr lang="en-US" b="0"/>
               <a:t>10</a:t>
             </a:fld>
             <a:endParaRPr lang="en-US"/>
@@ -5739,459 +5477,6 @@
 </file>
 
 <file path=ppt/slides/slide11.xml><?xml version="1.0" encoding="utf-8"?>
-<p:sld xmlns:a="http://schemas.openxmlformats.org/drawingml/2006/main" xmlns:r="http://schemas.openxmlformats.org/officeDocument/2006/relationships" xmlns:p="http://schemas.openxmlformats.org/presentationml/2006/main">
-  <p:cSld name="Slide 11">
-    <p:spTree>
-      <p:nvGrpSpPr>
-        <p:cNvPr id="1" name=""/>
-        <p:cNvGrpSpPr/>
-        <p:nvPr/>
-      </p:nvGrpSpPr>
-      <p:grpSpPr>
-        <a:xfrm>
-          <a:off x="0" y="0"/>
-          <a:ext cx="0" cy="0"/>
-          <a:chOff x="0" y="0"/>
-          <a:chExt cx="0" cy="0"/>
-        </a:xfrm>
-      </p:grpSpPr>
-      <p:sp>
-        <p:nvSpPr>
-          <p:cNvPr id="2" name="chip"/>
-          <p:cNvSpPr/>
-          <p:nvPr/>
-        </p:nvSpPr>
-        <p:spPr>
-          <a:xfrm>
-            <a:off x="457200" y="201168"/>
-            <a:ext cx="2167128" cy="256032"/>
-          </a:xfrm>
-          <a:prstGeom prst="roundRect">
-            <a:avLst>
-              <a:gd name="adj" fmla="val 50000"/>
-            </a:avLst>
-          </a:prstGeom>
-          <a:solidFill>
-            <a:srgbClr val="2E6B45"/>
-          </a:solidFill>
-          <a:ln w="12700">
-            <a:solidFill>
-              <a:srgbClr val="2E6B45"/>
-            </a:solidFill>
-            <a:prstDash val="solid"/>
-          </a:ln>
-        </p:spPr>
-      </p:sp>
-      <p:sp>
-        <p:nvSpPr>
-          <p:cNvPr id="3" name="chip-text"/>
-          <p:cNvSpPr txBox="1"/>
-          <p:nvPr/>
-        </p:nvSpPr>
-        <p:spPr>
-          <a:xfrm>
-            <a:off x="457200" y="201168"/>
-            <a:ext cx="2167128" cy="256032"/>
-          </a:xfrm>
-          <a:prstGeom prst="rect">
-            <a:avLst/>
-          </a:prstGeom>
-          <a:noFill/>
-          <a:ln/>
-        </p:spPr>
-        <p:txBody>
-          <a:bodyPr wrap="square" lIns="0" tIns="0" rIns="0" bIns="0" rtlCol="0" anchor="ctr"/>
-          <a:lstStyle/>
-          <a:p>
-            <a:pPr algn="ctr" indent="0" marL="0">
-              <a:buNone/>
-            </a:pPr>
-            <a:r>
-              <a:rPr lang="en-US" sz="1000" b="1" spc="100" kern="0" dirty="0">
-                <a:solidFill>
-                  <a:srgbClr val="FFFFFF"/>
-                </a:solidFill>
-              </a:rPr>
-              <a:t>A · THE RESOURCE</a:t>
-            </a:r>
-            <a:endParaRPr lang="en-US" sz="1000" dirty="0"/>
-          </a:p>
-        </p:txBody>
-      </p:sp>
-      <p:sp>
-        <p:nvSpPr>
-          <p:cNvPr id="4" name="Text 0"/>
-          <p:cNvSpPr/>
-          <p:nvPr>
-            <p:ph idx="100" type="title" hasCustomPrompt="1"/>
-          </p:nvPr>
-        </p:nvSpPr>
-        <p:spPr>
-          <a:xfrm>
-            <a:off x="457200" y="502920"/>
-            <a:ext cx="8229600" cy="594360"/>
-          </a:xfrm>
-          <a:prstGeom prst="rect">
-            <a:avLst/>
-          </a:prstGeom>
-          <a:noFill/>
-          <a:ln/>
-        </p:spPr>
-        <p:txBody>
-          <a:bodyPr wrap="square" lIns="0" tIns="0" rIns="0" bIns="0" rtlCol="0" anchor="ctr"/>
-          <a:lstStyle/>
-          <a:p>
-            <a:pPr algn="l" indent="0" marL="0">
-              <a:buNone/>
-            </a:pPr>
-            <a:r>
-              <a:rPr lang="en-US" sz="2800" b="1" dirty="0">
-                <a:solidFill>
-                  <a:srgbClr val="1F3D2B"/>
-                </a:solidFill>
-                <a:latin typeface="Cambria" pitchFamily="34" charset="0"/>
-                <a:ea typeface="Cambria" pitchFamily="34" charset="-122"/>
-                <a:cs typeface="Cambria" pitchFamily="34" charset="-120"/>
-              </a:rPr>
-              <a:t>Three fields the API works out for you</a:t>
-            </a:r>
-            <a:endParaRPr lang="en-US" sz="2800" dirty="0"/>
-          </a:p>
-        </p:txBody>
-      </p:sp>
-      <p:sp>
-        <p:nvSpPr>
-          <p:cNvPr id="5" name="Text 3"/>
-          <p:cNvSpPr txBox="1"/>
-          <p:nvPr/>
-        </p:nvSpPr>
-        <p:spPr>
-          <a:xfrm>
-            <a:off x="457200" y="1188720"/>
-            <a:ext cx="8229600" cy="365760"/>
-          </a:xfrm>
-          <a:prstGeom prst="rect">
-            <a:avLst/>
-          </a:prstGeom>
-          <a:noFill/>
-          <a:ln/>
-        </p:spPr>
-        <p:txBody>
-          <a:bodyPr wrap="square" lIns="0" tIns="0" rIns="0" bIns="0" rtlCol="0" anchor="ctr"/>
-          <a:lstStyle/>
-          <a:p>
-            <a:pPr indent="0" marL="0">
-              <a:buNone/>
-            </a:pPr>
-            <a:r>
-              <a:rPr lang="en-US" sz="1500" dirty="0">
-                <a:solidFill>
-                  <a:srgbClr val="1F2A24"/>
-                </a:solidFill>
-              </a:rPr>
-              <a:t>They are not stored. The API works them out each time, so they are never out of date.</a:t>
-            </a:r>
-            <a:endParaRPr lang="en-US" sz="1500" dirty="0"/>
-          </a:p>
-        </p:txBody>
-      </p:sp>
-      <p:sp>
-        <p:nvSpPr>
-          <p:cNvPr id="6" name="card"/>
-          <p:cNvSpPr/>
-          <p:nvPr/>
-        </p:nvSpPr>
-        <p:spPr>
-          <a:xfrm>
-            <a:off x="457200" y="1783080"/>
-            <a:ext cx="2606040" cy="1554480"/>
-          </a:xfrm>
-          <a:prstGeom prst="roundRect">
-            <a:avLst>
-              <a:gd name="adj" fmla="val 7059"/>
-            </a:avLst>
-          </a:prstGeom>
-          <a:solidFill>
-            <a:srgbClr val="EAF2E3"/>
-          </a:solidFill>
-          <a:ln w="12700">
-            <a:solidFill>
-              <a:srgbClr val="EAF2E3"/>
-            </a:solidFill>
-            <a:prstDash val="solid"/>
-          </a:ln>
-        </p:spPr>
-      </p:sp>
-      <p:sp>
-        <p:nvSpPr>
-          <p:cNvPr id="7" name="card-text"/>
-          <p:cNvSpPr txBox="1"/>
-          <p:nvPr/>
-        </p:nvSpPr>
-        <p:spPr>
-          <a:xfrm>
-            <a:off x="640080" y="1920240"/>
-            <a:ext cx="2240280" cy="1280160"/>
-          </a:xfrm>
-          <a:prstGeom prst="rect">
-            <a:avLst/>
-          </a:prstGeom>
-          <a:noFill/>
-          <a:ln/>
-        </p:spPr>
-        <p:txBody>
-          <a:bodyPr wrap="square" lIns="0" tIns="0" rIns="0" bIns="0" rtlCol="0" anchor="t"/>
-          <a:lstStyle/>
-          <a:p>
-            <a:pPr indent="0" marL="0">
-              <a:spcAft>
-                <a:spcPts val="600"/>
-              </a:spcAft>
-              <a:buNone/>
-            </a:pPr>
-            <a:r>
-              <a:rPr lang="en-US" sz="1600" b="1" dirty="0">
-                <a:solidFill>
-                  <a:srgbClr val="1F3D2B"/>
-                </a:solidFill>
-              </a:rPr>
-              <a:t>status</a:t>
-            </a:r>
-            <a:endParaRPr lang="en-US" sz="1600" dirty="0"/>
-          </a:p>
-          <a:p>
-            <a:pPr indent="0" marL="0">
-              <a:buNone/>
-            </a:pPr>
-            <a:r>
-              <a:rPr lang="en-US" sz="1400" dirty="0">
-                <a:solidFill>
-                  <a:srgbClr val="1F2A24"/>
-                </a:solidFill>
-              </a:rPr>
-              <a:t>expired, due soon (5 days or less), fresh, or no date.</a:t>
-            </a:r>
-            <a:endParaRPr lang="en-US" sz="1600" dirty="0"/>
-          </a:p>
-        </p:txBody>
-      </p:sp>
-      <p:sp>
-        <p:nvSpPr>
-          <p:cNvPr id="8" name="card"/>
-          <p:cNvSpPr/>
-          <p:nvPr/>
-        </p:nvSpPr>
-        <p:spPr>
-          <a:xfrm>
-            <a:off x="3268980" y="1783080"/>
-            <a:ext cx="2606040" cy="1554480"/>
-          </a:xfrm>
-          <a:prstGeom prst="roundRect">
-            <a:avLst>
-              <a:gd name="adj" fmla="val 7059"/>
-            </a:avLst>
-          </a:prstGeom>
-          <a:solidFill>
-            <a:srgbClr val="EAF2E3"/>
-          </a:solidFill>
-          <a:ln w="12700">
-            <a:solidFill>
-              <a:srgbClr val="EAF2E3"/>
-            </a:solidFill>
-            <a:prstDash val="solid"/>
-          </a:ln>
-        </p:spPr>
-      </p:sp>
-      <p:sp>
-        <p:nvSpPr>
-          <p:cNvPr id="9" name="card-text"/>
-          <p:cNvSpPr txBox="1"/>
-          <p:nvPr/>
-        </p:nvSpPr>
-        <p:spPr>
-          <a:xfrm>
-            <a:off x="3451860" y="1920240"/>
-            <a:ext cx="2240280" cy="1280160"/>
-          </a:xfrm>
-          <a:prstGeom prst="rect">
-            <a:avLst/>
-          </a:prstGeom>
-          <a:noFill/>
-          <a:ln/>
-        </p:spPr>
-        <p:txBody>
-          <a:bodyPr wrap="square" lIns="0" tIns="0" rIns="0" bIns="0" rtlCol="0" anchor="t"/>
-          <a:lstStyle/>
-          <a:p>
-            <a:pPr indent="0" marL="0">
-              <a:spcAft>
-                <a:spcPts val="600"/>
-              </a:spcAft>
-              <a:buNone/>
-            </a:pPr>
-            <a:r>
-              <a:rPr lang="en-US" sz="1600" b="1" dirty="0">
-                <a:solidFill>
-                  <a:srgbClr val="1F3D2B"/>
-                </a:solidFill>
-              </a:rPr>
-              <a:t>days_left</a:t>
-            </a:r>
-            <a:endParaRPr lang="en-US" sz="1600" dirty="0"/>
-          </a:p>
-          <a:p>
-            <a:pPr indent="0" marL="0">
-              <a:buNone/>
-            </a:pPr>
-            <a:r>
-              <a:rPr lang="en-US" sz="1400" dirty="0">
-                <a:solidFill>
-                  <a:srgbClr val="1F2A24"/>
-                </a:solidFill>
-              </a:rPr>
-              <a:t>Days until the best-before date. Below zero once it has passed.</a:t>
-            </a:r>
-            <a:endParaRPr lang="en-US" sz="1600" dirty="0"/>
-          </a:p>
-        </p:txBody>
-      </p:sp>
-      <p:sp>
-        <p:nvSpPr>
-          <p:cNvPr id="10" name="card"/>
-          <p:cNvSpPr/>
-          <p:nvPr/>
-        </p:nvSpPr>
-        <p:spPr>
-          <a:xfrm>
-            <a:off x="6080760" y="1783080"/>
-            <a:ext cx="2606040" cy="1554480"/>
-          </a:xfrm>
-          <a:prstGeom prst="roundRect">
-            <a:avLst>
-              <a:gd name="adj" fmla="val 7059"/>
-            </a:avLst>
-          </a:prstGeom>
-          <a:solidFill>
-            <a:srgbClr val="EAF2E3"/>
-          </a:solidFill>
-          <a:ln w="12700">
-            <a:solidFill>
-              <a:srgbClr val="EAF2E3"/>
-            </a:solidFill>
-            <a:prstDash val="solid"/>
-          </a:ln>
-        </p:spPr>
-      </p:sp>
-      <p:sp>
-        <p:nvSpPr>
-          <p:cNvPr id="11" name="card-text"/>
-          <p:cNvSpPr txBox="1"/>
-          <p:nvPr/>
-        </p:nvSpPr>
-        <p:spPr>
-          <a:xfrm>
-            <a:off x="6263640" y="1920240"/>
-            <a:ext cx="2240280" cy="1280160"/>
-          </a:xfrm>
-          <a:prstGeom prst="rect">
-            <a:avLst/>
-          </a:prstGeom>
-          <a:noFill/>
-          <a:ln/>
-        </p:spPr>
-        <p:txBody>
-          <a:bodyPr wrap="square" lIns="0" tIns="0" rIns="0" bIns="0" rtlCol="0" anchor="t"/>
-          <a:lstStyle/>
-          <a:p>
-            <a:pPr indent="0" marL="0">
-              <a:spcAft>
-                <a:spcPts val="600"/>
-              </a:spcAft>
-              <a:buNone/>
-            </a:pPr>
-            <a:r>
-              <a:rPr lang="en-US" sz="1600" b="1" dirty="0">
-                <a:solidFill>
-                  <a:srgbClr val="1F3D2B"/>
-                </a:solidFill>
-              </a:rPr>
-              <a:t>owner</a:t>
-            </a:r>
-            <a:endParaRPr lang="en-US" sz="1600" dirty="0"/>
-          </a:p>
-          <a:p>
-            <a:pPr indent="0" marL="0">
-              <a:buNone/>
-            </a:pPr>
-            <a:r>
-              <a:rPr lang="en-US" sz="1400" dirty="0">
-                <a:solidFill>
-                  <a:srgbClr val="1F2A24"/>
-                </a:solidFill>
-              </a:rPr>
-              <a:t>The owner's id and name. Empty if the owner's account was deleted.</a:t>
-            </a:r>
-            <a:endParaRPr lang="en-US" sz="1600" dirty="0"/>
-          </a:p>
-        </p:txBody>
-      </p:sp>
-      <p:sp>
-        <p:nvSpPr>
-          <p:cNvPr id="25" name="Slide Number Placeholder 0"/>
-          <p:cNvSpPr>
-            <a:spLocks noGrp="1"/>
-          </p:cNvSpPr>
-          <p:nvPr>
-            <p:ph type="sldNum" sz="quarter" idx="4294967295"/>
-          </p:nvPr>
-        </p:nvSpPr>
-        <p:spPr>
-          <a:xfrm>
-            <a:off x="8321040" y="4754880"/>
-            <a:ext cx="457200" cy="274320"/>
-          </a:xfrm>
-          <a:prstGeom prst="rect">
-            <a:avLst/>
-          </a:prstGeom>
-          <a:extLst>
-            <a:ext uri="{C572A759-6A51-4108-AA02-DFA0A04FC94B}">
-              <ma14:wrappingTextBoxFlag xmlns:ma14="http://schemas.microsoft.com/office/mac/drawingml/2011/main" val="0"/>
-            </a:ext>
-          </a:extLst>
-        </p:spPr>
-        <p:txBody>
-          <a:bodyPr/>
-          <a:lstStyle>
-            <a:lvl1pPr>
-              <a:defRPr sz="1000">
-                <a:solidFill>
-                  <a:srgbClr val="5B6B63"/>
-                </a:solidFill>
-                <a:latin typeface="Calibri"/>
-                <a:ea typeface="Calibri"/>
-                <a:cs typeface="Calibri"/>
-              </a:defRPr>
-            </a:lvl1pPr>
-          </a:lstStyle>
-          <a:p>
-            <a:pPr algn="r"/>
-            <a:fld id="{F7021451-1387-4CA6-816F-3879F97B5CBC}" type="slidenum">
-              <a:rPr b="0" lang="en-US"/>
-              <a:t>11</a:t>
-            </a:fld>
-            <a:endParaRPr lang="en-US"/>
-          </a:p>
-        </p:txBody>
-      </p:sp>
-    </p:spTree>
-  </p:cSld>
-  <p:clrMapOvr>
-    <a:masterClrMapping/>
-  </p:clrMapOvr>
-</p:sld>
-</file>
-
-<file path=ppt/slides/slide12.xml><?xml version="1.0" encoding="utf-8"?>
 <p:sld xmlns:a="http://schemas.openxmlformats.org/drawingml/2006/main" xmlns:r="http://schemas.openxmlformats.org/officeDocument/2006/relationships" xmlns:p="http://schemas.openxmlformats.org/presentationml/2006/main">
   <p:cSld name="Slide 12">
     <p:spTree>
@@ -6234,6 +5519,13 @@
             <a:prstDash val="solid"/>
           </a:ln>
         </p:spPr>
+        <p:txBody>
+          <a:bodyPr/>
+          <a:lstStyle/>
+          <a:p>
+            <a:endParaRPr lang="en-US"/>
+          </a:p>
+        </p:txBody>
       </p:sp>
       <p:sp>
         <p:nvSpPr>
@@ -6256,11 +5548,11 @@
           <a:bodyPr wrap="square" lIns="0" tIns="0" rIns="0" bIns="0" rtlCol="0" anchor="ctr"/>
           <a:lstStyle/>
           <a:p>
-            <a:pPr algn="ctr" indent="0" marL="0">
+            <a:pPr marL="0" indent="0" algn="ctr">
               <a:buNone/>
             </a:pPr>
             <a:r>
-              <a:rPr lang="en-US" sz="1000" b="1" spc="100" kern="0" dirty="0">
+              <a:rPr lang="en-US" sz="1000" b="1" kern="0" spc="100" dirty="0">
                 <a:solidFill>
                   <a:srgbClr val="FFFFFF"/>
                 </a:solidFill>
@@ -6274,9 +5566,11 @@
       <p:sp>
         <p:nvSpPr>
           <p:cNvPr id="4" name="Text 0"/>
-          <p:cNvSpPr/>
+          <p:cNvSpPr>
+            <a:spLocks noGrp="1"/>
+          </p:cNvSpPr>
           <p:nvPr>
-            <p:ph idx="100" type="title" hasCustomPrompt="1"/>
+            <p:ph type="title" idx="100" hasCustomPrompt="1"/>
           </p:nvPr>
         </p:nvSpPr>
         <p:spPr>
@@ -6294,7 +5588,7 @@
           <a:bodyPr wrap="square" lIns="0" tIns="0" rIns="0" bIns="0" rtlCol="0" anchor="ctr"/>
           <a:lstStyle/>
           <a:p>
-            <a:pPr algn="l" indent="0" marL="0">
+            <a:pPr marL="0" indent="0" algn="l">
               <a:buNone/>
             </a:pPr>
             <a:r>
@@ -6328,18 +5622,48 @@
         </p:nvGraphicFramePr>
         <p:xfrm>
           <a:off x="457200" y="1371600"/>
-          <a:ext cx="8229600" cy="914400"/>
+          <a:ext cx="8229600" cy="1600200"/>
         </p:xfrm>
         <a:graphic>
           <a:graphicData uri="http://schemas.openxmlformats.org/drawingml/2006/table">
             <a:tbl>
               <a:tblPr/>
               <a:tblGrid>
-                <a:gridCol w="1645920"/>
-                <a:gridCol w="1645920"/>
-                <a:gridCol w="1645920"/>
-                <a:gridCol w="1645920"/>
-                <a:gridCol w="1645920"/>
+                <a:gridCol w="1645920">
+                  <a:extLst>
+                    <a:ext uri="{9D8B030D-6E8A-4147-A177-3AD203B41FA5}">
+                      <a16:colId xmlns:a16="http://schemas.microsoft.com/office/drawing/2014/main" val="20000"/>
+                    </a:ext>
+                  </a:extLst>
+                </a:gridCol>
+                <a:gridCol w="1645920">
+                  <a:extLst>
+                    <a:ext uri="{9D8B030D-6E8A-4147-A177-3AD203B41FA5}">
+                      <a16:colId xmlns:a16="http://schemas.microsoft.com/office/drawing/2014/main" val="20001"/>
+                    </a:ext>
+                  </a:extLst>
+                </a:gridCol>
+                <a:gridCol w="1645920">
+                  <a:extLst>
+                    <a:ext uri="{9D8B030D-6E8A-4147-A177-3AD203B41FA5}">
+                      <a16:colId xmlns:a16="http://schemas.microsoft.com/office/drawing/2014/main" val="20002"/>
+                    </a:ext>
+                  </a:extLst>
+                </a:gridCol>
+                <a:gridCol w="1645920">
+                  <a:extLst>
+                    <a:ext uri="{9D8B030D-6E8A-4147-A177-3AD203B41FA5}">
+                      <a16:colId xmlns:a16="http://schemas.microsoft.com/office/drawing/2014/main" val="20003"/>
+                    </a:ext>
+                  </a:extLst>
+                </a:gridCol>
+                <a:gridCol w="1645920">
+                  <a:extLst>
+                    <a:ext uri="{9D8B030D-6E8A-4147-A177-3AD203B41FA5}">
+                      <a16:colId xmlns:a16="http://schemas.microsoft.com/office/drawing/2014/main" val="20004"/>
+                    </a:ext>
+                  </a:extLst>
+                </a:gridCol>
               </a:tblGrid>
               <a:tr h="0">
                 <a:tc>
@@ -6347,7 +5671,7 @@
                     <a:bodyPr/>
                     <a:lstStyle/>
                     <a:p>
-                      <a:pPr indent="0" marL="0">
+                      <a:pPr marL="0" indent="0">
                         <a:buNone/>
                       </a:pPr>
                       <a:r>
@@ -6415,7 +5739,7 @@
                     <a:bodyPr/>
                     <a:lstStyle/>
                     <a:p>
-                      <a:pPr indent="0" marL="0">
+                      <a:pPr marL="0" indent="0">
                         <a:buNone/>
                       </a:pPr>
                       <a:r>
@@ -6483,7 +5807,7 @@
                     <a:bodyPr/>
                     <a:lstStyle/>
                     <a:p>
-                      <a:pPr indent="0" marL="0">
+                      <a:pPr marL="0" indent="0">
                         <a:buNone/>
                       </a:pPr>
                       <a:r>
@@ -6551,7 +5875,7 @@
                     <a:bodyPr/>
                     <a:lstStyle/>
                     <a:p>
-                      <a:pPr indent="0" marL="0">
+                      <a:pPr marL="0" indent="0">
                         <a:buNone/>
                       </a:pPr>
                       <a:r>
@@ -6619,7 +5943,7 @@
                     <a:bodyPr/>
                     <a:lstStyle/>
                     <a:p>
-                      <a:pPr indent="0" marL="0">
+                      <a:pPr marL="0" indent="0">
                         <a:buNone/>
                       </a:pPr>
                       <a:r>
@@ -6682,6 +6006,11 @@
                     </a:solidFill>
                   </a:tcPr>
                 </a:tc>
+                <a:extLst>
+                  <a:ext uri="{0D108BD9-81ED-4DB2-BD59-A6C34878D82A}">
+                    <a16:rowId xmlns:a16="http://schemas.microsoft.com/office/drawing/2014/main" val="10000"/>
+                  </a:ext>
+                </a:extLst>
               </a:tr>
               <a:tr h="0">
                 <a:tc>
@@ -6689,7 +6018,7 @@
                     <a:bodyPr/>
                     <a:lstStyle/>
                     <a:p>
-                      <a:pPr indent="0" marL="0">
+                      <a:pPr marL="0" indent="0">
                         <a:buNone/>
                       </a:pPr>
                       <a:r>
@@ -6731,7 +6060,7 @@
                     </a:lnR>
                     <a:lnT w="9525" cap="flat" cmpd="sng" algn="ctr">
                       <a:solidFill>
-                        <a:srgbClr val="C9D8BE"/>
+                        <a:srgbClr val="1F3D2B"/>
                       </a:solidFill>
                       <a:prstDash val="solid"/>
                       <a:round/>
@@ -6757,7 +6086,7 @@
                     <a:bodyPr/>
                     <a:lstStyle/>
                     <a:p>
-                      <a:pPr indent="0" marL="0">
+                      <a:pPr marL="0" indent="0">
                         <a:buNone/>
                       </a:pPr>
                       <a:r>
@@ -6799,7 +6128,7 @@
                     </a:lnR>
                     <a:lnT w="9525" cap="flat" cmpd="sng" algn="ctr">
                       <a:solidFill>
-                        <a:srgbClr val="C9D8BE"/>
+                        <a:srgbClr val="1F3D2B"/>
                       </a:solidFill>
                       <a:prstDash val="solid"/>
                       <a:round/>
@@ -6825,7 +6154,7 @@
                     <a:bodyPr/>
                     <a:lstStyle/>
                     <a:p>
-                      <a:pPr indent="0" marL="0">
+                      <a:pPr marL="0" indent="0">
                         <a:buNone/>
                       </a:pPr>
                       <a:r>
@@ -6867,7 +6196,7 @@
                     </a:lnR>
                     <a:lnT w="9525" cap="flat" cmpd="sng" algn="ctr">
                       <a:solidFill>
-                        <a:srgbClr val="C9D8BE"/>
+                        <a:srgbClr val="1F3D2B"/>
                       </a:solidFill>
                       <a:prstDash val="solid"/>
                       <a:round/>
@@ -6893,7 +6222,7 @@
                     <a:bodyPr/>
                     <a:lstStyle/>
                     <a:p>
-                      <a:pPr indent="0" marL="0">
+                      <a:pPr marL="0" indent="0">
                         <a:buNone/>
                       </a:pPr>
                       <a:r>
@@ -6935,7 +6264,7 @@
                     </a:lnR>
                     <a:lnT w="9525" cap="flat" cmpd="sng" algn="ctr">
                       <a:solidFill>
-                        <a:srgbClr val="C9D8BE"/>
+                        <a:srgbClr val="1F3D2B"/>
                       </a:solidFill>
                       <a:prstDash val="solid"/>
                       <a:round/>
@@ -6961,7 +6290,7 @@
                     <a:bodyPr/>
                     <a:lstStyle/>
                     <a:p>
-                      <a:pPr indent="0" marL="0">
+                      <a:pPr marL="0" indent="0">
                         <a:buNone/>
                       </a:pPr>
                       <a:r>
@@ -7003,7 +6332,7 @@
                     </a:lnR>
                     <a:lnT w="9525" cap="flat" cmpd="sng" algn="ctr">
                       <a:solidFill>
-                        <a:srgbClr val="C9D8BE"/>
+                        <a:srgbClr val="1F3D2B"/>
                       </a:solidFill>
                       <a:prstDash val="solid"/>
                       <a:round/>
@@ -7024,6 +6353,11 @@
                     </a:solidFill>
                   </a:tcPr>
                 </a:tc>
+                <a:extLst>
+                  <a:ext uri="{0D108BD9-81ED-4DB2-BD59-A6C34878D82A}">
+                    <a16:rowId xmlns:a16="http://schemas.microsoft.com/office/drawing/2014/main" val="10001"/>
+                  </a:ext>
+                </a:extLst>
               </a:tr>
               <a:tr h="0">
                 <a:tc>
@@ -7031,7 +6365,7 @@
                     <a:bodyPr/>
                     <a:lstStyle/>
                     <a:p>
-                      <a:pPr indent="0" marL="0">
+                      <a:pPr marL="0" indent="0">
                         <a:buNone/>
                       </a:pPr>
                       <a:r>
@@ -7099,7 +6433,7 @@
                     <a:bodyPr/>
                     <a:lstStyle/>
                     <a:p>
-                      <a:pPr indent="0" marL="0">
+                      <a:pPr marL="0" indent="0">
                         <a:buNone/>
                       </a:pPr>
                       <a:r>
@@ -7167,7 +6501,7 @@
                     <a:bodyPr/>
                     <a:lstStyle/>
                     <a:p>
-                      <a:pPr indent="0" marL="0">
+                      <a:pPr marL="0" indent="0">
                         <a:buNone/>
                       </a:pPr>
                       <a:r>
@@ -7235,7 +6569,7 @@
                     <a:bodyPr/>
                     <a:lstStyle/>
                     <a:p>
-                      <a:pPr indent="0" marL="0">
+                      <a:pPr marL="0" indent="0">
                         <a:buNone/>
                       </a:pPr>
                       <a:r>
@@ -7303,7 +6637,7 @@
                     <a:bodyPr/>
                     <a:lstStyle/>
                     <a:p>
-                      <a:pPr indent="0" marL="0">
+                      <a:pPr marL="0" indent="0">
                         <a:buNone/>
                       </a:pPr>
                       <a:r>
@@ -7366,6 +6700,11 @@
                     </a:solidFill>
                   </a:tcPr>
                 </a:tc>
+                <a:extLst>
+                  <a:ext uri="{0D108BD9-81ED-4DB2-BD59-A6C34878D82A}">
+                    <a16:rowId xmlns:a16="http://schemas.microsoft.com/office/drawing/2014/main" val="10002"/>
+                  </a:ext>
+                </a:extLst>
               </a:tr>
               <a:tr h="0">
                 <a:tc>
@@ -7373,7 +6712,7 @@
                     <a:bodyPr/>
                     <a:lstStyle/>
                     <a:p>
-                      <a:pPr indent="0" marL="0">
+                      <a:pPr marL="0" indent="0">
                         <a:buNone/>
                       </a:pPr>
                       <a:r>
@@ -7441,7 +6780,7 @@
                     <a:bodyPr/>
                     <a:lstStyle/>
                     <a:p>
-                      <a:pPr indent="0" marL="0">
+                      <a:pPr marL="0" indent="0">
                         <a:buNone/>
                       </a:pPr>
                       <a:r>
@@ -7509,7 +6848,7 @@
                     <a:bodyPr/>
                     <a:lstStyle/>
                     <a:p>
-                      <a:pPr indent="0" marL="0">
+                      <a:pPr marL="0" indent="0">
                         <a:buNone/>
                       </a:pPr>
                       <a:r>
@@ -7577,7 +6916,7 @@
                     <a:bodyPr/>
                     <a:lstStyle/>
                     <a:p>
-                      <a:pPr indent="0" marL="0">
+                      <a:pPr marL="0" indent="0">
                         <a:buNone/>
                       </a:pPr>
                       <a:r>
@@ -7645,7 +6984,7 @@
                     <a:bodyPr/>
                     <a:lstStyle/>
                     <a:p>
-                      <a:pPr indent="0" marL="0">
+                      <a:pPr marL="0" indent="0">
                         <a:buNone/>
                       </a:pPr>
                       <a:r>
@@ -7708,6 +7047,11 @@
                     </a:solidFill>
                   </a:tcPr>
                 </a:tc>
+                <a:extLst>
+                  <a:ext uri="{0D108BD9-81ED-4DB2-BD59-A6C34878D82A}">
+                    <a16:rowId xmlns:a16="http://schemas.microsoft.com/office/drawing/2014/main" val="10003"/>
+                  </a:ext>
+                </a:extLst>
               </a:tr>
               <a:tr h="0">
                 <a:tc>
@@ -7715,7 +7059,7 @@
                     <a:bodyPr/>
                     <a:lstStyle/>
                     <a:p>
-                      <a:pPr indent="0" marL="0">
+                      <a:pPr marL="0" indent="0">
                         <a:buNone/>
                       </a:pPr>
                       <a:r>
@@ -7783,7 +7127,7 @@
                     <a:bodyPr/>
                     <a:lstStyle/>
                     <a:p>
-                      <a:pPr indent="0" marL="0">
+                      <a:pPr marL="0" indent="0">
                         <a:buNone/>
                       </a:pPr>
                       <a:r>
@@ -7851,7 +7195,7 @@
                     <a:bodyPr/>
                     <a:lstStyle/>
                     <a:p>
-                      <a:pPr indent="0" marL="0">
+                      <a:pPr marL="0" indent="0">
                         <a:buNone/>
                       </a:pPr>
                       <a:r>
@@ -7919,7 +7263,7 @@
                     <a:bodyPr/>
                     <a:lstStyle/>
                     <a:p>
-                      <a:pPr indent="0" marL="0">
+                      <a:pPr marL="0" indent="0">
                         <a:buNone/>
                       </a:pPr>
                       <a:r>
@@ -7987,7 +7331,7 @@
                     <a:bodyPr/>
                     <a:lstStyle/>
                     <a:p>
-                      <a:pPr indent="0" marL="0">
+                      <a:pPr marL="0" indent="0">
                         <a:buNone/>
                       </a:pPr>
                       <a:r>
@@ -8050,6 +7394,11 @@
                     </a:solidFill>
                   </a:tcPr>
                 </a:tc>
+                <a:extLst>
+                  <a:ext uri="{0D108BD9-81ED-4DB2-BD59-A6C34878D82A}">
+                    <a16:rowId xmlns:a16="http://schemas.microsoft.com/office/drawing/2014/main" val="10004"/>
+                  </a:ext>
+                </a:extLst>
               </a:tr>
             </a:tbl>
           </a:graphicData>
@@ -8076,7 +7425,7 @@
           <a:bodyPr wrap="square" lIns="0" tIns="0" rIns="0" bIns="0" rtlCol="0" anchor="ctr"/>
           <a:lstStyle/>
           <a:p>
-            <a:pPr indent="0" marL="0">
+            <a:pPr marL="0" indent="0">
               <a:buNone/>
             </a:pPr>
             <a:r>
@@ -8111,7 +7460,7 @@
           </a:prstGeom>
           <a:extLst>
             <a:ext uri="{C572A759-6A51-4108-AA02-DFA0A04FC94B}">
-              <ma14:wrappingTextBoxFlag xmlns:ma14="http://schemas.microsoft.com/office/mac/drawingml/2011/main" val="0"/>
+              <ma14:wrappingTextBoxFlag xmlns:ma14="http://schemas.microsoft.com/office/mac/drawingml/2011/main" xmlns="" val="0"/>
             </a:ext>
           </a:extLst>
         </p:spPr>
@@ -8132,8 +7481,8 @@
           <a:p>
             <a:pPr algn="r"/>
             <a:fld id="{F7021451-1387-4CA6-816F-3879F97B5CBC}" type="slidenum">
-              <a:rPr b="0" lang="en-US"/>
-              <a:t>12</a:t>
+              <a:rPr lang="en-US" b="0"/>
+              <a:t>11</a:t>
             </a:fld>
             <a:endParaRPr lang="en-US"/>
           </a:p>
@@ -8147,7 +7496,7 @@
 </p:sld>
 </file>
 
-<file path=ppt/slides/slide13.xml><?xml version="1.0" encoding="utf-8"?>
+<file path=ppt/slides/slide12.xml><?xml version="1.0" encoding="utf-8"?>
 <p:sld xmlns:a="http://schemas.openxmlformats.org/drawingml/2006/main" xmlns:r="http://schemas.openxmlformats.org/officeDocument/2006/relationships" xmlns:p="http://schemas.openxmlformats.org/presentationml/2006/main">
   <p:cSld name="Slide 13">
     <p:spTree>
@@ -8190,6 +7539,13 @@
             <a:prstDash val="solid"/>
           </a:ln>
         </p:spPr>
+        <p:txBody>
+          <a:bodyPr/>
+          <a:lstStyle/>
+          <a:p>
+            <a:endParaRPr lang="en-US"/>
+          </a:p>
+        </p:txBody>
       </p:sp>
       <p:sp>
         <p:nvSpPr>
@@ -8212,11 +7568,11 @@
           <a:bodyPr wrap="square" lIns="0" tIns="0" rIns="0" bIns="0" rtlCol="0" anchor="ctr"/>
           <a:lstStyle/>
           <a:p>
-            <a:pPr algn="ctr" indent="0" marL="0">
+            <a:pPr marL="0" indent="0" algn="ctr">
               <a:buNone/>
             </a:pPr>
             <a:r>
-              <a:rPr lang="en-US" sz="1000" b="1" spc="100" kern="0" dirty="0">
+              <a:rPr lang="en-US" sz="1000" b="1" kern="0" spc="100" dirty="0">
                 <a:solidFill>
                   <a:srgbClr val="FFFFFF"/>
                 </a:solidFill>
@@ -8230,9 +7586,11 @@
       <p:sp>
         <p:nvSpPr>
           <p:cNvPr id="4" name="Text 0"/>
-          <p:cNvSpPr/>
+          <p:cNvSpPr>
+            <a:spLocks noGrp="1"/>
+          </p:cNvSpPr>
           <p:nvPr>
-            <p:ph idx="100" type="title" hasCustomPrompt="1"/>
+            <p:ph type="title" idx="100" hasCustomPrompt="1"/>
           </p:nvPr>
         </p:nvSpPr>
         <p:spPr>
@@ -8250,7 +7608,7 @@
           <a:bodyPr wrap="square" lIns="0" tIns="0" rIns="0" bIns="0" rtlCol="0" anchor="ctr"/>
           <a:lstStyle/>
           <a:p>
-            <a:pPr algn="l" indent="0" marL="0">
+            <a:pPr marL="0" indent="0" algn="l">
               <a:buNone/>
             </a:pPr>
             <a:r>
@@ -8284,18 +7642,48 @@
         </p:nvGraphicFramePr>
         <p:xfrm>
           <a:off x="457200" y="1280160"/>
-          <a:ext cx="8229600" cy="914400"/>
+          <a:ext cx="8229600" cy="2286000"/>
         </p:xfrm>
         <a:graphic>
           <a:graphicData uri="http://schemas.openxmlformats.org/drawingml/2006/table">
             <a:tbl>
               <a:tblPr/>
               <a:tblGrid>
-                <a:gridCol w="2148840"/>
-                <a:gridCol w="1051560"/>
-                <a:gridCol w="2377440"/>
-                <a:gridCol w="1463040"/>
-                <a:gridCol w="1188720"/>
+                <a:gridCol w="2148840">
+                  <a:extLst>
+                    <a:ext uri="{9D8B030D-6E8A-4147-A177-3AD203B41FA5}">
+                      <a16:colId xmlns:a16="http://schemas.microsoft.com/office/drawing/2014/main" val="20000"/>
+                    </a:ext>
+                  </a:extLst>
+                </a:gridCol>
+                <a:gridCol w="1051560">
+                  <a:extLst>
+                    <a:ext uri="{9D8B030D-6E8A-4147-A177-3AD203B41FA5}">
+                      <a16:colId xmlns:a16="http://schemas.microsoft.com/office/drawing/2014/main" val="20001"/>
+                    </a:ext>
+                  </a:extLst>
+                </a:gridCol>
+                <a:gridCol w="2377440">
+                  <a:extLst>
+                    <a:ext uri="{9D8B030D-6E8A-4147-A177-3AD203B41FA5}">
+                      <a16:colId xmlns:a16="http://schemas.microsoft.com/office/drawing/2014/main" val="20002"/>
+                    </a:ext>
+                  </a:extLst>
+                </a:gridCol>
+                <a:gridCol w="1463040">
+                  <a:extLst>
+                    <a:ext uri="{9D8B030D-6E8A-4147-A177-3AD203B41FA5}">
+                      <a16:colId xmlns:a16="http://schemas.microsoft.com/office/drawing/2014/main" val="20003"/>
+                    </a:ext>
+                  </a:extLst>
+                </a:gridCol>
+                <a:gridCol w="1188720">
+                  <a:extLst>
+                    <a:ext uri="{9D8B030D-6E8A-4147-A177-3AD203B41FA5}">
+                      <a16:colId xmlns:a16="http://schemas.microsoft.com/office/drawing/2014/main" val="20004"/>
+                    </a:ext>
+                  </a:extLst>
+                </a:gridCol>
               </a:tblGrid>
               <a:tr h="0">
                 <a:tc>
@@ -8303,7 +7691,7 @@
                     <a:bodyPr/>
                     <a:lstStyle/>
                     <a:p>
-                      <a:pPr indent="0" marL="0">
+                      <a:pPr marL="0" indent="0">
                         <a:buNone/>
                       </a:pPr>
                       <a:r>
@@ -8371,7 +7759,7 @@
                     <a:bodyPr/>
                     <a:lstStyle/>
                     <a:p>
-                      <a:pPr indent="0" marL="0">
+                      <a:pPr marL="0" indent="0">
                         <a:buNone/>
                       </a:pPr>
                       <a:r>
@@ -8439,7 +7827,7 @@
                     <a:bodyPr/>
                     <a:lstStyle/>
                     <a:p>
-                      <a:pPr indent="0" marL="0">
+                      <a:pPr marL="0" indent="0">
                         <a:buNone/>
                       </a:pPr>
                       <a:r>
@@ -8507,7 +7895,7 @@
                     <a:bodyPr/>
                     <a:lstStyle/>
                     <a:p>
-                      <a:pPr indent="0" marL="0">
+                      <a:pPr marL="0" indent="0">
                         <a:buNone/>
                       </a:pPr>
                       <a:r>
@@ -8575,7 +7963,7 @@
                     <a:bodyPr/>
                     <a:lstStyle/>
                     <a:p>
-                      <a:pPr indent="0" marL="0">
+                      <a:pPr marL="0" indent="0">
                         <a:buNone/>
                       </a:pPr>
                       <a:r>
@@ -8638,6 +8026,11 @@
                     </a:solidFill>
                   </a:tcPr>
                 </a:tc>
+                <a:extLst>
+                  <a:ext uri="{0D108BD9-81ED-4DB2-BD59-A6C34878D82A}">
+                    <a16:rowId xmlns:a16="http://schemas.microsoft.com/office/drawing/2014/main" val="10000"/>
+                  </a:ext>
+                </a:extLst>
               </a:tr>
               <a:tr h="0">
                 <a:tc>
@@ -8645,7 +8038,7 @@
                     <a:bodyPr/>
                     <a:lstStyle/>
                     <a:p>
-                      <a:pPr indent="0" marL="0">
+                      <a:pPr marL="0" indent="0">
                         <a:buNone/>
                       </a:pPr>
                       <a:r>
@@ -8687,7 +8080,7 @@
                     </a:lnR>
                     <a:lnT w="9525" cap="flat" cmpd="sng" algn="ctr">
                       <a:solidFill>
-                        <a:srgbClr val="C9D8BE"/>
+                        <a:srgbClr val="1F3D2B"/>
                       </a:solidFill>
                       <a:prstDash val="solid"/>
                       <a:round/>
@@ -8713,7 +8106,7 @@
                     <a:bodyPr/>
                     <a:lstStyle/>
                     <a:p>
-                      <a:pPr indent="0" marL="0">
+                      <a:pPr marL="0" indent="0">
                         <a:buNone/>
                       </a:pPr>
                       <a:r>
@@ -8755,7 +8148,7 @@
                     </a:lnR>
                     <a:lnT w="9525" cap="flat" cmpd="sng" algn="ctr">
                       <a:solidFill>
-                        <a:srgbClr val="C9D8BE"/>
+                        <a:srgbClr val="1F3D2B"/>
                       </a:solidFill>
                       <a:prstDash val="solid"/>
                       <a:round/>
@@ -8781,7 +8174,7 @@
                     <a:bodyPr/>
                     <a:lstStyle/>
                     <a:p>
-                      <a:pPr indent="0" marL="0">
+                      <a:pPr marL="0" indent="0">
                         <a:buNone/>
                       </a:pPr>
                       <a:r>
@@ -8823,7 +8216,7 @@
                     </a:lnR>
                     <a:lnT w="9525" cap="flat" cmpd="sng" algn="ctr">
                       <a:solidFill>
-                        <a:srgbClr val="C9D8BE"/>
+                        <a:srgbClr val="1F3D2B"/>
                       </a:solidFill>
                       <a:prstDash val="solid"/>
                       <a:round/>
@@ -8849,7 +8242,7 @@
                     <a:bodyPr/>
                     <a:lstStyle/>
                     <a:p>
-                      <a:pPr indent="0" marL="0">
+                      <a:pPr marL="0" indent="0">
                         <a:buNone/>
                       </a:pPr>
                       <a:r>
@@ -8891,7 +8284,7 @@
                     </a:lnR>
                     <a:lnT w="9525" cap="flat" cmpd="sng" algn="ctr">
                       <a:solidFill>
-                        <a:srgbClr val="C9D8BE"/>
+                        <a:srgbClr val="1F3D2B"/>
                       </a:solidFill>
                       <a:prstDash val="solid"/>
                       <a:round/>
@@ -8917,7 +8310,7 @@
                     <a:bodyPr/>
                     <a:lstStyle/>
                     <a:p>
-                      <a:pPr indent="0" marL="0">
+                      <a:pPr marL="0" indent="0">
                         <a:buNone/>
                       </a:pPr>
                       <a:r>
@@ -8959,7 +8352,7 @@
                     </a:lnR>
                     <a:lnT w="9525" cap="flat" cmpd="sng" algn="ctr">
                       <a:solidFill>
-                        <a:srgbClr val="C9D8BE"/>
+                        <a:srgbClr val="1F3D2B"/>
                       </a:solidFill>
                       <a:prstDash val="solid"/>
                       <a:round/>
@@ -8980,6 +8373,11 @@
                     </a:solidFill>
                   </a:tcPr>
                 </a:tc>
+                <a:extLst>
+                  <a:ext uri="{0D108BD9-81ED-4DB2-BD59-A6C34878D82A}">
+                    <a16:rowId xmlns:a16="http://schemas.microsoft.com/office/drawing/2014/main" val="10001"/>
+                  </a:ext>
+                </a:extLst>
               </a:tr>
               <a:tr h="0">
                 <a:tc>
@@ -8987,7 +8385,7 @@
                     <a:bodyPr/>
                     <a:lstStyle/>
                     <a:p>
-                      <a:pPr indent="0" marL="0">
+                      <a:pPr marL="0" indent="0">
                         <a:buNone/>
                       </a:pPr>
                       <a:r>
@@ -9055,7 +8453,7 @@
                     <a:bodyPr/>
                     <a:lstStyle/>
                     <a:p>
-                      <a:pPr indent="0" marL="0">
+                      <a:pPr marL="0" indent="0">
                         <a:buNone/>
                       </a:pPr>
                       <a:r>
@@ -9123,7 +8521,7 @@
                     <a:bodyPr/>
                     <a:lstStyle/>
                     <a:p>
-                      <a:pPr indent="0" marL="0">
+                      <a:pPr marL="0" indent="0">
                         <a:buNone/>
                       </a:pPr>
                       <a:r>
@@ -9191,7 +8589,7 @@
                     <a:bodyPr/>
                     <a:lstStyle/>
                     <a:p>
-                      <a:pPr indent="0" marL="0">
+                      <a:pPr marL="0" indent="0">
                         <a:buNone/>
                       </a:pPr>
                       <a:r>
@@ -9259,7 +8657,7 @@
                     <a:bodyPr/>
                     <a:lstStyle/>
                     <a:p>
-                      <a:pPr indent="0" marL="0">
+                      <a:pPr marL="0" indent="0">
                         <a:buNone/>
                       </a:pPr>
                       <a:r>
@@ -9322,6 +8720,11 @@
                     </a:solidFill>
                   </a:tcPr>
                 </a:tc>
+                <a:extLst>
+                  <a:ext uri="{0D108BD9-81ED-4DB2-BD59-A6C34878D82A}">
+                    <a16:rowId xmlns:a16="http://schemas.microsoft.com/office/drawing/2014/main" val="10002"/>
+                  </a:ext>
+                </a:extLst>
               </a:tr>
               <a:tr h="0">
                 <a:tc>
@@ -9329,7 +8732,7 @@
                     <a:bodyPr/>
                     <a:lstStyle/>
                     <a:p>
-                      <a:pPr indent="0" marL="0">
+                      <a:pPr marL="0" indent="0">
                         <a:buNone/>
                       </a:pPr>
                       <a:r>
@@ -9397,7 +8800,7 @@
                     <a:bodyPr/>
                     <a:lstStyle/>
                     <a:p>
-                      <a:pPr indent="0" marL="0">
+                      <a:pPr marL="0" indent="0">
                         <a:buNone/>
                       </a:pPr>
                       <a:r>
@@ -9465,7 +8868,7 @@
                     <a:bodyPr/>
                     <a:lstStyle/>
                     <a:p>
-                      <a:pPr indent="0" marL="0">
+                      <a:pPr marL="0" indent="0">
                         <a:buNone/>
                       </a:pPr>
                       <a:r>
@@ -9533,7 +8936,7 @@
                     <a:bodyPr/>
                     <a:lstStyle/>
                     <a:p>
-                      <a:pPr indent="0" marL="0">
+                      <a:pPr marL="0" indent="0">
                         <a:buNone/>
                       </a:pPr>
                       <a:r>
@@ -9601,7 +9004,7 @@
                     <a:bodyPr/>
                     <a:lstStyle/>
                     <a:p>
-                      <a:pPr indent="0" marL="0">
+                      <a:pPr marL="0" indent="0">
                         <a:buNone/>
                       </a:pPr>
                       <a:r>
@@ -9664,6 +9067,11 @@
                     </a:solidFill>
                   </a:tcPr>
                 </a:tc>
+                <a:extLst>
+                  <a:ext uri="{0D108BD9-81ED-4DB2-BD59-A6C34878D82A}">
+                    <a16:rowId xmlns:a16="http://schemas.microsoft.com/office/drawing/2014/main" val="10003"/>
+                  </a:ext>
+                </a:extLst>
               </a:tr>
               <a:tr h="0">
                 <a:tc>
@@ -9671,7 +9079,7 @@
                     <a:bodyPr/>
                     <a:lstStyle/>
                     <a:p>
-                      <a:pPr indent="0" marL="0">
+                      <a:pPr marL="0" indent="0">
                         <a:buNone/>
                       </a:pPr>
                       <a:r>
@@ -9739,7 +9147,7 @@
                     <a:bodyPr/>
                     <a:lstStyle/>
                     <a:p>
-                      <a:pPr indent="0" marL="0">
+                      <a:pPr marL="0" indent="0">
                         <a:buNone/>
                       </a:pPr>
                       <a:r>
@@ -9807,7 +9215,7 @@
                     <a:bodyPr/>
                     <a:lstStyle/>
                     <a:p>
-                      <a:pPr indent="0" marL="0">
+                      <a:pPr marL="0" indent="0">
                         <a:buNone/>
                       </a:pPr>
                       <a:r>
@@ -9875,7 +9283,7 @@
                     <a:bodyPr/>
                     <a:lstStyle/>
                     <a:p>
-                      <a:pPr indent="0" marL="0">
+                      <a:pPr marL="0" indent="0">
                         <a:buNone/>
                       </a:pPr>
                       <a:r>
@@ -9943,7 +9351,7 @@
                     <a:bodyPr/>
                     <a:lstStyle/>
                     <a:p>
-                      <a:pPr indent="0" marL="0">
+                      <a:pPr marL="0" indent="0">
                         <a:buNone/>
                       </a:pPr>
                       <a:r>
@@ -10006,6 +9414,11 @@
                     </a:solidFill>
                   </a:tcPr>
                 </a:tc>
+                <a:extLst>
+                  <a:ext uri="{0D108BD9-81ED-4DB2-BD59-A6C34878D82A}">
+                    <a16:rowId xmlns:a16="http://schemas.microsoft.com/office/drawing/2014/main" val="10004"/>
+                  </a:ext>
+                </a:extLst>
               </a:tr>
               <a:tr h="0">
                 <a:tc>
@@ -10013,7 +9426,7 @@
                     <a:bodyPr/>
                     <a:lstStyle/>
                     <a:p>
-                      <a:pPr indent="0" marL="0">
+                      <a:pPr marL="0" indent="0">
                         <a:buNone/>
                       </a:pPr>
                       <a:r>
@@ -10081,7 +9494,7 @@
                     <a:bodyPr/>
                     <a:lstStyle/>
                     <a:p>
-                      <a:pPr indent="0" marL="0">
+                      <a:pPr marL="0" indent="0">
                         <a:buNone/>
                       </a:pPr>
                       <a:r>
@@ -10149,7 +9562,7 @@
                     <a:bodyPr/>
                     <a:lstStyle/>
                     <a:p>
-                      <a:pPr indent="0" marL="0">
+                      <a:pPr marL="0" indent="0">
                         <a:buNone/>
                       </a:pPr>
                       <a:r>
@@ -10217,7 +9630,7 @@
                     <a:bodyPr/>
                     <a:lstStyle/>
                     <a:p>
-                      <a:pPr indent="0" marL="0">
+                      <a:pPr marL="0" indent="0">
                         <a:buNone/>
                       </a:pPr>
                       <a:r>
@@ -10285,7 +9698,7 @@
                     <a:bodyPr/>
                     <a:lstStyle/>
                     <a:p>
-                      <a:pPr indent="0" marL="0">
+                      <a:pPr marL="0" indent="0">
                         <a:buNone/>
                       </a:pPr>
                       <a:r>
@@ -10348,6 +9761,11 @@
                     </a:solidFill>
                   </a:tcPr>
                 </a:tc>
+                <a:extLst>
+                  <a:ext uri="{0D108BD9-81ED-4DB2-BD59-A6C34878D82A}">
+                    <a16:rowId xmlns:a16="http://schemas.microsoft.com/office/drawing/2014/main" val="10005"/>
+                  </a:ext>
+                </a:extLst>
               </a:tr>
             </a:tbl>
           </a:graphicData>
@@ -10374,7 +9792,7 @@
           <a:bodyPr wrap="square" lIns="0" tIns="0" rIns="0" bIns="0" rtlCol="0" anchor="ctr"/>
           <a:lstStyle/>
           <a:p>
-            <a:pPr indent="0" marL="0">
+            <a:pPr marL="0" indent="0">
               <a:buNone/>
             </a:pPr>
             <a:r>
@@ -10409,7 +9827,7 @@
           </a:prstGeom>
           <a:extLst>
             <a:ext uri="{C572A759-6A51-4108-AA02-DFA0A04FC94B}">
-              <ma14:wrappingTextBoxFlag xmlns:ma14="http://schemas.microsoft.com/office/mac/drawingml/2011/main" val="0"/>
+              <ma14:wrappingTextBoxFlag xmlns:ma14="http://schemas.microsoft.com/office/mac/drawingml/2011/main" xmlns="" val="0"/>
             </a:ext>
           </a:extLst>
         </p:spPr>
@@ -10430,8 +9848,8 @@
           <a:p>
             <a:pPr algn="r"/>
             <a:fld id="{F7021451-1387-4CA6-816F-3879F97B5CBC}" type="slidenum">
-              <a:rPr b="0" lang="en-US"/>
-              <a:t>13</a:t>
+              <a:rPr lang="en-US" b="0"/>
+              <a:t>12</a:t>
             </a:fld>
             <a:endParaRPr lang="en-US"/>
           </a:p>
@@ -10445,7 +9863,7 @@
 </p:sld>
 </file>
 
-<file path=ppt/slides/slide14.xml><?xml version="1.0" encoding="utf-8"?>
+<file path=ppt/slides/slide13.xml><?xml version="1.0" encoding="utf-8"?>
 <p:sld xmlns:a="http://schemas.openxmlformats.org/drawingml/2006/main" xmlns:r="http://schemas.openxmlformats.org/officeDocument/2006/relationships" xmlns:p="http://schemas.openxmlformats.org/presentationml/2006/main">
   <p:cSld name="Slide 14">
     <p:spTree>
@@ -10488,6 +9906,13 @@
             <a:prstDash val="solid"/>
           </a:ln>
         </p:spPr>
+        <p:txBody>
+          <a:bodyPr/>
+          <a:lstStyle/>
+          <a:p>
+            <a:endParaRPr lang="en-US"/>
+          </a:p>
+        </p:txBody>
       </p:sp>
       <p:sp>
         <p:nvSpPr>
@@ -10510,11 +9935,11 @@
           <a:bodyPr wrap="square" lIns="0" tIns="0" rIns="0" bIns="0" rtlCol="0" anchor="ctr"/>
           <a:lstStyle/>
           <a:p>
-            <a:pPr algn="ctr" indent="0" marL="0">
+            <a:pPr marL="0" indent="0" algn="ctr">
               <a:buNone/>
             </a:pPr>
             <a:r>
-              <a:rPr lang="en-US" sz="1000" b="1" spc="100" kern="0" dirty="0">
+              <a:rPr lang="en-US" sz="1000" b="1" kern="0" spc="100" dirty="0">
                 <a:solidFill>
                   <a:srgbClr val="FFFFFF"/>
                 </a:solidFill>
@@ -10528,9 +9953,11 @@
       <p:sp>
         <p:nvSpPr>
           <p:cNvPr id="4" name="Text 0"/>
-          <p:cNvSpPr/>
+          <p:cNvSpPr>
+            <a:spLocks noGrp="1"/>
+          </p:cNvSpPr>
           <p:nvPr>
-            <p:ph idx="100" type="title" hasCustomPrompt="1"/>
+            <p:ph type="title" idx="100" hasCustomPrompt="1"/>
           </p:nvPr>
         </p:nvSpPr>
         <p:spPr>
@@ -10548,7 +9975,7 @@
           <a:bodyPr wrap="square" lIns="0" tIns="0" rIns="0" bIns="0" rtlCol="0" anchor="ctr"/>
           <a:lstStyle/>
           <a:p>
-            <a:pPr algn="l" indent="0" marL="0">
+            <a:pPr marL="0" indent="0" algn="l">
               <a:buNone/>
             </a:pPr>
             <a:r>
@@ -10582,16 +10009,34 @@
         </p:nvGraphicFramePr>
         <p:xfrm>
           <a:off x="457200" y="1280160"/>
-          <a:ext cx="8229600" cy="914400"/>
+          <a:ext cx="8229600" cy="2103120"/>
         </p:xfrm>
         <a:graphic>
           <a:graphicData uri="http://schemas.openxmlformats.org/drawingml/2006/table">
             <a:tbl>
               <a:tblPr/>
               <a:tblGrid>
-                <a:gridCol w="822960"/>
-                <a:gridCol w="2377440"/>
-                <a:gridCol w="5029200"/>
+                <a:gridCol w="822960">
+                  <a:extLst>
+                    <a:ext uri="{9D8B030D-6E8A-4147-A177-3AD203B41FA5}">
+                      <a16:colId xmlns:a16="http://schemas.microsoft.com/office/drawing/2014/main" val="20000"/>
+                    </a:ext>
+                  </a:extLst>
+                </a:gridCol>
+                <a:gridCol w="2377440">
+                  <a:extLst>
+                    <a:ext uri="{9D8B030D-6E8A-4147-A177-3AD203B41FA5}">
+                      <a16:colId xmlns:a16="http://schemas.microsoft.com/office/drawing/2014/main" val="20001"/>
+                    </a:ext>
+                  </a:extLst>
+                </a:gridCol>
+                <a:gridCol w="5029200">
+                  <a:extLst>
+                    <a:ext uri="{9D8B030D-6E8A-4147-A177-3AD203B41FA5}">
+                      <a16:colId xmlns:a16="http://schemas.microsoft.com/office/drawing/2014/main" val="20002"/>
+                    </a:ext>
+                  </a:extLst>
+                </a:gridCol>
               </a:tblGrid>
               <a:tr h="0">
                 <a:tc>
@@ -10599,7 +10044,7 @@
                     <a:bodyPr/>
                     <a:lstStyle/>
                     <a:p>
-                      <a:pPr indent="0" marL="0">
+                      <a:pPr marL="0" indent="0">
                         <a:buNone/>
                       </a:pPr>
                       <a:r>
@@ -10667,7 +10112,7 @@
                     <a:bodyPr/>
                     <a:lstStyle/>
                     <a:p>
-                      <a:pPr indent="0" marL="0">
+                      <a:pPr marL="0" indent="0">
                         <a:buNone/>
                       </a:pPr>
                       <a:r>
@@ -10735,7 +10180,7 @@
                     <a:bodyPr/>
                     <a:lstStyle/>
                     <a:p>
-                      <a:pPr indent="0" marL="0">
+                      <a:pPr marL="0" indent="0">
                         <a:buNone/>
                       </a:pPr>
                       <a:r>
@@ -10798,6 +10243,11 @@
                     </a:solidFill>
                   </a:tcPr>
                 </a:tc>
+                <a:extLst>
+                  <a:ext uri="{0D108BD9-81ED-4DB2-BD59-A6C34878D82A}">
+                    <a16:rowId xmlns:a16="http://schemas.microsoft.com/office/drawing/2014/main" val="10000"/>
+                  </a:ext>
+                </a:extLst>
               </a:tr>
               <a:tr h="0">
                 <a:tc>
@@ -10805,7 +10255,7 @@
                     <a:bodyPr/>
                     <a:lstStyle/>
                     <a:p>
-                      <a:pPr indent="0" marL="0">
+                      <a:pPr marL="0" indent="0">
                         <a:buNone/>
                       </a:pPr>
                       <a:r>
@@ -10847,7 +10297,7 @@
                     </a:lnR>
                     <a:lnT w="9525" cap="flat" cmpd="sng" algn="ctr">
                       <a:solidFill>
-                        <a:srgbClr val="C9D8BE"/>
+                        <a:srgbClr val="1F3D2B"/>
                       </a:solidFill>
                       <a:prstDash val="solid"/>
                       <a:round/>
@@ -10873,7 +10323,7 @@
                     <a:bodyPr/>
                     <a:lstStyle/>
                     <a:p>
-                      <a:pPr indent="0" marL="0">
+                      <a:pPr marL="0" indent="0">
                         <a:buNone/>
                       </a:pPr>
                       <a:r>
@@ -10915,7 +10365,7 @@
                     </a:lnR>
                     <a:lnT w="9525" cap="flat" cmpd="sng" algn="ctr">
                       <a:solidFill>
-                        <a:srgbClr val="C9D8BE"/>
+                        <a:srgbClr val="1F3D2B"/>
                       </a:solidFill>
                       <a:prstDash val="solid"/>
                       <a:round/>
@@ -10941,7 +10391,7 @@
                     <a:bodyPr/>
                     <a:lstStyle/>
                     <a:p>
-                      <a:pPr indent="0" marL="0">
+                      <a:pPr marL="0" indent="0">
                         <a:buNone/>
                       </a:pPr>
                       <a:r>
@@ -10983,7 +10433,7 @@
                     </a:lnR>
                     <a:lnT w="9525" cap="flat" cmpd="sng" algn="ctr">
                       <a:solidFill>
-                        <a:srgbClr val="C9D8BE"/>
+                        <a:srgbClr val="1F3D2B"/>
                       </a:solidFill>
                       <a:prstDash val="solid"/>
                       <a:round/>
@@ -11004,6 +10454,11 @@
                     </a:solidFill>
                   </a:tcPr>
                 </a:tc>
+                <a:extLst>
+                  <a:ext uri="{0D108BD9-81ED-4DB2-BD59-A6C34878D82A}">
+                    <a16:rowId xmlns:a16="http://schemas.microsoft.com/office/drawing/2014/main" val="10001"/>
+                  </a:ext>
+                </a:extLst>
               </a:tr>
               <a:tr h="0">
                 <a:tc>
@@ -11011,7 +10466,7 @@
                     <a:bodyPr/>
                     <a:lstStyle/>
                     <a:p>
-                      <a:pPr indent="0" marL="0">
+                      <a:pPr marL="0" indent="0">
                         <a:buNone/>
                       </a:pPr>
                       <a:r>
@@ -11079,7 +10534,7 @@
                     <a:bodyPr/>
                     <a:lstStyle/>
                     <a:p>
-                      <a:pPr indent="0" marL="0">
+                      <a:pPr marL="0" indent="0">
                         <a:buNone/>
                       </a:pPr>
                       <a:r>
@@ -11147,7 +10602,7 @@
                     <a:bodyPr/>
                     <a:lstStyle/>
                     <a:p>
-                      <a:pPr indent="0" marL="0">
+                      <a:pPr marL="0" indent="0">
                         <a:buNone/>
                       </a:pPr>
                       <a:r>
@@ -11210,6 +10665,11 @@
                     </a:solidFill>
                   </a:tcPr>
                 </a:tc>
+                <a:extLst>
+                  <a:ext uri="{0D108BD9-81ED-4DB2-BD59-A6C34878D82A}">
+                    <a16:rowId xmlns:a16="http://schemas.microsoft.com/office/drawing/2014/main" val="10002"/>
+                  </a:ext>
+                </a:extLst>
               </a:tr>
               <a:tr h="0">
                 <a:tc>
@@ -11217,7 +10677,7 @@
                     <a:bodyPr/>
                     <a:lstStyle/>
                     <a:p>
-                      <a:pPr indent="0" marL="0">
+                      <a:pPr marL="0" indent="0">
                         <a:buNone/>
                       </a:pPr>
                       <a:r>
@@ -11285,7 +10745,7 @@
                     <a:bodyPr/>
                     <a:lstStyle/>
                     <a:p>
-                      <a:pPr indent="0" marL="0">
+                      <a:pPr marL="0" indent="0">
                         <a:buNone/>
                       </a:pPr>
                       <a:r>
@@ -11353,7 +10813,7 @@
                     <a:bodyPr/>
                     <a:lstStyle/>
                     <a:p>
-                      <a:pPr indent="0" marL="0">
+                      <a:pPr marL="0" indent="0">
                         <a:buNone/>
                       </a:pPr>
                       <a:r>
@@ -11416,6 +10876,11 @@
                     </a:solidFill>
                   </a:tcPr>
                 </a:tc>
+                <a:extLst>
+                  <a:ext uri="{0D108BD9-81ED-4DB2-BD59-A6C34878D82A}">
+                    <a16:rowId xmlns:a16="http://schemas.microsoft.com/office/drawing/2014/main" val="10003"/>
+                  </a:ext>
+                </a:extLst>
               </a:tr>
               <a:tr h="0">
                 <a:tc>
@@ -11423,7 +10888,7 @@
                     <a:bodyPr/>
                     <a:lstStyle/>
                     <a:p>
-                      <a:pPr indent="0" marL="0">
+                      <a:pPr marL="0" indent="0">
                         <a:buNone/>
                       </a:pPr>
                       <a:r>
@@ -11491,7 +10956,7 @@
                     <a:bodyPr/>
                     <a:lstStyle/>
                     <a:p>
-                      <a:pPr indent="0" marL="0">
+                      <a:pPr marL="0" indent="0">
                         <a:buNone/>
                       </a:pPr>
                       <a:r>
@@ -11559,7 +11024,7 @@
                     <a:bodyPr/>
                     <a:lstStyle/>
                     <a:p>
-                      <a:pPr indent="0" marL="0">
+                      <a:pPr marL="0" indent="0">
                         <a:buNone/>
                       </a:pPr>
                       <a:r>
@@ -11622,6 +11087,11 @@
                     </a:solidFill>
                   </a:tcPr>
                 </a:tc>
+                <a:extLst>
+                  <a:ext uri="{0D108BD9-81ED-4DB2-BD59-A6C34878D82A}">
+                    <a16:rowId xmlns:a16="http://schemas.microsoft.com/office/drawing/2014/main" val="10004"/>
+                  </a:ext>
+                </a:extLst>
               </a:tr>
               <a:tr h="0">
                 <a:tc>
@@ -11629,7 +11099,7 @@
                     <a:bodyPr/>
                     <a:lstStyle/>
                     <a:p>
-                      <a:pPr indent="0" marL="0">
+                      <a:pPr marL="0" indent="0">
                         <a:buNone/>
                       </a:pPr>
                       <a:r>
@@ -11697,7 +11167,7 @@
                     <a:bodyPr/>
                     <a:lstStyle/>
                     <a:p>
-                      <a:pPr indent="0" marL="0">
+                      <a:pPr marL="0" indent="0">
                         <a:buNone/>
                       </a:pPr>
                       <a:r>
@@ -11765,7 +11235,7 @@
                     <a:bodyPr/>
                     <a:lstStyle/>
                     <a:p>
-                      <a:pPr indent="0" marL="0">
+                      <a:pPr marL="0" indent="0">
                         <a:buNone/>
                       </a:pPr>
                       <a:r>
@@ -11786,7 +11256,7 @@
                       </a:endParaRPr>
                     </a:p>
                     <a:p>
-                      <a:pPr indent="0" marL="0">
+                      <a:pPr marL="0" indent="0">
                         <a:buNone/>
                       </a:pPr>
                       <a:r>
@@ -11849,6 +11319,11 @@
                     </a:solidFill>
                   </a:tcPr>
                 </a:tc>
+                <a:extLst>
+                  <a:ext uri="{0D108BD9-81ED-4DB2-BD59-A6C34878D82A}">
+                    <a16:rowId xmlns:a16="http://schemas.microsoft.com/office/drawing/2014/main" val="10005"/>
+                  </a:ext>
+                </a:extLst>
               </a:tr>
             </a:tbl>
           </a:graphicData>
@@ -11874,7 +11349,7 @@
           </a:prstGeom>
           <a:extLst>
             <a:ext uri="{C572A759-6A51-4108-AA02-DFA0A04FC94B}">
-              <ma14:wrappingTextBoxFlag xmlns:ma14="http://schemas.microsoft.com/office/mac/drawingml/2011/main" val="0"/>
+              <ma14:wrappingTextBoxFlag xmlns:ma14="http://schemas.microsoft.com/office/mac/drawingml/2011/main" xmlns="" val="0"/>
             </a:ext>
           </a:extLst>
         </p:spPr>
@@ -11895,8 +11370,8 @@
           <a:p>
             <a:pPr algn="r"/>
             <a:fld id="{F7021451-1387-4CA6-816F-3879F97B5CBC}" type="slidenum">
-              <a:rPr b="0" lang="en-US"/>
-              <a:t>14</a:t>
+              <a:rPr lang="en-US" b="0"/>
+              <a:t>13</a:t>
             </a:fld>
             <a:endParaRPr lang="en-US"/>
           </a:p>
@@ -11910,7 +11385,7 @@
 </p:sld>
 </file>
 
-<file path=ppt/slides/slide15.xml><?xml version="1.0" encoding="utf-8"?>
+<file path=ppt/slides/slide14.xml><?xml version="1.0" encoding="utf-8"?>
 <p:sld xmlns:a="http://schemas.openxmlformats.org/drawingml/2006/main" xmlns:r="http://schemas.openxmlformats.org/officeDocument/2006/relationships" xmlns:p="http://schemas.openxmlformats.org/presentationml/2006/main">
   <p:cSld name="Slide 15">
     <p:spTree>
@@ -11953,6 +11428,13 @@
             <a:prstDash val="solid"/>
           </a:ln>
         </p:spPr>
+        <p:txBody>
+          <a:bodyPr/>
+          <a:lstStyle/>
+          <a:p>
+            <a:endParaRPr lang="en-US"/>
+          </a:p>
+        </p:txBody>
       </p:sp>
       <p:sp>
         <p:nvSpPr>
@@ -11975,11 +11457,11 @@
           <a:bodyPr wrap="square" lIns="0" tIns="0" rIns="0" bIns="0" rtlCol="0" anchor="ctr"/>
           <a:lstStyle/>
           <a:p>
-            <a:pPr algn="ctr" indent="0" marL="0">
+            <a:pPr marL="0" indent="0" algn="ctr">
               <a:buNone/>
             </a:pPr>
             <a:r>
-              <a:rPr lang="en-US" sz="1000" b="1" spc="100" kern="0" dirty="0">
+              <a:rPr lang="en-US" sz="1000" b="1" kern="0" spc="100" dirty="0">
                 <a:solidFill>
                   <a:srgbClr val="FFFFFF"/>
                 </a:solidFill>
@@ -11993,9 +11475,11 @@
       <p:sp>
         <p:nvSpPr>
           <p:cNvPr id="4" name="Text 0"/>
-          <p:cNvSpPr/>
+          <p:cNvSpPr>
+            <a:spLocks noGrp="1"/>
+          </p:cNvSpPr>
           <p:nvPr>
-            <p:ph idx="100" type="title" hasCustomPrompt="1"/>
+            <p:ph type="title" idx="100" hasCustomPrompt="1"/>
           </p:nvPr>
         </p:nvSpPr>
         <p:spPr>
@@ -12013,7 +11497,7 @@
           <a:bodyPr wrap="square" lIns="0" tIns="0" rIns="0" bIns="0" rtlCol="0" anchor="ctr"/>
           <a:lstStyle/>
           <a:p>
-            <a:pPr algn="l" indent="0" marL="0">
+            <a:pPr marL="0" indent="0" algn="l">
               <a:buNone/>
             </a:pPr>
             <a:r>
@@ -12057,6 +11541,13 @@
             <a:prstDash val="solid"/>
           </a:ln>
         </p:spPr>
+        <p:txBody>
+          <a:bodyPr/>
+          <a:lstStyle/>
+          <a:p>
+            <a:endParaRPr lang="en-US"/>
+          </a:p>
+        </p:txBody>
       </p:sp>
       <p:sp>
         <p:nvSpPr>
@@ -12079,7 +11570,7 @@
           <a:bodyPr wrap="square" lIns="0" tIns="0" rIns="0" bIns="0" rtlCol="0" anchor="t"/>
           <a:lstStyle/>
           <a:p>
-            <a:pPr indent="0" marL="0">
+            <a:pPr marL="0" indent="0">
               <a:spcAft>
                 <a:spcPts val="600"/>
               </a:spcAft>
@@ -12096,7 +11587,7 @@
             <a:endParaRPr lang="en-US" sz="1500" dirty="0"/>
           </a:p>
           <a:p>
-            <a:pPr indent="0" marL="0">
+            <a:pPr marL="0" indent="0">
               <a:buNone/>
             </a:pPr>
             <a:r>
@@ -12137,6 +11628,13 @@
             <a:prstDash val="solid"/>
           </a:ln>
         </p:spPr>
+        <p:txBody>
+          <a:bodyPr/>
+          <a:lstStyle/>
+          <a:p>
+            <a:endParaRPr lang="en-US"/>
+          </a:p>
+        </p:txBody>
       </p:sp>
       <p:sp>
         <p:nvSpPr>
@@ -12159,7 +11657,7 @@
           <a:bodyPr wrap="square" lIns="0" tIns="0" rIns="0" bIns="0" rtlCol="0" anchor="t"/>
           <a:lstStyle/>
           <a:p>
-            <a:pPr indent="0" marL="0">
+            <a:pPr marL="0" indent="0">
               <a:spcAft>
                 <a:spcPts val="600"/>
               </a:spcAft>
@@ -12176,7 +11674,7 @@
             <a:endParaRPr lang="en-US" sz="1500" dirty="0"/>
           </a:p>
           <a:p>
-            <a:pPr indent="0" marL="0">
+            <a:pPr marL="0" indent="0">
               <a:buNone/>
             </a:pPr>
             <a:r>
@@ -12217,6 +11715,13 @@
             <a:prstDash val="solid"/>
           </a:ln>
         </p:spPr>
+        <p:txBody>
+          <a:bodyPr/>
+          <a:lstStyle/>
+          <a:p>
+            <a:endParaRPr lang="en-US"/>
+          </a:p>
+        </p:txBody>
       </p:sp>
       <p:sp>
         <p:nvSpPr>
@@ -12239,7 +11744,7 @@
           <a:bodyPr wrap="square" lIns="0" tIns="0" rIns="0" bIns="0" rtlCol="0" anchor="t"/>
           <a:lstStyle/>
           <a:p>
-            <a:pPr indent="0" marL="0">
+            <a:pPr marL="0" indent="0">
               <a:spcAft>
                 <a:spcPts val="600"/>
               </a:spcAft>
@@ -12256,7 +11761,7 @@
             <a:endParaRPr lang="en-US" sz="1500" dirty="0"/>
           </a:p>
           <a:p>
-            <a:pPr indent="0" marL="0">
+            <a:pPr marL="0" indent="0">
               <a:buNone/>
             </a:pPr>
             <a:r>
@@ -12297,6 +11802,13 @@
             <a:prstDash val="solid"/>
           </a:ln>
         </p:spPr>
+        <p:txBody>
+          <a:bodyPr/>
+          <a:lstStyle/>
+          <a:p>
+            <a:endParaRPr lang="en-US"/>
+          </a:p>
+        </p:txBody>
       </p:sp>
       <p:sp>
         <p:nvSpPr>
@@ -12319,7 +11831,7 @@
           <a:bodyPr wrap="square" lIns="0" tIns="0" rIns="0" bIns="0" rtlCol="0" anchor="t"/>
           <a:lstStyle/>
           <a:p>
-            <a:pPr indent="0" marL="0">
+            <a:pPr marL="0" indent="0">
               <a:spcAft>
                 <a:spcPts val="600"/>
               </a:spcAft>
@@ -12336,7 +11848,7 @@
             <a:endParaRPr lang="en-US" sz="1500" dirty="0"/>
           </a:p>
           <a:p>
-            <a:pPr indent="0" marL="0">
+            <a:pPr marL="0" indent="0">
               <a:buNone/>
             </a:pPr>
             <a:r>
@@ -12371,7 +11883,7 @@
           </a:prstGeom>
           <a:extLst>
             <a:ext uri="{C572A759-6A51-4108-AA02-DFA0A04FC94B}">
-              <ma14:wrappingTextBoxFlag xmlns:ma14="http://schemas.microsoft.com/office/mac/drawingml/2011/main" val="0"/>
+              <ma14:wrappingTextBoxFlag xmlns:ma14="http://schemas.microsoft.com/office/mac/drawingml/2011/main" xmlns="" val="0"/>
             </a:ext>
           </a:extLst>
         </p:spPr>
@@ -12392,8 +11904,8 @@
           <a:p>
             <a:pPr algn="r"/>
             <a:fld id="{F7021451-1387-4CA6-816F-3879F97B5CBC}" type="slidenum">
-              <a:rPr b="0" lang="en-US"/>
-              <a:t>15</a:t>
+              <a:rPr lang="en-US" b="0"/>
+              <a:t>14</a:t>
             </a:fld>
             <a:endParaRPr lang="en-US"/>
           </a:p>
@@ -12427,9 +11939,11 @@
       <p:sp>
         <p:nvSpPr>
           <p:cNvPr id="2" name="Text 0"/>
-          <p:cNvSpPr/>
+          <p:cNvSpPr>
+            <a:spLocks noGrp="1"/>
+          </p:cNvSpPr>
           <p:nvPr>
-            <p:ph idx="100" type="title" hasCustomPrompt="1"/>
+            <p:ph type="title" idx="100" hasCustomPrompt="1"/>
           </p:nvPr>
         </p:nvSpPr>
         <p:spPr>
@@ -12447,7 +11961,7 @@
           <a:bodyPr wrap="square" lIns="0" tIns="0" rIns="0" bIns="0" rtlCol="0" anchor="b"/>
           <a:lstStyle/>
           <a:p>
-            <a:pPr algn="l" indent="0" marL="0">
+            <a:pPr marL="0" indent="0" algn="l">
               <a:buNone/>
             </a:pPr>
             <a:r>
@@ -12468,9 +11982,11 @@
       <p:sp>
         <p:nvSpPr>
           <p:cNvPr id="3" name="Text 0"/>
-          <p:cNvSpPr/>
+          <p:cNvSpPr>
+            <a:spLocks noGrp="1"/>
+          </p:cNvSpPr>
           <p:nvPr>
-            <p:ph idx="101" type="body" hasCustomPrompt="1"/>
+            <p:ph type="body" idx="101" hasCustomPrompt="1"/>
           </p:nvPr>
         </p:nvSpPr>
         <p:spPr>
@@ -12488,7 +12004,7 @@
           <a:bodyPr wrap="square" lIns="0" tIns="0" rIns="0" bIns="0" rtlCol="0" anchor="t"/>
           <a:lstStyle/>
           <a:p>
-            <a:pPr algn="l" indent="0" marL="0">
+            <a:pPr marL="0" indent="0" algn="l">
               <a:buNone/>
             </a:pPr>
             <a:r>
@@ -12526,7 +12042,7 @@
           </a:prstGeom>
           <a:extLst>
             <a:ext uri="{C572A759-6A51-4108-AA02-DFA0A04FC94B}">
-              <ma14:wrappingTextBoxFlag xmlns:ma14="http://schemas.microsoft.com/office/mac/drawingml/2011/main" val="0"/>
+              <ma14:wrappingTextBoxFlag xmlns:ma14="http://schemas.microsoft.com/office/mac/drawingml/2011/main" xmlns="" val="0"/>
             </a:ext>
           </a:extLst>
         </p:spPr>
@@ -12547,7 +12063,7 @@
           <a:p>
             <a:pPr algn="r"/>
             <a:fld id="{F7021451-1387-4CA6-816F-3879F97B5CBC}" type="slidenum">
-              <a:rPr b="0" lang="en-US"/>
+              <a:rPr lang="en-US" b="0"/>
               <a:t>2</a:t>
             </a:fld>
             <a:endParaRPr lang="en-US"/>
@@ -12605,6 +12121,13 @@
             <a:prstDash val="solid"/>
           </a:ln>
         </p:spPr>
+        <p:txBody>
+          <a:bodyPr/>
+          <a:lstStyle/>
+          <a:p>
+            <a:endParaRPr lang="en-US"/>
+          </a:p>
+        </p:txBody>
       </p:sp>
       <p:sp>
         <p:nvSpPr>
@@ -12627,11 +12150,11 @@
           <a:bodyPr wrap="square" lIns="0" tIns="0" rIns="0" bIns="0" rtlCol="0" anchor="ctr"/>
           <a:lstStyle/>
           <a:p>
-            <a:pPr algn="ctr" indent="0" marL="0">
+            <a:pPr marL="0" indent="0" algn="ctr">
               <a:buNone/>
             </a:pPr>
             <a:r>
-              <a:rPr lang="en-US" sz="1000" b="1" spc="100" kern="0" dirty="0">
+              <a:rPr lang="en-US" sz="1000" b="1" kern="0" spc="100" dirty="0">
                 <a:solidFill>
                   <a:srgbClr val="FFFFFF"/>
                 </a:solidFill>
@@ -12645,9 +12168,11 @@
       <p:sp>
         <p:nvSpPr>
           <p:cNvPr id="4" name="Text 0"/>
-          <p:cNvSpPr/>
+          <p:cNvSpPr>
+            <a:spLocks noGrp="1"/>
+          </p:cNvSpPr>
           <p:nvPr>
-            <p:ph idx="100" type="title" hasCustomPrompt="1"/>
+            <p:ph type="title" idx="100" hasCustomPrompt="1"/>
           </p:nvPr>
         </p:nvSpPr>
         <p:spPr>
@@ -12665,7 +12190,7 @@
           <a:bodyPr wrap="square" lIns="0" tIns="0" rIns="0" bIns="0" rtlCol="0" anchor="ctr"/>
           <a:lstStyle/>
           <a:p>
-            <a:pPr algn="l" indent="0" marL="0">
+            <a:pPr marL="0" indent="0" algn="l">
               <a:buNone/>
             </a:pPr>
             <a:r>
@@ -12709,6 +12234,13 @@
             <a:prstDash val="solid"/>
           </a:ln>
         </p:spPr>
+        <p:txBody>
+          <a:bodyPr/>
+          <a:lstStyle/>
+          <a:p>
+            <a:endParaRPr lang="en-US"/>
+          </a:p>
+        </p:txBody>
       </p:sp>
       <p:sp>
         <p:nvSpPr>
@@ -12731,7 +12263,7 @@
           <a:bodyPr wrap="square" lIns="0" tIns="0" rIns="0" bIns="0" rtlCol="0" anchor="t"/>
           <a:lstStyle/>
           <a:p>
-            <a:pPr indent="0" marL="0">
+            <a:pPr marL="0" indent="0">
               <a:spcAft>
                 <a:spcPts val="600"/>
               </a:spcAft>
@@ -12748,7 +12280,7 @@
             <a:endParaRPr lang="en-US" sz="1700" dirty="0"/>
           </a:p>
           <a:p>
-            <a:pPr indent="0" marL="0">
+            <a:pPr marL="0" indent="0">
               <a:buNone/>
             </a:pPr>
             <a:r>
@@ -12789,6 +12321,13 @@
             <a:prstDash val="solid"/>
           </a:ln>
         </p:spPr>
+        <p:txBody>
+          <a:bodyPr/>
+          <a:lstStyle/>
+          <a:p>
+            <a:endParaRPr lang="en-US"/>
+          </a:p>
+        </p:txBody>
       </p:sp>
       <p:sp>
         <p:nvSpPr>
@@ -12811,7 +12350,7 @@
           <a:bodyPr wrap="square" lIns="0" tIns="0" rIns="0" bIns="0" rtlCol="0" anchor="t"/>
           <a:lstStyle/>
           <a:p>
-            <a:pPr indent="0" marL="0">
+            <a:pPr marL="0" indent="0">
               <a:spcAft>
                 <a:spcPts val="600"/>
               </a:spcAft>
@@ -12828,7 +12367,7 @@
             <a:endParaRPr lang="en-US" sz="1700" dirty="0"/>
           </a:p>
           <a:p>
-            <a:pPr indent="0" marL="0">
+            <a:pPr marL="0" indent="0">
               <a:buNone/>
             </a:pPr>
             <a:r>
@@ -12869,6 +12408,13 @@
             <a:prstDash val="solid"/>
           </a:ln>
         </p:spPr>
+        <p:txBody>
+          <a:bodyPr/>
+          <a:lstStyle/>
+          <a:p>
+            <a:endParaRPr lang="en-US"/>
+          </a:p>
+        </p:txBody>
       </p:sp>
       <p:sp>
         <p:nvSpPr>
@@ -12891,7 +12437,7 @@
           <a:bodyPr wrap="square" lIns="0" tIns="0" rIns="0" bIns="0" rtlCol="0" anchor="ctr"/>
           <a:lstStyle/>
           <a:p>
-            <a:pPr indent="0" marL="0">
+            <a:pPr marL="0" indent="0">
               <a:buNone/>
             </a:pPr>
             <a:r>
@@ -12902,9 +12448,6 @@
               </a:rPr>
               <a:t>Our fix: </a:t>
             </a:r>
-            <a:pPr indent="0" marL="0">
-              <a:buNone/>
-            </a:pPr>
             <a:r>
               <a:rPr lang="en-US" sz="1700" dirty="0">
                 <a:solidFill>
@@ -12937,7 +12480,7 @@
           </a:prstGeom>
           <a:extLst>
             <a:ext uri="{C572A759-6A51-4108-AA02-DFA0A04FC94B}">
-              <ma14:wrappingTextBoxFlag xmlns:ma14="http://schemas.microsoft.com/office/mac/drawingml/2011/main" val="0"/>
+              <ma14:wrappingTextBoxFlag xmlns:ma14="http://schemas.microsoft.com/office/mac/drawingml/2011/main" xmlns="" val="0"/>
             </a:ext>
           </a:extLst>
         </p:spPr>
@@ -12958,7 +12501,7 @@
           <a:p>
             <a:pPr algn="r"/>
             <a:fld id="{F7021451-1387-4CA6-816F-3879F97B5CBC}" type="slidenum">
-              <a:rPr b="0" lang="en-US"/>
+              <a:rPr lang="en-US" b="0"/>
               <a:t>3</a:t>
             </a:fld>
             <a:endParaRPr lang="en-US"/>
@@ -13016,6 +12559,13 @@
             <a:prstDash val="solid"/>
           </a:ln>
         </p:spPr>
+        <p:txBody>
+          <a:bodyPr/>
+          <a:lstStyle/>
+          <a:p>
+            <a:endParaRPr lang="en-US"/>
+          </a:p>
+        </p:txBody>
       </p:sp>
       <p:sp>
         <p:nvSpPr>
@@ -13038,11 +12588,11 @@
           <a:bodyPr wrap="square" lIns="0" tIns="0" rIns="0" bIns="0" rtlCol="0" anchor="ctr"/>
           <a:lstStyle/>
           <a:p>
-            <a:pPr algn="ctr" indent="0" marL="0">
+            <a:pPr marL="0" indent="0" algn="ctr">
               <a:buNone/>
             </a:pPr>
             <a:r>
-              <a:rPr lang="en-US" sz="1000" b="1" spc="100" kern="0" dirty="0">
+              <a:rPr lang="en-US" sz="1000" b="1" kern="0" spc="100" dirty="0">
                 <a:solidFill>
                   <a:srgbClr val="FFFFFF"/>
                 </a:solidFill>
@@ -13056,9 +12606,11 @@
       <p:sp>
         <p:nvSpPr>
           <p:cNvPr id="4" name="Text 0"/>
-          <p:cNvSpPr/>
+          <p:cNvSpPr>
+            <a:spLocks noGrp="1"/>
+          </p:cNvSpPr>
           <p:nvPr>
-            <p:ph idx="100" type="title" hasCustomPrompt="1"/>
+            <p:ph type="title" idx="100" hasCustomPrompt="1"/>
           </p:nvPr>
         </p:nvSpPr>
         <p:spPr>
@@ -13076,7 +12628,7 @@
           <a:bodyPr wrap="square" lIns="0" tIns="0" rIns="0" bIns="0" rtlCol="0" anchor="ctr"/>
           <a:lstStyle/>
           <a:p>
-            <a:pPr algn="l" indent="0" marL="0">
+            <a:pPr marL="0" indent="0" algn="l">
               <a:buNone/>
             </a:pPr>
             <a:r>
@@ -13115,7 +12667,7 @@
           <a:bodyPr wrap="square" lIns="0" tIns="0" rIns="0" bIns="0" rtlCol="0" anchor="t"/>
           <a:lstStyle/>
           <a:p>
-            <a:pPr indent="0" marL="0">
+            <a:pPr marL="0" indent="0">
               <a:buNone/>
             </a:pPr>
             <a:r>
@@ -13129,7 +12681,7 @@
             <a:endParaRPr lang="en-US" sz="1600" dirty="0"/>
           </a:p>
           <a:p>
-            <a:pPr indent="0" marL="0">
+            <a:pPr marL="0" indent="0">
               <a:buNone/>
             </a:pPr>
             <a:r>
@@ -13143,7 +12695,7 @@
             <a:endParaRPr lang="en-US" sz="1600" dirty="0"/>
           </a:p>
           <a:p>
-            <a:pPr indent="0" marL="0">
+            <a:pPr marL="0" indent="0">
               <a:buNone/>
             </a:pPr>
             <a:r>
@@ -13157,7 +12709,7 @@
             <a:endParaRPr lang="en-US" sz="1600" dirty="0"/>
           </a:p>
           <a:p>
-            <a:pPr indent="0" marL="0">
+            <a:pPr marL="0" indent="0">
               <a:buNone/>
             </a:pPr>
             <a:r>
@@ -13174,7 +12726,7 @@
       </p:sp>
       <p:graphicFrame>
         <p:nvGraphicFramePr>
-          <p:cNvPr id="5" name="table"/>
+          <p:cNvPr id="6" name="table"/>
           <p:cNvGraphicFramePr>
             <a:graphicFrameLocks noGrp="1"/>
           </p:cNvGraphicFramePr>
@@ -13188,15 +12740,27 @@
         </p:nvGraphicFramePr>
         <p:xfrm>
           <a:off x="3931920" y="1325880"/>
-          <a:ext cx="4754880" cy="914400"/>
+          <a:ext cx="4754880" cy="2026920"/>
         </p:xfrm>
         <a:graphic>
           <a:graphicData uri="http://schemas.openxmlformats.org/drawingml/2006/table">
             <a:tbl>
               <a:tblPr/>
               <a:tblGrid>
-                <a:gridCol w="1554480"/>
-                <a:gridCol w="3200400"/>
+                <a:gridCol w="1554480">
+                  <a:extLst>
+                    <a:ext uri="{9D8B030D-6E8A-4147-A177-3AD203B41FA5}">
+                      <a16:colId xmlns:a16="http://schemas.microsoft.com/office/drawing/2014/main" val="20000"/>
+                    </a:ext>
+                  </a:extLst>
+                </a:gridCol>
+                <a:gridCol w="3200400">
+                  <a:extLst>
+                    <a:ext uri="{9D8B030D-6E8A-4147-A177-3AD203B41FA5}">
+                      <a16:colId xmlns:a16="http://schemas.microsoft.com/office/drawing/2014/main" val="20001"/>
+                    </a:ext>
+                  </a:extLst>
+                </a:gridCol>
               </a:tblGrid>
               <a:tr h="0">
                 <a:tc>
@@ -13204,7 +12768,7 @@
                     <a:bodyPr/>
                     <a:lstStyle/>
                     <a:p>
-                      <a:pPr indent="0" marL="0">
+                      <a:pPr marL="0" indent="0">
                         <a:buNone/>
                       </a:pPr>
                       <a:r>
@@ -13272,7 +12836,7 @@
                     <a:bodyPr/>
                     <a:lstStyle/>
                     <a:p>
-                      <a:pPr indent="0" marL="0">
+                      <a:pPr marL="0" indent="0">
                         <a:buNone/>
                       </a:pPr>
                       <a:r>
@@ -13335,6 +12899,11 @@
                     </a:solidFill>
                   </a:tcPr>
                 </a:tc>
+                <a:extLst>
+                  <a:ext uri="{0D108BD9-81ED-4DB2-BD59-A6C34878D82A}">
+                    <a16:rowId xmlns:a16="http://schemas.microsoft.com/office/drawing/2014/main" val="10000"/>
+                  </a:ext>
+                </a:extLst>
               </a:tr>
               <a:tr h="0">
                 <a:tc>
@@ -13342,7 +12911,7 @@
                     <a:bodyPr/>
                     <a:lstStyle/>
                     <a:p>
-                      <a:pPr indent="0" marL="0">
+                      <a:pPr marL="0" indent="0">
                         <a:buNone/>
                       </a:pPr>
                       <a:r>
@@ -13384,7 +12953,7 @@
                     </a:lnR>
                     <a:lnT w="9525" cap="flat" cmpd="sng" algn="ctr">
                       <a:solidFill>
-                        <a:srgbClr val="C9D8BE"/>
+                        <a:srgbClr val="1F3D2B"/>
                       </a:solidFill>
                       <a:prstDash val="solid"/>
                       <a:round/>
@@ -13410,7 +12979,7 @@
                     <a:bodyPr/>
                     <a:lstStyle/>
                     <a:p>
-                      <a:pPr indent="0" marL="0">
+                      <a:pPr marL="0" indent="0">
                         <a:buNone/>
                       </a:pPr>
                       <a:r>
@@ -13452,7 +13021,7 @@
                     </a:lnR>
                     <a:lnT w="9525" cap="flat" cmpd="sng" algn="ctr">
                       <a:solidFill>
-                        <a:srgbClr val="C9D8BE"/>
+                        <a:srgbClr val="1F3D2B"/>
                       </a:solidFill>
                       <a:prstDash val="solid"/>
                       <a:round/>
@@ -13473,6 +13042,11 @@
                     </a:solidFill>
                   </a:tcPr>
                 </a:tc>
+                <a:extLst>
+                  <a:ext uri="{0D108BD9-81ED-4DB2-BD59-A6C34878D82A}">
+                    <a16:rowId xmlns:a16="http://schemas.microsoft.com/office/drawing/2014/main" val="10001"/>
+                  </a:ext>
+                </a:extLst>
               </a:tr>
               <a:tr h="0">
                 <a:tc>
@@ -13480,7 +13054,7 @@
                     <a:bodyPr/>
                     <a:lstStyle/>
                     <a:p>
-                      <a:pPr indent="0" marL="0">
+                      <a:pPr marL="0" indent="0">
                         <a:buNone/>
                       </a:pPr>
                       <a:r>
@@ -13548,7 +13122,7 @@
                     <a:bodyPr/>
                     <a:lstStyle/>
                     <a:p>
-                      <a:pPr indent="0" marL="0">
+                      <a:pPr marL="0" indent="0">
                         <a:buNone/>
                       </a:pPr>
                       <a:r>
@@ -13611,6 +13185,11 @@
                     </a:solidFill>
                   </a:tcPr>
                 </a:tc>
+                <a:extLst>
+                  <a:ext uri="{0D108BD9-81ED-4DB2-BD59-A6C34878D82A}">
+                    <a16:rowId xmlns:a16="http://schemas.microsoft.com/office/drawing/2014/main" val="10002"/>
+                  </a:ext>
+                </a:extLst>
               </a:tr>
               <a:tr h="0">
                 <a:tc>
@@ -13618,7 +13197,7 @@
                     <a:bodyPr/>
                     <a:lstStyle/>
                     <a:p>
-                      <a:pPr indent="0" marL="0">
+                      <a:pPr marL="0" indent="0">
                         <a:buNone/>
                       </a:pPr>
                       <a:r>
@@ -13686,7 +13265,7 @@
                     <a:bodyPr/>
                     <a:lstStyle/>
                     <a:p>
-                      <a:pPr indent="0" marL="0">
+                      <a:pPr marL="0" indent="0">
                         <a:buNone/>
                       </a:pPr>
                       <a:r>
@@ -13749,6 +13328,11 @@
                     </a:solidFill>
                   </a:tcPr>
                 </a:tc>
+                <a:extLst>
+                  <a:ext uri="{0D108BD9-81ED-4DB2-BD59-A6C34878D82A}">
+                    <a16:rowId xmlns:a16="http://schemas.microsoft.com/office/drawing/2014/main" val="10003"/>
+                  </a:ext>
+                </a:extLst>
               </a:tr>
               <a:tr h="0">
                 <a:tc>
@@ -13756,7 +13340,7 @@
                     <a:bodyPr/>
                     <a:lstStyle/>
                     <a:p>
-                      <a:pPr indent="0" marL="0">
+                      <a:pPr marL="0" indent="0">
                         <a:buNone/>
                       </a:pPr>
                       <a:r>
@@ -13824,7 +13408,7 @@
                     <a:bodyPr/>
                     <a:lstStyle/>
                     <a:p>
-                      <a:pPr indent="0" marL="0">
+                      <a:pPr marL="0" indent="0">
                         <a:buNone/>
                       </a:pPr>
                       <a:r>
@@ -13887,6 +13471,11 @@
                     </a:solidFill>
                   </a:tcPr>
                 </a:tc>
+                <a:extLst>
+                  <a:ext uri="{0D108BD9-81ED-4DB2-BD59-A6C34878D82A}">
+                    <a16:rowId xmlns:a16="http://schemas.microsoft.com/office/drawing/2014/main" val="10004"/>
+                  </a:ext>
+                </a:extLst>
               </a:tr>
               <a:tr h="0">
                 <a:tc>
@@ -13894,7 +13483,7 @@
                     <a:bodyPr/>
                     <a:lstStyle/>
                     <a:p>
-                      <a:pPr indent="0" marL="0">
+                      <a:pPr marL="0" indent="0">
                         <a:buNone/>
                       </a:pPr>
                       <a:r>
@@ -13962,7 +13551,7 @@
                     <a:bodyPr/>
                     <a:lstStyle/>
                     <a:p>
-                      <a:pPr indent="0" marL="0">
+                      <a:pPr marL="0" indent="0">
                         <a:buNone/>
                       </a:pPr>
                       <a:r>
@@ -14025,6 +13614,11 @@
                     </a:solidFill>
                   </a:tcPr>
                 </a:tc>
+                <a:extLst>
+                  <a:ext uri="{0D108BD9-81ED-4DB2-BD59-A6C34878D82A}">
+                    <a16:rowId xmlns:a16="http://schemas.microsoft.com/office/drawing/2014/main" val="10005"/>
+                  </a:ext>
+                </a:extLst>
               </a:tr>
               <a:tr h="0">
                 <a:tc>
@@ -14032,7 +13626,7 @@
                     <a:bodyPr/>
                     <a:lstStyle/>
                     <a:p>
-                      <a:pPr indent="0" marL="0">
+                      <a:pPr marL="0" indent="0">
                         <a:buNone/>
                       </a:pPr>
                       <a:r>
@@ -14100,7 +13694,7 @@
                     <a:bodyPr/>
                     <a:lstStyle/>
                     <a:p>
-                      <a:pPr indent="0" marL="0">
+                      <a:pPr marL="0" indent="0">
                         <a:buNone/>
                       </a:pPr>
                       <a:r>
@@ -14163,6 +13757,11 @@
                     </a:solidFill>
                   </a:tcPr>
                 </a:tc>
+                <a:extLst>
+                  <a:ext uri="{0D108BD9-81ED-4DB2-BD59-A6C34878D82A}">
+                    <a16:rowId xmlns:a16="http://schemas.microsoft.com/office/drawing/2014/main" val="10006"/>
+                  </a:ext>
+                </a:extLst>
               </a:tr>
             </a:tbl>
           </a:graphicData>
@@ -14188,7 +13787,7 @@
           </a:prstGeom>
           <a:extLst>
             <a:ext uri="{C572A759-6A51-4108-AA02-DFA0A04FC94B}">
-              <ma14:wrappingTextBoxFlag xmlns:ma14="http://schemas.microsoft.com/office/mac/drawingml/2011/main" val="0"/>
+              <ma14:wrappingTextBoxFlag xmlns:ma14="http://schemas.microsoft.com/office/mac/drawingml/2011/main" xmlns="" val="0"/>
             </a:ext>
           </a:extLst>
         </p:spPr>
@@ -14209,7 +13808,7 @@
           <a:p>
             <a:pPr algn="r"/>
             <a:fld id="{F7021451-1387-4CA6-816F-3879F97B5CBC}" type="slidenum">
-              <a:rPr b="0" lang="en-US"/>
+              <a:rPr lang="en-US" b="0"/>
               <a:t>4</a:t>
             </a:fld>
             <a:endParaRPr lang="en-US"/>
@@ -14267,6 +13866,13 @@
             <a:prstDash val="solid"/>
           </a:ln>
         </p:spPr>
+        <p:txBody>
+          <a:bodyPr/>
+          <a:lstStyle/>
+          <a:p>
+            <a:endParaRPr lang="en-US"/>
+          </a:p>
+        </p:txBody>
       </p:sp>
       <p:sp>
         <p:nvSpPr>
@@ -14289,11 +13895,11 @@
           <a:bodyPr wrap="square" lIns="0" tIns="0" rIns="0" bIns="0" rtlCol="0" anchor="ctr"/>
           <a:lstStyle/>
           <a:p>
-            <a:pPr algn="ctr" indent="0" marL="0">
+            <a:pPr marL="0" indent="0" algn="ctr">
               <a:buNone/>
             </a:pPr>
             <a:r>
-              <a:rPr lang="en-US" sz="1000" b="1" spc="100" kern="0" dirty="0">
+              <a:rPr lang="en-US" sz="1000" b="1" kern="0" spc="100" dirty="0">
                 <a:solidFill>
                   <a:srgbClr val="FFFFFF"/>
                 </a:solidFill>
@@ -14307,9 +13913,11 @@
       <p:sp>
         <p:nvSpPr>
           <p:cNvPr id="4" name="Text 0"/>
-          <p:cNvSpPr/>
+          <p:cNvSpPr>
+            <a:spLocks noGrp="1"/>
+          </p:cNvSpPr>
           <p:nvPr>
-            <p:ph idx="100" type="title" hasCustomPrompt="1"/>
+            <p:ph type="title" idx="100" hasCustomPrompt="1"/>
           </p:nvPr>
         </p:nvSpPr>
         <p:spPr>
@@ -14327,7 +13935,7 @@
           <a:bodyPr wrap="square" lIns="0" tIns="0" rIns="0" bIns="0" rtlCol="0" anchor="ctr"/>
           <a:lstStyle/>
           <a:p>
-            <a:pPr algn="l" indent="0" marL="0">
+            <a:pPr marL="0" indent="0" algn="l">
               <a:buNone/>
             </a:pPr>
             <a:r>
@@ -14361,16 +13969,34 @@
         </p:nvGraphicFramePr>
         <p:xfrm>
           <a:off x="457200" y="1371600"/>
-          <a:ext cx="8229600" cy="914400"/>
+          <a:ext cx="8229600" cy="1920240"/>
         </p:xfrm>
         <a:graphic>
           <a:graphicData uri="http://schemas.openxmlformats.org/drawingml/2006/table">
             <a:tbl>
               <a:tblPr/>
               <a:tblGrid>
-                <a:gridCol w="1463040"/>
-                <a:gridCol w="3291840"/>
-                <a:gridCol w="3474720"/>
+                <a:gridCol w="1463040">
+                  <a:extLst>
+                    <a:ext uri="{9D8B030D-6E8A-4147-A177-3AD203B41FA5}">
+                      <a16:colId xmlns:a16="http://schemas.microsoft.com/office/drawing/2014/main" val="20000"/>
+                    </a:ext>
+                  </a:extLst>
+                </a:gridCol>
+                <a:gridCol w="3291840">
+                  <a:extLst>
+                    <a:ext uri="{9D8B030D-6E8A-4147-A177-3AD203B41FA5}">
+                      <a16:colId xmlns:a16="http://schemas.microsoft.com/office/drawing/2014/main" val="20001"/>
+                    </a:ext>
+                  </a:extLst>
+                </a:gridCol>
+                <a:gridCol w="3474720">
+                  <a:extLst>
+                    <a:ext uri="{9D8B030D-6E8A-4147-A177-3AD203B41FA5}">
+                      <a16:colId xmlns:a16="http://schemas.microsoft.com/office/drawing/2014/main" val="20002"/>
+                    </a:ext>
+                  </a:extLst>
+                </a:gridCol>
               </a:tblGrid>
               <a:tr h="0">
                 <a:tc>
@@ -14378,7 +14004,7 @@
                     <a:bodyPr/>
                     <a:lstStyle/>
                     <a:p>
-                      <a:pPr indent="0" marL="0">
+                      <a:pPr marL="0" indent="0">
                         <a:buNone/>
                       </a:pPr>
                       <a:r>
@@ -14446,7 +14072,7 @@
                     <a:bodyPr/>
                     <a:lstStyle/>
                     <a:p>
-                      <a:pPr indent="0" marL="0">
+                      <a:pPr marL="0" indent="0">
                         <a:buNone/>
                       </a:pPr>
                       <a:r>
@@ -14514,7 +14140,7 @@
                     <a:bodyPr/>
                     <a:lstStyle/>
                     <a:p>
-                      <a:pPr indent="0" marL="0">
+                      <a:pPr marL="0" indent="0">
                         <a:buNone/>
                       </a:pPr>
                       <a:r>
@@ -14577,6 +14203,11 @@
                     </a:solidFill>
                   </a:tcPr>
                 </a:tc>
+                <a:extLst>
+                  <a:ext uri="{0D108BD9-81ED-4DB2-BD59-A6C34878D82A}">
+                    <a16:rowId xmlns:a16="http://schemas.microsoft.com/office/drawing/2014/main" val="10000"/>
+                  </a:ext>
+                </a:extLst>
               </a:tr>
               <a:tr h="0">
                 <a:tc>
@@ -14584,7 +14215,7 @@
                     <a:bodyPr/>
                     <a:lstStyle/>
                     <a:p>
-                      <a:pPr indent="0" marL="0">
+                      <a:pPr marL="0" indent="0">
                         <a:buNone/>
                       </a:pPr>
                       <a:r>
@@ -14626,7 +14257,7 @@
                     </a:lnR>
                     <a:lnT w="9525" cap="flat" cmpd="sng" algn="ctr">
                       <a:solidFill>
-                        <a:srgbClr val="C9D8BE"/>
+                        <a:srgbClr val="1F3D2B"/>
                       </a:solidFill>
                       <a:prstDash val="solid"/>
                       <a:round/>
@@ -14652,7 +14283,7 @@
                     <a:bodyPr/>
                     <a:lstStyle/>
                     <a:p>
-                      <a:pPr indent="0" marL="0">
+                      <a:pPr marL="0" indent="0">
                         <a:buNone/>
                       </a:pPr>
                       <a:r>
@@ -14694,7 +14325,7 @@
                     </a:lnR>
                     <a:lnT w="9525" cap="flat" cmpd="sng" algn="ctr">
                       <a:solidFill>
-                        <a:srgbClr val="C9D8BE"/>
+                        <a:srgbClr val="1F3D2B"/>
                       </a:solidFill>
                       <a:prstDash val="solid"/>
                       <a:round/>
@@ -14720,7 +14351,7 @@
                     <a:bodyPr/>
                     <a:lstStyle/>
                     <a:p>
-                      <a:pPr indent="0" marL="0">
+                      <a:pPr marL="0" indent="0">
                         <a:buNone/>
                       </a:pPr>
                       <a:r>
@@ -14762,7 +14393,7 @@
                     </a:lnR>
                     <a:lnT w="9525" cap="flat" cmpd="sng" algn="ctr">
                       <a:solidFill>
-                        <a:srgbClr val="C9D8BE"/>
+                        <a:srgbClr val="1F3D2B"/>
                       </a:solidFill>
                       <a:prstDash val="solid"/>
                       <a:round/>
@@ -14783,6 +14414,11 @@
                     </a:solidFill>
                   </a:tcPr>
                 </a:tc>
+                <a:extLst>
+                  <a:ext uri="{0D108BD9-81ED-4DB2-BD59-A6C34878D82A}">
+                    <a16:rowId xmlns:a16="http://schemas.microsoft.com/office/drawing/2014/main" val="10001"/>
+                  </a:ext>
+                </a:extLst>
               </a:tr>
               <a:tr h="0">
                 <a:tc>
@@ -14790,7 +14426,7 @@
                     <a:bodyPr/>
                     <a:lstStyle/>
                     <a:p>
-                      <a:pPr indent="0" marL="0">
+                      <a:pPr marL="0" indent="0">
                         <a:buNone/>
                       </a:pPr>
                       <a:r>
@@ -14858,7 +14494,7 @@
                     <a:bodyPr/>
                     <a:lstStyle/>
                     <a:p>
-                      <a:pPr indent="0" marL="0">
+                      <a:pPr marL="0" indent="0">
                         <a:buNone/>
                       </a:pPr>
                       <a:r>
@@ -14926,7 +14562,7 @@
                     <a:bodyPr/>
                     <a:lstStyle/>
                     <a:p>
-                      <a:pPr indent="0" marL="0">
+                      <a:pPr marL="0" indent="0">
                         <a:buNone/>
                       </a:pPr>
                       <a:r>
@@ -14989,6 +14625,11 @@
                     </a:solidFill>
                   </a:tcPr>
                 </a:tc>
+                <a:extLst>
+                  <a:ext uri="{0D108BD9-81ED-4DB2-BD59-A6C34878D82A}">
+                    <a16:rowId xmlns:a16="http://schemas.microsoft.com/office/drawing/2014/main" val="10002"/>
+                  </a:ext>
+                </a:extLst>
               </a:tr>
               <a:tr h="0">
                 <a:tc>
@@ -14996,7 +14637,7 @@
                     <a:bodyPr/>
                     <a:lstStyle/>
                     <a:p>
-                      <a:pPr indent="0" marL="0">
+                      <a:pPr marL="0" indent="0">
                         <a:buNone/>
                       </a:pPr>
                       <a:r>
@@ -15064,7 +14705,7 @@
                     <a:bodyPr/>
                     <a:lstStyle/>
                     <a:p>
-                      <a:pPr indent="0" marL="0">
+                      <a:pPr marL="0" indent="0">
                         <a:buNone/>
                       </a:pPr>
                       <a:r>
@@ -15132,7 +14773,7 @@
                     <a:bodyPr/>
                     <a:lstStyle/>
                     <a:p>
-                      <a:pPr indent="0" marL="0">
+                      <a:pPr marL="0" indent="0">
                         <a:buNone/>
                       </a:pPr>
                       <a:r>
@@ -15195,6 +14836,11 @@
                     </a:solidFill>
                   </a:tcPr>
                 </a:tc>
+                <a:extLst>
+                  <a:ext uri="{0D108BD9-81ED-4DB2-BD59-A6C34878D82A}">
+                    <a16:rowId xmlns:a16="http://schemas.microsoft.com/office/drawing/2014/main" val="10003"/>
+                  </a:ext>
+                </a:extLst>
               </a:tr>
               <a:tr h="0">
                 <a:tc>
@@ -15202,7 +14848,7 @@
                     <a:bodyPr/>
                     <a:lstStyle/>
                     <a:p>
-                      <a:pPr indent="0" marL="0">
+                      <a:pPr marL="0" indent="0">
                         <a:buNone/>
                       </a:pPr>
                       <a:r>
@@ -15270,7 +14916,7 @@
                     <a:bodyPr/>
                     <a:lstStyle/>
                     <a:p>
-                      <a:pPr indent="0" marL="0">
+                      <a:pPr marL="0" indent="0">
                         <a:buNone/>
                       </a:pPr>
                       <a:r>
@@ -15338,7 +14984,7 @@
                     <a:bodyPr/>
                     <a:lstStyle/>
                     <a:p>
-                      <a:pPr indent="0" marL="0">
+                      <a:pPr marL="0" indent="0">
                         <a:buNone/>
                       </a:pPr>
                       <a:r>
@@ -15401,6 +15047,11 @@
                     </a:solidFill>
                   </a:tcPr>
                 </a:tc>
+                <a:extLst>
+                  <a:ext uri="{0D108BD9-81ED-4DB2-BD59-A6C34878D82A}">
+                    <a16:rowId xmlns:a16="http://schemas.microsoft.com/office/drawing/2014/main" val="10004"/>
+                  </a:ext>
+                </a:extLst>
               </a:tr>
               <a:tr h="0">
                 <a:tc>
@@ -15408,7 +15059,7 @@
                     <a:bodyPr/>
                     <a:lstStyle/>
                     <a:p>
-                      <a:pPr indent="0" marL="0">
+                      <a:pPr marL="0" indent="0">
                         <a:buNone/>
                       </a:pPr>
                       <a:r>
@@ -15476,7 +15127,7 @@
                     <a:bodyPr/>
                     <a:lstStyle/>
                     <a:p>
-                      <a:pPr indent="0" marL="0">
+                      <a:pPr marL="0" indent="0">
                         <a:buNone/>
                       </a:pPr>
                       <a:r>
@@ -15544,7 +15195,7 @@
                     <a:bodyPr/>
                     <a:lstStyle/>
                     <a:p>
-                      <a:pPr indent="0" marL="0">
+                      <a:pPr marL="0" indent="0">
                         <a:buNone/>
                       </a:pPr>
                       <a:r>
@@ -15607,6 +15258,11 @@
                     </a:solidFill>
                   </a:tcPr>
                 </a:tc>
+                <a:extLst>
+                  <a:ext uri="{0D108BD9-81ED-4DB2-BD59-A6C34878D82A}">
+                    <a16:rowId xmlns:a16="http://schemas.microsoft.com/office/drawing/2014/main" val="10005"/>
+                  </a:ext>
+                </a:extLst>
               </a:tr>
             </a:tbl>
           </a:graphicData>
@@ -15632,7 +15288,7 @@
           </a:prstGeom>
           <a:extLst>
             <a:ext uri="{C572A759-6A51-4108-AA02-DFA0A04FC94B}">
-              <ma14:wrappingTextBoxFlag xmlns:ma14="http://schemas.microsoft.com/office/mac/drawingml/2011/main" val="0"/>
+              <ma14:wrappingTextBoxFlag xmlns:ma14="http://schemas.microsoft.com/office/mac/drawingml/2011/main" xmlns="" val="0"/>
             </a:ext>
           </a:extLst>
         </p:spPr>
@@ -15653,7 +15309,7 @@
           <a:p>
             <a:pPr algn="r"/>
             <a:fld id="{F7021451-1387-4CA6-816F-3879F97B5CBC}" type="slidenum">
-              <a:rPr b="0" lang="en-US"/>
+              <a:rPr lang="en-US" b="0"/>
               <a:t>5</a:t>
             </a:fld>
             <a:endParaRPr lang="en-US"/>
@@ -15711,6 +15367,13 @@
             <a:prstDash val="solid"/>
           </a:ln>
         </p:spPr>
+        <p:txBody>
+          <a:bodyPr/>
+          <a:lstStyle/>
+          <a:p>
+            <a:endParaRPr lang="en-US"/>
+          </a:p>
+        </p:txBody>
       </p:sp>
       <p:sp>
         <p:nvSpPr>
@@ -15733,11 +15396,11 @@
           <a:bodyPr wrap="square" lIns="0" tIns="0" rIns="0" bIns="0" rtlCol="0" anchor="ctr"/>
           <a:lstStyle/>
           <a:p>
-            <a:pPr algn="ctr" indent="0" marL="0">
+            <a:pPr marL="0" indent="0" algn="ctr">
               <a:buNone/>
             </a:pPr>
             <a:r>
-              <a:rPr lang="en-US" sz="1000" b="1" spc="100" kern="0" dirty="0">
+              <a:rPr lang="en-US" sz="1000" b="1" kern="0" spc="100" dirty="0">
                 <a:solidFill>
                   <a:srgbClr val="FFFFFF"/>
                 </a:solidFill>
@@ -15751,9 +15414,11 @@
       <p:sp>
         <p:nvSpPr>
           <p:cNvPr id="4" name="Text 0"/>
-          <p:cNvSpPr/>
+          <p:cNvSpPr>
+            <a:spLocks noGrp="1"/>
+          </p:cNvSpPr>
           <p:nvPr>
-            <p:ph idx="100" type="title" hasCustomPrompt="1"/>
+            <p:ph type="title" idx="100" hasCustomPrompt="1"/>
           </p:nvPr>
         </p:nvSpPr>
         <p:spPr>
@@ -15771,7 +15436,7 @@
           <a:bodyPr wrap="square" lIns="0" tIns="0" rIns="0" bIns="0" rtlCol="0" anchor="ctr"/>
           <a:lstStyle/>
           <a:p>
-            <a:pPr algn="l" indent="0" marL="0">
+            <a:pPr marL="0" indent="0" algn="l">
               <a:buNone/>
             </a:pPr>
             <a:r>
@@ -15791,14 +15456,14 @@
       </p:sp>
       <p:pic>
         <p:nvPicPr>
-          <p:cNvPr id="5" name="shot-shelf" descr="The shelf page: eight item cards with filter buttons">    </p:cNvPr>
+          <p:cNvPr id="5" name="shot-shelf" descr="The shelf page: eight item cards with filter buttons"/>
           <p:cNvPicPr>
             <a:picLocks noChangeAspect="1"/>
           </p:cNvPicPr>
           <p:nvPr/>
         </p:nvPicPr>
         <p:blipFill>
-          <a:blip r:embed="rId1"/>
+          <a:blip r:embed="rId3"/>
           <a:stretch>
             <a:fillRect/>
           </a:stretch>
@@ -15815,14 +15480,14 @@
       </p:pic>
       <p:pic>
         <p:nvPicPr>
-          <p:cNvPr id="6" name="shot-item" descr="The item page for Frozen dumplings, with a Use some form">    </p:cNvPr>
+          <p:cNvPr id="6" name="shot-item" descr="The item page for Frozen dumplings, with a Use some form"/>
           <p:cNvPicPr>
             <a:picLocks noChangeAspect="1"/>
           </p:cNvPicPr>
           <p:nvPr/>
         </p:nvPicPr>
         <p:blipFill>
-          <a:blip r:embed="rId2"/>
+          <a:blip r:embed="rId4"/>
           <a:stretch>
             <a:fillRect/>
           </a:stretch>
@@ -15858,7 +15523,7 @@
           <a:bodyPr wrap="square" lIns="0" tIns="0" rIns="0" bIns="0" rtlCol="0" anchor="t"/>
           <a:lstStyle/>
           <a:p>
-            <a:pPr indent="0" marL="0">
+            <a:pPr marL="0" indent="0">
               <a:buNone/>
             </a:pPr>
             <a:r>
@@ -15869,9 +15534,6 @@
               </a:rPr>
               <a:t>1. The shelf  </a:t>
             </a:r>
-            <a:pPr indent="0" marL="0">
-              <a:buNone/>
-            </a:pPr>
             <a:r>
               <a:rPr lang="en-US" sz="1400" dirty="0">
                 <a:solidFill>
@@ -15905,7 +15567,7 @@
           <a:bodyPr wrap="square" lIns="0" tIns="0" rIns="0" bIns="0" rtlCol="0" anchor="t"/>
           <a:lstStyle/>
           <a:p>
-            <a:pPr indent="0" marL="0">
+            <a:pPr marL="0" indent="0">
               <a:buNone/>
             </a:pPr>
             <a:r>
@@ -15916,9 +15578,6 @@
               </a:rPr>
               <a:t>2. An item  </a:t>
             </a:r>
-            <a:pPr indent="0" marL="0">
-              <a:buNone/>
-            </a:pPr>
             <a:r>
               <a:rPr lang="en-US" sz="1400" dirty="0">
                 <a:solidFill>
@@ -15951,7 +15610,7 @@
           </a:prstGeom>
           <a:extLst>
             <a:ext uri="{C572A759-6A51-4108-AA02-DFA0A04FC94B}">
-              <ma14:wrappingTextBoxFlag xmlns:ma14="http://schemas.microsoft.com/office/mac/drawingml/2011/main" val="0"/>
+              <ma14:wrappingTextBoxFlag xmlns:ma14="http://schemas.microsoft.com/office/mac/drawingml/2011/main" xmlns="" val="0"/>
             </a:ext>
           </a:extLst>
         </p:spPr>
@@ -15972,7 +15631,7 @@
           <a:p>
             <a:pPr algn="r"/>
             <a:fld id="{F7021451-1387-4CA6-816F-3879F97B5CBC}" type="slidenum">
-              <a:rPr b="0" lang="en-US"/>
+              <a:rPr lang="en-US" b="0"/>
               <a:t>6</a:t>
             </a:fld>
             <a:endParaRPr lang="en-US"/>
@@ -16007,9 +15666,11 @@
       <p:sp>
         <p:nvSpPr>
           <p:cNvPr id="2" name="Text 0"/>
-          <p:cNvSpPr/>
+          <p:cNvSpPr>
+            <a:spLocks noGrp="1"/>
+          </p:cNvSpPr>
           <p:nvPr>
-            <p:ph idx="100" type="title" hasCustomPrompt="1"/>
+            <p:ph type="title" idx="100" hasCustomPrompt="1"/>
           </p:nvPr>
         </p:nvSpPr>
         <p:spPr>
@@ -16027,7 +15688,7 @@
           <a:bodyPr wrap="square" lIns="0" tIns="0" rIns="0" bIns="0" rtlCol="0" anchor="b"/>
           <a:lstStyle/>
           <a:p>
-            <a:pPr algn="l" indent="0" marL="0">
+            <a:pPr marL="0" indent="0" algn="l">
               <a:buNone/>
             </a:pPr>
             <a:r>
@@ -16048,9 +15709,11 @@
       <p:sp>
         <p:nvSpPr>
           <p:cNvPr id="3" name="Text 0"/>
-          <p:cNvSpPr/>
+          <p:cNvSpPr>
+            <a:spLocks noGrp="1"/>
+          </p:cNvSpPr>
           <p:nvPr>
-            <p:ph idx="101" type="body" hasCustomPrompt="1"/>
+            <p:ph type="body" idx="101" hasCustomPrompt="1"/>
           </p:nvPr>
         </p:nvSpPr>
         <p:spPr>
@@ -16068,7 +15731,7 @@
           <a:bodyPr wrap="square" lIns="0" tIns="0" rIns="0" bIns="0" rtlCol="0" anchor="t"/>
           <a:lstStyle/>
           <a:p>
-            <a:pPr algn="l" indent="0" marL="0">
+            <a:pPr marL="0" indent="0" algn="l">
               <a:buNone/>
             </a:pPr>
             <a:r>
@@ -16106,7 +15769,7 @@
           </a:prstGeom>
           <a:extLst>
             <a:ext uri="{C572A759-6A51-4108-AA02-DFA0A04FC94B}">
-              <ma14:wrappingTextBoxFlag xmlns:ma14="http://schemas.microsoft.com/office/mac/drawingml/2011/main" val="0"/>
+              <ma14:wrappingTextBoxFlag xmlns:ma14="http://schemas.microsoft.com/office/mac/drawingml/2011/main" xmlns="" val="0"/>
             </a:ext>
           </a:extLst>
         </p:spPr>
@@ -16127,7 +15790,7 @@
           <a:p>
             <a:pPr algn="r"/>
             <a:fld id="{F7021451-1387-4CA6-816F-3879F97B5CBC}" type="slidenum">
-              <a:rPr b="0" lang="en-US"/>
+              <a:rPr lang="en-US" b="0"/>
               <a:t>7</a:t>
             </a:fld>
             <a:endParaRPr lang="en-US"/>
@@ -16185,6 +15848,13 @@
             <a:prstDash val="solid"/>
           </a:ln>
         </p:spPr>
+        <p:txBody>
+          <a:bodyPr/>
+          <a:lstStyle/>
+          <a:p>
+            <a:endParaRPr lang="en-US"/>
+          </a:p>
+        </p:txBody>
       </p:sp>
       <p:sp>
         <p:nvSpPr>
@@ -16207,11 +15877,11 @@
           <a:bodyPr wrap="square" lIns="0" tIns="0" rIns="0" bIns="0" rtlCol="0" anchor="ctr"/>
           <a:lstStyle/>
           <a:p>
-            <a:pPr algn="ctr" indent="0" marL="0">
+            <a:pPr marL="0" indent="0" algn="ctr">
               <a:buNone/>
             </a:pPr>
             <a:r>
-              <a:rPr lang="en-US" sz="1000" b="1" spc="100" kern="0" dirty="0">
+              <a:rPr lang="en-US" sz="1000" b="1" kern="0" spc="100" dirty="0">
                 <a:solidFill>
                   <a:srgbClr val="FFFFFF"/>
                 </a:solidFill>
@@ -16225,9 +15895,11 @@
       <p:sp>
         <p:nvSpPr>
           <p:cNvPr id="4" name="Text 0"/>
-          <p:cNvSpPr/>
+          <p:cNvSpPr>
+            <a:spLocks noGrp="1"/>
+          </p:cNvSpPr>
           <p:nvPr>
-            <p:ph idx="100" type="title" hasCustomPrompt="1"/>
+            <p:ph type="title" idx="100" hasCustomPrompt="1"/>
           </p:nvPr>
         </p:nvSpPr>
         <p:spPr>
@@ -16245,7 +15917,7 @@
           <a:bodyPr wrap="square" lIns="0" tIns="0" rIns="0" bIns="0" rtlCol="0" anchor="ctr"/>
           <a:lstStyle/>
           <a:p>
-            <a:pPr algn="l" indent="0" marL="0">
+            <a:pPr marL="0" indent="0" algn="l">
               <a:buNone/>
             </a:pPr>
             <a:r>
@@ -16279,15 +15951,27 @@
         </p:nvGraphicFramePr>
         <p:xfrm>
           <a:off x="457200" y="1280160"/>
-          <a:ext cx="8229600" cy="914400"/>
+          <a:ext cx="8229600" cy="1950720"/>
         </p:xfrm>
         <a:graphic>
           <a:graphicData uri="http://schemas.openxmlformats.org/drawingml/2006/table">
             <a:tbl>
               <a:tblPr/>
               <a:tblGrid>
-                <a:gridCol w="3931920"/>
-                <a:gridCol w="4297680"/>
+                <a:gridCol w="3931920">
+                  <a:extLst>
+                    <a:ext uri="{9D8B030D-6E8A-4147-A177-3AD203B41FA5}">
+                      <a16:colId xmlns:a16="http://schemas.microsoft.com/office/drawing/2014/main" val="20000"/>
+                    </a:ext>
+                  </a:extLst>
+                </a:gridCol>
+                <a:gridCol w="4297680">
+                  <a:extLst>
+                    <a:ext uri="{9D8B030D-6E8A-4147-A177-3AD203B41FA5}">
+                      <a16:colId xmlns:a16="http://schemas.microsoft.com/office/drawing/2014/main" val="20001"/>
+                    </a:ext>
+                  </a:extLst>
+                </a:gridCol>
               </a:tblGrid>
               <a:tr h="0">
                 <a:tc>
@@ -16295,7 +15979,7 @@
                     <a:bodyPr/>
                     <a:lstStyle/>
                     <a:p>
-                      <a:pPr indent="0" marL="0">
+                      <a:pPr marL="0" indent="0">
                         <a:buNone/>
                       </a:pPr>
                       <a:r>
@@ -16363,7 +16047,7 @@
                     <a:bodyPr/>
                     <a:lstStyle/>
                     <a:p>
-                      <a:pPr indent="0" marL="0">
+                      <a:pPr marL="0" indent="0">
                         <a:buNone/>
                       </a:pPr>
                       <a:r>
@@ -16426,6 +16110,11 @@
                     </a:solidFill>
                   </a:tcPr>
                 </a:tc>
+                <a:extLst>
+                  <a:ext uri="{0D108BD9-81ED-4DB2-BD59-A6C34878D82A}">
+                    <a16:rowId xmlns:a16="http://schemas.microsoft.com/office/drawing/2014/main" val="10000"/>
+                  </a:ext>
+                </a:extLst>
               </a:tr>
               <a:tr h="0">
                 <a:tc>
@@ -16433,7 +16122,7 @@
                     <a:bodyPr/>
                     <a:lstStyle/>
                     <a:p>
-                      <a:pPr indent="0" marL="0">
+                      <a:pPr marL="0" indent="0">
                         <a:buNone/>
                       </a:pPr>
                       <a:r>
@@ -16475,7 +16164,7 @@
                     </a:lnR>
                     <a:lnT w="9525" cap="flat" cmpd="sng" algn="ctr">
                       <a:solidFill>
-                        <a:srgbClr val="C9D8BE"/>
+                        <a:srgbClr val="1F3D2B"/>
                       </a:solidFill>
                       <a:prstDash val="solid"/>
                       <a:round/>
@@ -16501,7 +16190,7 @@
                     <a:bodyPr/>
                     <a:lstStyle/>
                     <a:p>
-                      <a:pPr indent="0" marL="0">
+                      <a:pPr marL="0" indent="0">
                         <a:buNone/>
                       </a:pPr>
                       <a:r>
@@ -16543,7 +16232,7 @@
                     </a:lnR>
                     <a:lnT w="9525" cap="flat" cmpd="sng" algn="ctr">
                       <a:solidFill>
-                        <a:srgbClr val="C9D8BE"/>
+                        <a:srgbClr val="1F3D2B"/>
                       </a:solidFill>
                       <a:prstDash val="solid"/>
                       <a:round/>
@@ -16564,6 +16253,11 @@
                     </a:solidFill>
                   </a:tcPr>
                 </a:tc>
+                <a:extLst>
+                  <a:ext uri="{0D108BD9-81ED-4DB2-BD59-A6C34878D82A}">
+                    <a16:rowId xmlns:a16="http://schemas.microsoft.com/office/drawing/2014/main" val="10001"/>
+                  </a:ext>
+                </a:extLst>
               </a:tr>
               <a:tr h="0">
                 <a:tc>
@@ -16571,7 +16265,7 @@
                     <a:bodyPr/>
                     <a:lstStyle/>
                     <a:p>
-                      <a:pPr indent="0" marL="0">
+                      <a:pPr marL="0" indent="0">
                         <a:buNone/>
                       </a:pPr>
                       <a:r>
@@ -16639,7 +16333,7 @@
                     <a:bodyPr/>
                     <a:lstStyle/>
                     <a:p>
-                      <a:pPr indent="0" marL="0">
+                      <a:pPr marL="0" indent="0">
                         <a:buNone/>
                       </a:pPr>
                       <a:r>
@@ -16702,6 +16396,11 @@
                     </a:solidFill>
                   </a:tcPr>
                 </a:tc>
+                <a:extLst>
+                  <a:ext uri="{0D108BD9-81ED-4DB2-BD59-A6C34878D82A}">
+                    <a16:rowId xmlns:a16="http://schemas.microsoft.com/office/drawing/2014/main" val="10002"/>
+                  </a:ext>
+                </a:extLst>
               </a:tr>
               <a:tr h="0">
                 <a:tc>
@@ -16709,7 +16408,7 @@
                     <a:bodyPr/>
                     <a:lstStyle/>
                     <a:p>
-                      <a:pPr indent="0" marL="0">
+                      <a:pPr marL="0" indent="0">
                         <a:buNone/>
                       </a:pPr>
                       <a:r>
@@ -16777,7 +16476,7 @@
                     <a:bodyPr/>
                     <a:lstStyle/>
                     <a:p>
-                      <a:pPr indent="0" marL="0">
+                      <a:pPr marL="0" indent="0">
                         <a:buNone/>
                       </a:pPr>
                       <a:r>
@@ -16840,6 +16539,11 @@
                     </a:solidFill>
                   </a:tcPr>
                 </a:tc>
+                <a:extLst>
+                  <a:ext uri="{0D108BD9-81ED-4DB2-BD59-A6C34878D82A}">
+                    <a16:rowId xmlns:a16="http://schemas.microsoft.com/office/drawing/2014/main" val="10003"/>
+                  </a:ext>
+                </a:extLst>
               </a:tr>
               <a:tr h="0">
                 <a:tc>
@@ -16847,7 +16551,7 @@
                     <a:bodyPr/>
                     <a:lstStyle/>
                     <a:p>
-                      <a:pPr indent="0" marL="0">
+                      <a:pPr marL="0" indent="0">
                         <a:buNone/>
                       </a:pPr>
                       <a:r>
@@ -16915,7 +16619,7 @@
                     <a:bodyPr/>
                     <a:lstStyle/>
                     <a:p>
-                      <a:pPr indent="0" marL="0">
+                      <a:pPr marL="0" indent="0">
                         <a:buNone/>
                       </a:pPr>
                       <a:r>
@@ -16978,6 +16682,11 @@
                     </a:solidFill>
                   </a:tcPr>
                 </a:tc>
+                <a:extLst>
+                  <a:ext uri="{0D108BD9-81ED-4DB2-BD59-A6C34878D82A}">
+                    <a16:rowId xmlns:a16="http://schemas.microsoft.com/office/drawing/2014/main" val="10004"/>
+                  </a:ext>
+                </a:extLst>
               </a:tr>
               <a:tr h="0">
                 <a:tc>
@@ -16985,7 +16694,7 @@
                     <a:bodyPr/>
                     <a:lstStyle/>
                     <a:p>
-                      <a:pPr indent="0" marL="0">
+                      <a:pPr marL="0" indent="0">
                         <a:buNone/>
                       </a:pPr>
                       <a:r>
@@ -17053,7 +16762,7 @@
                     <a:bodyPr/>
                     <a:lstStyle/>
                     <a:p>
-                      <a:pPr indent="0" marL="0">
+                      <a:pPr marL="0" indent="0">
                         <a:buNone/>
                       </a:pPr>
                       <a:r>
@@ -17116,6 +16825,11 @@
                     </a:solidFill>
                   </a:tcPr>
                 </a:tc>
+                <a:extLst>
+                  <a:ext uri="{0D108BD9-81ED-4DB2-BD59-A6C34878D82A}">
+                    <a16:rowId xmlns:a16="http://schemas.microsoft.com/office/drawing/2014/main" val="10005"/>
+                  </a:ext>
+                </a:extLst>
               </a:tr>
             </a:tbl>
           </a:graphicData>
@@ -17147,6 +16861,13 @@
             <a:prstDash val="solid"/>
           </a:ln>
         </p:spPr>
+        <p:txBody>
+          <a:bodyPr/>
+          <a:lstStyle/>
+          <a:p>
+            <a:endParaRPr lang="en-US"/>
+          </a:p>
+        </p:txBody>
       </p:sp>
       <p:sp>
         <p:nvSpPr>
@@ -17169,7 +16890,7 @@
           <a:bodyPr wrap="square" lIns="0" tIns="0" rIns="0" bIns="0" rtlCol="0" anchor="ctr"/>
           <a:lstStyle/>
           <a:p>
-            <a:pPr indent="0" marL="0">
+            <a:pPr marL="0" indent="0">
               <a:buNone/>
             </a:pPr>
             <a:r>
@@ -17183,9 +16904,6 @@
               </a:rPr>
               <a:t>Run it:  </a:t>
             </a:r>
-            <a:pPr indent="0" marL="0">
-              <a:buNone/>
-            </a:pPr>
             <a:r>
               <a:rPr lang="en-US" sz="1500" dirty="0">
                 <a:solidFill>
@@ -17197,9 +16915,6 @@
               </a:rPr>
               <a:t>cp .env.example .env</a:t>
             </a:r>
-            <a:pPr indent="0" marL="0">
-              <a:buNone/>
-            </a:pPr>
             <a:r>
               <a:rPr lang="en-US" sz="1500" dirty="0">
                 <a:solidFill>
@@ -17211,9 +16926,6 @@
               </a:rPr>
               <a:t>   then   </a:t>
             </a:r>
-            <a:pPr indent="0" marL="0">
-              <a:buNone/>
-            </a:pPr>
             <a:r>
               <a:rPr lang="en-US" sz="1500" dirty="0">
                 <a:solidFill>
@@ -17225,9 +16937,6 @@
               </a:rPr>
               <a:t>docker compose watch</a:t>
             </a:r>
-            <a:pPr indent="0" marL="0">
-              <a:buNone/>
-            </a:pPr>
             <a:r>
               <a:rPr lang="en-US" sz="1500" dirty="0">
                 <a:solidFill>
@@ -17263,7 +16972,7 @@
           </a:prstGeom>
           <a:extLst>
             <a:ext uri="{C572A759-6A51-4108-AA02-DFA0A04FC94B}">
-              <ma14:wrappingTextBoxFlag xmlns:ma14="http://schemas.microsoft.com/office/mac/drawingml/2011/main" val="0"/>
+              <ma14:wrappingTextBoxFlag xmlns:ma14="http://schemas.microsoft.com/office/mac/drawingml/2011/main" xmlns="" val="0"/>
             </a:ext>
           </a:extLst>
         </p:spPr>
@@ -17284,7 +16993,7 @@
           <a:p>
             <a:pPr algn="r"/>
             <a:fld id="{F7021451-1387-4CA6-816F-3879F97B5CBC}" type="slidenum">
-              <a:rPr b="0" lang="en-US"/>
+              <a:rPr lang="en-US" b="0"/>
               <a:t>8</a:t>
             </a:fld>
             <a:endParaRPr lang="en-US"/>
@@ -17342,6 +17051,13 @@
             <a:prstDash val="solid"/>
           </a:ln>
         </p:spPr>
+        <p:txBody>
+          <a:bodyPr/>
+          <a:lstStyle/>
+          <a:p>
+            <a:endParaRPr lang="en-US"/>
+          </a:p>
+        </p:txBody>
       </p:sp>
       <p:sp>
         <p:nvSpPr>
@@ -17364,11 +17080,11 @@
           <a:bodyPr wrap="square" lIns="0" tIns="0" rIns="0" bIns="0" rtlCol="0" anchor="ctr"/>
           <a:lstStyle/>
           <a:p>
-            <a:pPr algn="ctr" indent="0" marL="0">
+            <a:pPr marL="0" indent="0" algn="ctr">
               <a:buNone/>
             </a:pPr>
             <a:r>
-              <a:rPr lang="en-US" sz="1000" b="1" spc="100" kern="0" dirty="0">
+              <a:rPr lang="en-US" sz="1000" b="1" kern="0" spc="100" dirty="0">
                 <a:solidFill>
                   <a:srgbClr val="FFFFFF"/>
                 </a:solidFill>
@@ -17382,9 +17098,11 @@
       <p:sp>
         <p:nvSpPr>
           <p:cNvPr id="4" name="Text 0"/>
-          <p:cNvSpPr/>
+          <p:cNvSpPr>
+            <a:spLocks noGrp="1"/>
+          </p:cNvSpPr>
           <p:nvPr>
-            <p:ph idx="100" type="title" hasCustomPrompt="1"/>
+            <p:ph type="title" idx="100" hasCustomPrompt="1"/>
           </p:nvPr>
         </p:nvSpPr>
         <p:spPr>
@@ -17402,7 +17120,7 @@
           <a:bodyPr wrap="square" lIns="0" tIns="0" rIns="0" bIns="0" rtlCol="0" anchor="ctr"/>
           <a:lstStyle/>
           <a:p>
-            <a:pPr algn="l" indent="0" marL="0">
+            <a:pPr marL="0" indent="0" algn="l">
               <a:buNone/>
             </a:pPr>
             <a:r>
@@ -17444,6 +17162,13 @@
             <a:prstDash val="solid"/>
           </a:ln>
         </p:spPr>
+        <p:txBody>
+          <a:bodyPr/>
+          <a:lstStyle/>
+          <a:p>
+            <a:endParaRPr lang="en-US"/>
+          </a:p>
+        </p:txBody>
       </p:sp>
       <p:sp>
         <p:nvSpPr>
@@ -17466,7 +17191,7 @@
           <a:bodyPr wrap="square" lIns="0" tIns="0" rIns="0" bIns="0" rtlCol="0" anchor="ctr"/>
           <a:lstStyle/>
           <a:p>
-            <a:pPr algn="ctr" indent="0" marL="0">
+            <a:pPr marL="0" indent="0" algn="ctr">
               <a:buNone/>
             </a:pPr>
             <a:r>
@@ -17502,7 +17227,7 @@
           <a:bodyPr wrap="square" lIns="0" tIns="0" rIns="0" bIns="0" rtlCol="0" anchor="ctr"/>
           <a:lstStyle/>
           <a:p>
-            <a:pPr indent="0" marL="0">
+            <a:pPr marL="0" indent="0">
               <a:buNone/>
             </a:pPr>
             <a:r>
@@ -17513,9 +17238,6 @@
               </a:rPr>
               <a:t>Shelf  </a:t>
             </a:r>
-            <a:pPr indent="0" marL="0">
-              <a:buNone/>
-            </a:pPr>
             <a:r>
               <a:rPr lang="en-US" sz="1200" dirty="0">
                 <a:solidFill>
@@ -17530,7 +17252,7 @@
             <a:endParaRPr lang="en-US" sz="1600" dirty="0"/>
           </a:p>
           <a:p>
-            <a:pPr indent="0" marL="0">
+            <a:pPr marL="0" indent="0">
               <a:buNone/>
             </a:pPr>
             <a:r>
@@ -17569,6 +17291,13 @@
             <a:prstDash val="solid"/>
           </a:ln>
         </p:spPr>
+        <p:txBody>
+          <a:bodyPr/>
+          <a:lstStyle/>
+          <a:p>
+            <a:endParaRPr lang="en-US"/>
+          </a:p>
+        </p:txBody>
       </p:sp>
       <p:sp>
         <p:nvSpPr>
@@ -17591,7 +17320,7 @@
           <a:bodyPr wrap="square" lIns="0" tIns="0" rIns="0" bIns="0" rtlCol="0" anchor="ctr"/>
           <a:lstStyle/>
           <a:p>
-            <a:pPr algn="ctr" indent="0" marL="0">
+            <a:pPr marL="0" indent="0" algn="ctr">
               <a:buNone/>
             </a:pPr>
             <a:r>
@@ -17627,7 +17356,7 @@
           <a:bodyPr wrap="square" lIns="0" tIns="0" rIns="0" bIns="0" rtlCol="0" anchor="ctr"/>
           <a:lstStyle/>
           <a:p>
-            <a:pPr indent="0" marL="0">
+            <a:pPr marL="0" indent="0">
               <a:buNone/>
             </a:pPr>
             <a:r>
@@ -17638,9 +17367,6 @@
               </a:rPr>
               <a:t>Item  </a:t>
             </a:r>
-            <a:pPr indent="0" marL="0">
-              <a:buNone/>
-            </a:pPr>
             <a:r>
               <a:rPr lang="en-US" sz="1200" dirty="0">
                 <a:solidFill>
@@ -17655,7 +17381,7 @@
             <a:endParaRPr lang="en-US" sz="1600" dirty="0"/>
           </a:p>
           <a:p>
-            <a:pPr indent="0" marL="0">
+            <a:pPr marL="0" indent="0">
               <a:buNone/>
             </a:pPr>
             <a:r>
@@ -17694,6 +17420,13 @@
             <a:prstDash val="solid"/>
           </a:ln>
         </p:spPr>
+        <p:txBody>
+          <a:bodyPr/>
+          <a:lstStyle/>
+          <a:p>
+            <a:endParaRPr lang="en-US"/>
+          </a:p>
+        </p:txBody>
       </p:sp>
       <p:sp>
         <p:nvSpPr>
@@ -17716,7 +17449,7 @@
           <a:bodyPr wrap="square" lIns="0" tIns="0" rIns="0" bIns="0" rtlCol="0" anchor="ctr"/>
           <a:lstStyle/>
           <a:p>
-            <a:pPr algn="ctr" indent="0" marL="0">
+            <a:pPr marL="0" indent="0" algn="ctr">
               <a:buNone/>
             </a:pPr>
             <a:r>
@@ -17752,7 +17485,7 @@
           <a:bodyPr wrap="square" lIns="0" tIns="0" rIns="0" bIns="0" rtlCol="0" anchor="ctr"/>
           <a:lstStyle/>
           <a:p>
-            <a:pPr indent="0" marL="0">
+            <a:pPr marL="0" indent="0">
               <a:buNone/>
             </a:pPr>
             <a:r>
@@ -17763,9 +17496,6 @@
               </a:rPr>
               <a:t>Add / edit  </a:t>
             </a:r>
-            <a:pPr indent="0" marL="0">
-              <a:buNone/>
-            </a:pPr>
             <a:r>
               <a:rPr lang="en-US" sz="1200" dirty="0">
                 <a:solidFill>
@@ -17780,7 +17510,7 @@
             <a:endParaRPr lang="en-US" sz="1600" dirty="0"/>
           </a:p>
           <a:p>
-            <a:pPr indent="0" marL="0">
+            <a:pPr marL="0" indent="0">
               <a:buNone/>
             </a:pPr>
             <a:r>
@@ -17816,7 +17546,7 @@
           <a:bodyPr wrap="square" lIns="0" tIns="0" rIns="0" bIns="0" rtlCol="0" anchor="ctr"/>
           <a:lstStyle/>
           <a:p>
-            <a:pPr indent="0" marL="0">
+            <a:pPr marL="0" indent="0">
               <a:buNone/>
             </a:pPr>
             <a:r>
@@ -17857,6 +17587,13 @@
             <a:prstDash val="solid"/>
           </a:ln>
         </p:spPr>
+        <p:txBody>
+          <a:bodyPr/>
+          <a:lstStyle/>
+          <a:p>
+            <a:endParaRPr lang="en-US"/>
+          </a:p>
+        </p:txBody>
       </p:sp>
       <p:sp>
         <p:nvSpPr>
@@ -17879,7 +17616,7 @@
           <a:bodyPr wrap="square" lIns="0" tIns="0" rIns="0" bIns="0" rtlCol="0" anchor="t"/>
           <a:lstStyle/>
           <a:p>
-            <a:pPr indent="0" marL="0">
+            <a:pPr marL="0" indent="0">
               <a:spcAft>
                 <a:spcPts val="600"/>
               </a:spcAft>
@@ -17896,7 +17633,7 @@
             <a:endParaRPr lang="en-US" sz="1500" dirty="0"/>
           </a:p>
           <a:p>
-            <a:pPr indent="0" marL="0">
+            <a:pPr marL="0" indent="0">
               <a:buNone/>
             </a:pPr>
             <a:r>
@@ -17913,14 +17650,14 @@
       </p:sp>
       <p:pic>
         <p:nvPicPr>
-          <p:cNvPr id="17" name="shot-form" descr="The add-item form on a phone, showing two error messages">    </p:cNvPr>
+          <p:cNvPr id="17" name="shot-form" descr="The add-item form on a phone, showing two error messages"/>
           <p:cNvPicPr>
             <a:picLocks noChangeAspect="1"/>
           </p:cNvPicPr>
           <p:nvPr/>
         </p:nvPicPr>
         <p:blipFill>
-          <a:blip r:embed="rId1"/>
+          <a:blip r:embed="rId3"/>
           <a:stretch>
             <a:fillRect/>
           </a:stretch>
@@ -17955,7 +17692,7 @@
           </a:prstGeom>
           <a:extLst>
             <a:ext uri="{C572A759-6A51-4108-AA02-DFA0A04FC94B}">
-              <ma14:wrappingTextBoxFlag xmlns:ma14="http://schemas.microsoft.com/office/mac/drawingml/2011/main" val="0"/>
+              <ma14:wrappingTextBoxFlag xmlns:ma14="http://schemas.microsoft.com/office/mac/drawingml/2011/main" xmlns="" val="0"/>
             </a:ext>
           </a:extLst>
         </p:spPr>
@@ -17976,7 +17713,7 @@
           <a:p>
             <a:pPr algn="r"/>
             <a:fld id="{F7021451-1387-4CA6-816F-3879F97B5CBC}" type="slidenum">
-              <a:rPr b="0" lang="en-US"/>
+              <a:rPr lang="en-US" b="0"/>
               <a:t>9</a:t>
             </a:fld>
             <a:endParaRPr lang="en-US"/>
@@ -18284,4 +18021,319 @@
     </a:ext>
   </a:extLst>
 </a:theme>
+</file>
+
+<file path=ppt/theme/theme2.xml><?xml version="1.0" encoding="utf-8"?>
+<a:theme xmlns:a="http://schemas.openxmlformats.org/drawingml/2006/main" name="Office Theme">
+  <a:themeElements>
+    <a:clrScheme name="Office">
+      <a:dk1>
+        <a:sysClr val="windowText" lastClr="000000"/>
+      </a:dk1>
+      <a:lt1>
+        <a:sysClr val="window" lastClr="FFFFFF"/>
+      </a:lt1>
+      <a:dk2>
+        <a:srgbClr val="0E2841"/>
+      </a:dk2>
+      <a:lt2>
+        <a:srgbClr val="E8E8E8"/>
+      </a:lt2>
+      <a:accent1>
+        <a:srgbClr val="156082"/>
+      </a:accent1>
+      <a:accent2>
+        <a:srgbClr val="E97132"/>
+      </a:accent2>
+      <a:accent3>
+        <a:srgbClr val="196B24"/>
+      </a:accent3>
+      <a:accent4>
+        <a:srgbClr val="0F9ED5"/>
+      </a:accent4>
+      <a:accent5>
+        <a:srgbClr val="A02B93"/>
+      </a:accent5>
+      <a:accent6>
+        <a:srgbClr val="4EA72E"/>
+      </a:accent6>
+      <a:hlink>
+        <a:srgbClr val="467886"/>
+      </a:hlink>
+      <a:folHlink>
+        <a:srgbClr val="96607D"/>
+      </a:folHlink>
+    </a:clrScheme>
+    <a:fontScheme name="Office">
+      <a:majorFont>
+        <a:latin typeface="Aptos Display" panose="02110004020202020204"/>
+        <a:ea typeface=""/>
+        <a:cs typeface=""/>
+        <a:font script="Jpan" typeface="游ゴシック Light"/>
+        <a:font script="Hang" typeface="맑은 고딕"/>
+        <a:font script="Hans" typeface="等线 Light"/>
+        <a:font script="Hant" typeface="新細明體"/>
+        <a:font script="Arab" typeface="Times New Roman"/>
+        <a:font script="Hebr" typeface="Times New Roman"/>
+        <a:font script="Thai" typeface="Angsana New"/>
+        <a:font script="Ethi" typeface="Nyala"/>
+        <a:font script="Beng" typeface="Vrinda"/>
+        <a:font script="Gujr" typeface="Shruti"/>
+        <a:font script="Khmr" typeface="MoolBoran"/>
+        <a:font script="Knda" typeface="Tunga"/>
+        <a:font script="Guru" typeface="Raavi"/>
+        <a:font script="Cans" typeface="Euphemia"/>
+        <a:font script="Cher" typeface="Plantagenet Cherokee"/>
+        <a:font script="Yiii" typeface="Microsoft Yi Baiti"/>
+        <a:font script="Tibt" typeface="Microsoft Himalaya"/>
+        <a:font script="Thaa" typeface="MV Boli"/>
+        <a:font script="Deva" typeface="Mangal"/>
+        <a:font script="Telu" typeface="Gautami"/>
+        <a:font script="Taml" typeface="Latha"/>
+        <a:font script="Syrc" typeface="Estrangelo Edessa"/>
+        <a:font script="Orya" typeface="Kalinga"/>
+        <a:font script="Mlym" typeface="Kartika"/>
+        <a:font script="Laoo" typeface="DokChampa"/>
+        <a:font script="Sinh" typeface="Iskoola Pota"/>
+        <a:font script="Mong" typeface="Mongolian Baiti"/>
+        <a:font script="Viet" typeface="Times New Roman"/>
+        <a:font script="Uigh" typeface="Microsoft Uighur"/>
+        <a:font script="Geor" typeface="Sylfaen"/>
+        <a:font script="Armn" typeface="Arial"/>
+        <a:font script="Bugi" typeface="Leelawadee UI"/>
+        <a:font script="Bopo" typeface="Microsoft JhengHei"/>
+        <a:font script="Java" typeface="Javanese Text"/>
+        <a:font script="Lisu" typeface="Segoe UI"/>
+        <a:font script="Mymr" typeface="Myanmar Text"/>
+        <a:font script="Nkoo" typeface="Ebrima"/>
+        <a:font script="Olck" typeface="Nirmala UI"/>
+        <a:font script="Osma" typeface="Ebrima"/>
+        <a:font script="Phag" typeface="Phagspa"/>
+        <a:font script="Syrn" typeface="Estrangelo Edessa"/>
+        <a:font script="Syrj" typeface="Estrangelo Edessa"/>
+        <a:font script="Syre" typeface="Estrangelo Edessa"/>
+        <a:font script="Sora" typeface="Nirmala UI"/>
+        <a:font script="Tale" typeface="Microsoft Tai Le"/>
+        <a:font script="Talu" typeface="Microsoft New Tai Lue"/>
+        <a:font script="Tfng" typeface="Ebrima"/>
+      </a:majorFont>
+      <a:minorFont>
+        <a:latin typeface="Aptos" panose="02110004020202020204"/>
+        <a:ea typeface=""/>
+        <a:cs typeface=""/>
+        <a:font script="Jpan" typeface="游ゴシック"/>
+        <a:font script="Hang" typeface="맑은 고딕"/>
+        <a:font script="Hans" typeface="等线"/>
+        <a:font script="Hant" typeface="新細明體"/>
+        <a:font script="Arab" typeface="Arial"/>
+        <a:font script="Hebr" typeface="Arial"/>
+        <a:font script="Thai" typeface="Cordia New"/>
+        <a:font script="Ethi" typeface="Nyala"/>
+        <a:font script="Beng" typeface="Vrinda"/>
+        <a:font script="Gujr" typeface="Shruti"/>
+        <a:font script="Khmr" typeface="DaunPenh"/>
+        <a:font script="Knda" typeface="Tunga"/>
+        <a:font script="Guru" typeface="Raavi"/>
+        <a:font script="Cans" typeface="Euphemia"/>
+        <a:font script="Cher" typeface="Plantagenet Cherokee"/>
+        <a:font script="Yiii" typeface="Microsoft Yi Baiti"/>
+        <a:font script="Tibt" typeface="Microsoft Himalaya"/>
+        <a:font script="Thaa" typeface="MV Boli"/>
+        <a:font script="Deva" typeface="Mangal"/>
+        <a:font script="Telu" typeface="Gautami"/>
+        <a:font script="Taml" typeface="Latha"/>
+        <a:font script="Syrc" typeface="Estrangelo Edessa"/>
+        <a:font script="Orya" typeface="Kalinga"/>
+        <a:font script="Mlym" typeface="Kartika"/>
+        <a:font script="Laoo" typeface="DokChampa"/>
+        <a:font script="Sinh" typeface="Iskoola Pota"/>
+        <a:font script="Mong" typeface="Mongolian Baiti"/>
+        <a:font script="Viet" typeface="Arial"/>
+        <a:font script="Uigh" typeface="Microsoft Uighur"/>
+        <a:font script="Geor" typeface="Sylfaen"/>
+        <a:font script="Armn" typeface="Arial"/>
+        <a:font script="Bugi" typeface="Leelawadee UI"/>
+        <a:font script="Bopo" typeface="Microsoft JhengHei"/>
+        <a:font script="Java" typeface="Javanese Text"/>
+        <a:font script="Lisu" typeface="Segoe UI"/>
+        <a:font script="Mymr" typeface="Myanmar Text"/>
+        <a:font script="Nkoo" typeface="Ebrima"/>
+        <a:font script="Olck" typeface="Nirmala UI"/>
+        <a:font script="Osma" typeface="Ebrima"/>
+        <a:font script="Phag" typeface="Phagspa"/>
+        <a:font script="Syrn" typeface="Estrangelo Edessa"/>
+        <a:font script="Syrj" typeface="Estrangelo Edessa"/>
+        <a:font script="Syre" typeface="Estrangelo Edessa"/>
+        <a:font script="Sora" typeface="Nirmala UI"/>
+        <a:font script="Tale" typeface="Microsoft Tai Le"/>
+        <a:font script="Talu" typeface="Microsoft New Tai Lue"/>
+        <a:font script="Tfng" typeface="Ebrima"/>
+      </a:minorFont>
+    </a:fontScheme>
+    <a:fmtScheme name="Office">
+      <a:fillStyleLst>
+        <a:solidFill>
+          <a:schemeClr val="phClr"/>
+        </a:solidFill>
+        <a:gradFill rotWithShape="1">
+          <a:gsLst>
+            <a:gs pos="0">
+              <a:schemeClr val="phClr">
+                <a:lumMod val="110000"/>
+                <a:satMod val="105000"/>
+                <a:tint val="67000"/>
+              </a:schemeClr>
+            </a:gs>
+            <a:gs pos="50000">
+              <a:schemeClr val="phClr">
+                <a:lumMod val="105000"/>
+                <a:satMod val="103000"/>
+                <a:tint val="73000"/>
+              </a:schemeClr>
+            </a:gs>
+            <a:gs pos="100000">
+              <a:schemeClr val="phClr">
+                <a:lumMod val="105000"/>
+                <a:satMod val="109000"/>
+                <a:tint val="81000"/>
+              </a:schemeClr>
+            </a:gs>
+          </a:gsLst>
+          <a:lin ang="5400000" scaled="0"/>
+        </a:gradFill>
+        <a:gradFill rotWithShape="1">
+          <a:gsLst>
+            <a:gs pos="0">
+              <a:schemeClr val="phClr">
+                <a:satMod val="103000"/>
+                <a:lumMod val="102000"/>
+                <a:tint val="94000"/>
+              </a:schemeClr>
+            </a:gs>
+            <a:gs pos="50000">
+              <a:schemeClr val="phClr">
+                <a:satMod val="110000"/>
+                <a:lumMod val="100000"/>
+                <a:shade val="100000"/>
+              </a:schemeClr>
+            </a:gs>
+            <a:gs pos="100000">
+              <a:schemeClr val="phClr">
+                <a:lumMod val="99000"/>
+                <a:satMod val="120000"/>
+                <a:shade val="78000"/>
+              </a:schemeClr>
+            </a:gs>
+          </a:gsLst>
+          <a:lin ang="5400000" scaled="0"/>
+        </a:gradFill>
+      </a:fillStyleLst>
+      <a:lnStyleLst>
+        <a:ln w="12700" cap="flat" cmpd="sng" algn="ctr">
+          <a:solidFill>
+            <a:schemeClr val="phClr"/>
+          </a:solidFill>
+          <a:prstDash val="solid"/>
+          <a:miter lim="800000"/>
+        </a:ln>
+        <a:ln w="19050" cap="flat" cmpd="sng" algn="ctr">
+          <a:solidFill>
+            <a:schemeClr val="phClr"/>
+          </a:solidFill>
+          <a:prstDash val="solid"/>
+          <a:miter lim="800000"/>
+        </a:ln>
+        <a:ln w="25400" cap="flat" cmpd="sng" algn="ctr">
+          <a:solidFill>
+            <a:schemeClr val="phClr"/>
+          </a:solidFill>
+          <a:prstDash val="solid"/>
+          <a:miter lim="800000"/>
+        </a:ln>
+      </a:lnStyleLst>
+      <a:effectStyleLst>
+        <a:effectStyle>
+          <a:effectLst/>
+        </a:effectStyle>
+        <a:effectStyle>
+          <a:effectLst/>
+        </a:effectStyle>
+        <a:effectStyle>
+          <a:effectLst>
+            <a:outerShdw blurRad="57150" dist="19050" dir="5400000" algn="ctr" rotWithShape="0">
+              <a:srgbClr val="000000">
+                <a:alpha val="63000"/>
+              </a:srgbClr>
+            </a:outerShdw>
+          </a:effectLst>
+        </a:effectStyle>
+      </a:effectStyleLst>
+      <a:bgFillStyleLst>
+        <a:solidFill>
+          <a:schemeClr val="phClr"/>
+        </a:solidFill>
+        <a:solidFill>
+          <a:schemeClr val="phClr">
+            <a:tint val="95000"/>
+            <a:satMod val="170000"/>
+          </a:schemeClr>
+        </a:solidFill>
+        <a:gradFill rotWithShape="1">
+          <a:gsLst>
+            <a:gs pos="0">
+              <a:schemeClr val="phClr">
+                <a:tint val="93000"/>
+                <a:satMod val="150000"/>
+                <a:shade val="98000"/>
+                <a:lumMod val="102000"/>
+              </a:schemeClr>
+            </a:gs>
+            <a:gs pos="50000">
+              <a:schemeClr val="phClr">
+                <a:tint val="98000"/>
+                <a:satMod val="130000"/>
+                <a:shade val="90000"/>
+                <a:lumMod val="103000"/>
+              </a:schemeClr>
+            </a:gs>
+            <a:gs pos="100000">
+              <a:schemeClr val="phClr">
+                <a:shade val="63000"/>
+                <a:satMod val="120000"/>
+              </a:schemeClr>
+            </a:gs>
+          </a:gsLst>
+          <a:lin ang="5400000" scaled="0"/>
+        </a:gradFill>
+      </a:bgFillStyleLst>
+    </a:fmtScheme>
+  </a:themeElements>
+  <a:objectDefaults>
+    <a:lnDef>
+      <a:spPr/>
+      <a:bodyPr/>
+      <a:lstStyle/>
+      <a:style>
+        <a:lnRef idx="2">
+          <a:schemeClr val="accent1"/>
+        </a:lnRef>
+        <a:fillRef idx="0">
+          <a:schemeClr val="accent1"/>
+        </a:fillRef>
+        <a:effectRef idx="1">
+          <a:schemeClr val="accent1"/>
+        </a:effectRef>
+        <a:fontRef idx="minor">
+          <a:schemeClr val="tx1"/>
+        </a:fontRef>
+      </a:style>
+    </a:lnDef>
+  </a:objectDefaults>
+  <a:extraClrSchemeLst/>
+  <a:extLst>
+    <a:ext uri="{05A4C25C-085E-4340-85A3-A5531E510DB2}">
+      <thm15:themeFamily xmlns:thm15="http://schemas.microsoft.com/office/thememl/2012/main" name="Office Theme" id="{2E142A2C-CD16-42D6-873A-C26D2A0506FA}" vid="{1BDDFF52-6CD6-40A5-AB3C-68EB2F1E4D0A}"/>
+    </a:ext>
+  </a:extLst>
+</a:theme>
 </file>